--- a/reference_material/slides/013_Probability_and_Bayes.pptx
+++ b/reference_material/slides/013_Probability_and_Bayes.pptx
@@ -11,27 +11,39 @@
     <p:sldId id="264" r:id="rId5"/>
     <p:sldId id="265" r:id="rId6"/>
     <p:sldId id="271" r:id="rId7"/>
-    <p:sldId id="258" r:id="rId8"/>
-    <p:sldId id="257" r:id="rId9"/>
-    <p:sldId id="279" r:id="rId10"/>
-    <p:sldId id="259" r:id="rId11"/>
-    <p:sldId id="260" r:id="rId12"/>
-    <p:sldId id="261" r:id="rId13"/>
-    <p:sldId id="262" r:id="rId14"/>
-    <p:sldId id="274" r:id="rId15"/>
-    <p:sldId id="281" r:id="rId16"/>
-    <p:sldId id="267" r:id="rId17"/>
-    <p:sldId id="272" r:id="rId18"/>
-    <p:sldId id="280" r:id="rId19"/>
-    <p:sldId id="273" r:id="rId20"/>
-    <p:sldId id="275" r:id="rId21"/>
-    <p:sldId id="282" r:id="rId22"/>
-    <p:sldId id="276" r:id="rId23"/>
-    <p:sldId id="266" r:id="rId24"/>
-    <p:sldId id="277" r:id="rId25"/>
-    <p:sldId id="268" r:id="rId26"/>
-    <p:sldId id="263" r:id="rId27"/>
-    <p:sldId id="269" r:id="rId28"/>
+    <p:sldId id="293" r:id="rId8"/>
+    <p:sldId id="287" r:id="rId9"/>
+    <p:sldId id="288" r:id="rId10"/>
+    <p:sldId id="258" r:id="rId11"/>
+    <p:sldId id="257" r:id="rId12"/>
+    <p:sldId id="279" r:id="rId13"/>
+    <p:sldId id="283" r:id="rId14"/>
+    <p:sldId id="259" r:id="rId15"/>
+    <p:sldId id="294" r:id="rId16"/>
+    <p:sldId id="260" r:id="rId17"/>
+    <p:sldId id="261" r:id="rId18"/>
+    <p:sldId id="284" r:id="rId19"/>
+    <p:sldId id="262" r:id="rId20"/>
+    <p:sldId id="295" r:id="rId21"/>
+    <p:sldId id="285" r:id="rId22"/>
+    <p:sldId id="289" r:id="rId23"/>
+    <p:sldId id="274" r:id="rId24"/>
+    <p:sldId id="281" r:id="rId25"/>
+    <p:sldId id="291" r:id="rId26"/>
+    <p:sldId id="267" r:id="rId27"/>
+    <p:sldId id="272" r:id="rId28"/>
+    <p:sldId id="273" r:id="rId29"/>
+    <p:sldId id="290" r:id="rId30"/>
+    <p:sldId id="275" r:id="rId31"/>
+    <p:sldId id="282" r:id="rId32"/>
+    <p:sldId id="292" r:id="rId33"/>
+    <p:sldId id="276" r:id="rId34"/>
+    <p:sldId id="266" r:id="rId35"/>
+    <p:sldId id="277" r:id="rId36"/>
+    <p:sldId id="268" r:id="rId37"/>
+    <p:sldId id="286" r:id="rId38"/>
+    <p:sldId id="263" r:id="rId39"/>
+    <p:sldId id="269" r:id="rId40"/>
   </p:sldIdLst>
   <p:sldSz cx="12192000" cy="6858000"/>
   <p:notesSz cx="6858000" cy="9144000"/>
@@ -277,7 +289,7 @@
           <a:p>
             <a:fld id="{38EBEB88-524C-934C-AA67-A5128709C9CE}" type="datetimeFigureOut">
               <a:rPr lang="en-US" smtClean="0"/>
-              <a:t>10/17/25</a:t>
+              <a:t>9/29/26</a:t>
             </a:fld>
             <a:endParaRPr lang="en-US"/>
           </a:p>
@@ -488,7 +500,7 @@
           <a:p>
             <a:fld id="{38EBEB88-524C-934C-AA67-A5128709C9CE}" type="datetimeFigureOut">
               <a:rPr lang="en-US" smtClean="0"/>
-              <a:t>10/17/25</a:t>
+              <a:t>9/29/26</a:t>
             </a:fld>
             <a:endParaRPr lang="en-US"/>
           </a:p>
@@ -703,7 +715,7 @@
           <a:p>
             <a:fld id="{38EBEB88-524C-934C-AA67-A5128709C9CE}" type="datetimeFigureOut">
               <a:rPr lang="en-US" smtClean="0"/>
-              <a:t>10/17/25</a:t>
+              <a:t>9/29/26</a:t>
             </a:fld>
             <a:endParaRPr lang="en-US"/>
           </a:p>
@@ -904,7 +916,7 @@
           <a:p>
             <a:fld id="{38EBEB88-524C-934C-AA67-A5128709C9CE}" type="datetimeFigureOut">
               <a:rPr lang="en-US" smtClean="0"/>
-              <a:t>10/17/25</a:t>
+              <a:t>9/29/26</a:t>
             </a:fld>
             <a:endParaRPr lang="en-US"/>
           </a:p>
@@ -1183,7 +1195,7 @@
           <a:p>
             <a:fld id="{38EBEB88-524C-934C-AA67-A5128709C9CE}" type="datetimeFigureOut">
               <a:rPr lang="en-US" smtClean="0"/>
-              <a:t>10/17/25</a:t>
+              <a:t>9/29/26</a:t>
             </a:fld>
             <a:endParaRPr lang="en-US"/>
           </a:p>
@@ -1451,7 +1463,7 @@
           <a:p>
             <a:fld id="{38EBEB88-524C-934C-AA67-A5128709C9CE}" type="datetimeFigureOut">
               <a:rPr lang="en-US" smtClean="0"/>
-              <a:t>10/17/25</a:t>
+              <a:t>9/29/26</a:t>
             </a:fld>
             <a:endParaRPr lang="en-US"/>
           </a:p>
@@ -1867,7 +1879,7 @@
           <a:p>
             <a:fld id="{38EBEB88-524C-934C-AA67-A5128709C9CE}" type="datetimeFigureOut">
               <a:rPr lang="en-US" smtClean="0"/>
-              <a:t>10/17/25</a:t>
+              <a:t>9/29/26</a:t>
             </a:fld>
             <a:endParaRPr lang="en-US"/>
           </a:p>
@@ -2016,7 +2028,7 @@
           <a:p>
             <a:fld id="{38EBEB88-524C-934C-AA67-A5128709C9CE}" type="datetimeFigureOut">
               <a:rPr lang="en-US" smtClean="0"/>
-              <a:t>10/17/25</a:t>
+              <a:t>9/29/26</a:t>
             </a:fld>
             <a:endParaRPr lang="en-US"/>
           </a:p>
@@ -2142,7 +2154,7 @@
           <a:p>
             <a:fld id="{38EBEB88-524C-934C-AA67-A5128709C9CE}" type="datetimeFigureOut">
               <a:rPr lang="en-US" smtClean="0"/>
-              <a:t>10/17/25</a:t>
+              <a:t>9/29/26</a:t>
             </a:fld>
             <a:endParaRPr lang="en-US"/>
           </a:p>
@@ -2393,7 +2405,7 @@
           <a:p>
             <a:fld id="{38EBEB88-524C-934C-AA67-A5128709C9CE}" type="datetimeFigureOut">
               <a:rPr lang="en-US" smtClean="0"/>
-              <a:t>10/17/25</a:t>
+              <a:t>9/29/26</a:t>
             </a:fld>
             <a:endParaRPr lang="en-US"/>
           </a:p>
@@ -2838,7 +2850,7 @@
           <a:p>
             <a:fld id="{38EBEB88-524C-934C-AA67-A5128709C9CE}" type="datetimeFigureOut">
               <a:rPr lang="en-US" smtClean="0"/>
-              <a:t>10/17/25</a:t>
+              <a:t>9/29/26</a:t>
             </a:fld>
             <a:endParaRPr lang="en-US"/>
           </a:p>
@@ -3172,7 +3184,7 @@
           <a:p>
             <a:fld id="{38EBEB88-524C-934C-AA67-A5128709C9CE}" type="datetimeFigureOut">
               <a:rPr lang="en-US" smtClean="0"/>
-              <a:t>10/17/25</a:t>
+              <a:t>9/29/26</a:t>
             </a:fld>
             <a:endParaRPr lang="en-US"/>
           </a:p>
@@ -3704,8 +3716,8 @@
         </p:nvSpPr>
         <p:spPr>
           <a:xfrm>
-            <a:off x="1451579" y="2015732"/>
-            <a:ext cx="9603275" cy="4037749"/>
+            <a:off x="1451579" y="1853754"/>
+            <a:ext cx="9603275" cy="4199727"/>
           </a:xfrm>
         </p:spPr>
         <p:txBody>
@@ -3736,47 +3748,6 @@
             <a:r>
               <a:rPr lang="en-US" dirty="0"/>
               <a:t>Odds and logits. </a:t>
-            </a:r>
-          </a:p>
-          <a:p>
-            <a:r>
-              <a:rPr lang="en-US" dirty="0"/>
-              <a:t>Sampling and estimation. (Chapter 8 now, read ch9 soon-</a:t>
-            </a:r>
-            <a:r>
-              <a:rPr lang="en-US" dirty="0" err="1"/>
-              <a:t>ish</a:t>
-            </a:r>
-            <a:r>
-              <a:rPr lang="en-US" dirty="0"/>
-              <a:t> as well)</a:t>
-            </a:r>
-          </a:p>
-          <a:p>
-            <a:pPr lvl="1"/>
-            <a:r>
-              <a:rPr lang="en-US" dirty="0"/>
-              <a:t>Population vs sample, confidence. </a:t>
-            </a:r>
-          </a:p>
-          <a:p>
-            <a:pPr lvl="1"/>
-            <a:r>
-              <a:rPr lang="en-US" dirty="0"/>
-              <a:t>Simulation and trial coding and tabulation. </a:t>
-            </a:r>
-          </a:p>
-          <a:p>
-            <a:pPr lvl="1"/>
-            <a:r>
-              <a:rPr lang="en-US" dirty="0"/>
-              <a:t>Generalizing from a sample, yay inferential stats! </a:t>
-            </a:r>
-          </a:p>
-          <a:p>
-            <a:r>
-              <a:rPr lang="en-US" dirty="0"/>
-              <a:t>Next – comparing distributions (similar, slightly more complex). </a:t>
             </a:r>
           </a:p>
         </p:txBody>
@@ -3795,6 +3766,632 @@
 </file>
 
 <file path=ppt/slides/slide10.xml><?xml version="1.0" encoding="utf-8"?>
+<p:sld xmlns:a="http://schemas.openxmlformats.org/drawingml/2006/main" xmlns:r="http://schemas.openxmlformats.org/officeDocument/2006/relationships" xmlns:p="http://schemas.openxmlformats.org/presentationml/2006/main">
+  <p:cSld>
+    <p:spTree>
+      <p:nvGrpSpPr>
+        <p:cNvPr id="1" name=""/>
+        <p:cNvGrpSpPr/>
+        <p:nvPr/>
+      </p:nvGrpSpPr>
+      <p:grpSpPr>
+        <a:xfrm>
+          <a:off x="0" y="0"/>
+          <a:ext cx="0" cy="0"/>
+          <a:chOff x="0" y="0"/>
+          <a:chExt cx="0" cy="0"/>
+        </a:xfrm>
+      </p:grpSpPr>
+      <p:sp>
+        <p:nvSpPr>
+          <p:cNvPr id="2" name="Title 1">
+            <a:extLst>
+              <a:ext uri="{FF2B5EF4-FFF2-40B4-BE49-F238E27FC236}">
+                <a16:creationId xmlns:a16="http://schemas.microsoft.com/office/drawing/2014/main" id="{3D786B20-D5EC-CF4F-8C37-924A9298E58D}"/>
+              </a:ext>
+            </a:extLst>
+          </p:cNvPr>
+          <p:cNvSpPr>
+            <a:spLocks noGrp="1"/>
+          </p:cNvSpPr>
+          <p:nvPr>
+            <p:ph type="title"/>
+          </p:nvPr>
+        </p:nvSpPr>
+        <p:spPr/>
+        <p:txBody>
+          <a:bodyPr/>
+          <a:lstStyle/>
+          <a:p>
+            <a:r>
+              <a:rPr lang="en-US" dirty="0"/>
+              <a:t>What’s the Probability? </a:t>
+            </a:r>
+          </a:p>
+        </p:txBody>
+      </p:sp>
+      <p:sp>
+        <p:nvSpPr>
+          <p:cNvPr id="3" name="Content Placeholder 2">
+            <a:extLst>
+              <a:ext uri="{FF2B5EF4-FFF2-40B4-BE49-F238E27FC236}">
+                <a16:creationId xmlns:a16="http://schemas.microsoft.com/office/drawing/2014/main" id="{3C7917E6-EC70-C540-B629-F6D3990AB300}"/>
+              </a:ext>
+            </a:extLst>
+          </p:cNvPr>
+          <p:cNvSpPr>
+            <a:spLocks noGrp="1"/>
+          </p:cNvSpPr>
+          <p:nvPr>
+            <p:ph idx="1"/>
+          </p:nvPr>
+        </p:nvSpPr>
+        <p:spPr>
+          <a:xfrm>
+            <a:off x="1451579" y="1853754"/>
+            <a:ext cx="9603275" cy="4308507"/>
+          </a:xfrm>
+        </p:spPr>
+        <p:txBody>
+          <a:bodyPr>
+            <a:normAutofit/>
+          </a:bodyPr>
+          <a:lstStyle/>
+          <a:p>
+            <a:r>
+              <a:rPr lang="en-US" sz="2400" dirty="0"/>
+              <a:t>Probability = the chances something happens.</a:t>
+            </a:r>
+          </a:p>
+          <a:p>
+            <a:pPr lvl="1"/>
+            <a:r>
+              <a:rPr lang="en-US" sz="2000" dirty="0"/>
+              <a:t>Or: The fraction of a total possibilities. </a:t>
+            </a:r>
+          </a:p>
+          <a:p>
+            <a:pPr lvl="1"/>
+            <a:r>
+              <a:rPr lang="en-US" sz="2000" dirty="0"/>
+              <a:t>E.g. the chances you roll a die and get a 5 = 1/6</a:t>
+            </a:r>
+          </a:p>
+          <a:p>
+            <a:r>
+              <a:rPr lang="en-US" sz="2400" dirty="0"/>
+              <a:t>What does probability matter to us?</a:t>
+            </a:r>
+          </a:p>
+          <a:p>
+            <a:pPr lvl="1"/>
+            <a:r>
+              <a:rPr lang="en-US" sz="2000" dirty="0"/>
+              <a:t>They matter – a little. </a:t>
+            </a:r>
+          </a:p>
+          <a:p>
+            <a:pPr lvl="1"/>
+            <a:r>
+              <a:rPr lang="en-US" sz="2000" dirty="0"/>
+              <a:t>Probabilities are common – e.g. gambling. </a:t>
+            </a:r>
+          </a:p>
+          <a:p>
+            <a:pPr lvl="1"/>
+            <a:r>
+              <a:rPr lang="en-US" sz="2000" dirty="0"/>
+              <a:t>Probability is often misunderstood. </a:t>
+            </a:r>
+          </a:p>
+          <a:p>
+            <a:pPr lvl="1"/>
+            <a:r>
+              <a:rPr lang="en-US" sz="2000" dirty="0"/>
+              <a:t>Probability provides an alternate view of what we are looking at. </a:t>
+            </a:r>
+          </a:p>
+          <a:p>
+            <a:pPr lvl="2"/>
+            <a:r>
+              <a:rPr lang="en-US" sz="1800" dirty="0"/>
+              <a:t>Can reach things like distributions, by looking at probability, instead of data.</a:t>
+            </a:r>
+          </a:p>
+        </p:txBody>
+      </p:sp>
+      <p:pic>
+        <p:nvPicPr>
+          <p:cNvPr id="4" name="Picture 3" descr="Probability: The Basics EXPLAINED with Examples">
+            <a:extLst>
+              <a:ext uri="{FF2B5EF4-FFF2-40B4-BE49-F238E27FC236}">
+                <a16:creationId xmlns:a16="http://schemas.microsoft.com/office/drawing/2014/main" id="{F2F4CB81-378A-F1FD-E0B6-5C302ABA3B94}"/>
+              </a:ext>
+            </a:extLst>
+          </p:cNvPr>
+          <p:cNvPicPr>
+            <a:picLocks noChangeAspect="1"/>
+          </p:cNvPicPr>
+          <p:nvPr/>
+        </p:nvPicPr>
+        <p:blipFill>
+          <a:blip r:embed="rId2"/>
+          <a:srcRect l="15722" r="8285"/>
+          <a:stretch>
+            <a:fillRect/>
+          </a:stretch>
+        </p:blipFill>
+        <p:spPr>
+          <a:xfrm>
+            <a:off x="7587048" y="1326243"/>
+            <a:ext cx="4510217" cy="3338433"/>
+          </a:xfrm>
+          <a:prstGeom prst="rect">
+            <a:avLst/>
+          </a:prstGeom>
+        </p:spPr>
+      </p:pic>
+    </p:spTree>
+    <p:extLst>
+      <p:ext uri="{BB962C8B-B14F-4D97-AF65-F5344CB8AC3E}">
+        <p14:creationId xmlns:p14="http://schemas.microsoft.com/office/powerpoint/2010/main" val="3240744396"/>
+      </p:ext>
+    </p:extLst>
+  </p:cSld>
+  <p:clrMapOvr>
+    <a:masterClrMapping/>
+  </p:clrMapOvr>
+</p:sld>
+</file>
+
+<file path=ppt/slides/slide11.xml><?xml version="1.0" encoding="utf-8"?>
+<p:sld xmlns:a="http://schemas.openxmlformats.org/drawingml/2006/main" xmlns:r="http://schemas.openxmlformats.org/officeDocument/2006/relationships" xmlns:p="http://schemas.openxmlformats.org/presentationml/2006/main">
+  <p:cSld>
+    <p:spTree>
+      <p:nvGrpSpPr>
+        <p:cNvPr id="1" name=""/>
+        <p:cNvGrpSpPr/>
+        <p:nvPr/>
+      </p:nvGrpSpPr>
+      <p:grpSpPr>
+        <a:xfrm>
+          <a:off x="0" y="0"/>
+          <a:ext cx="0" cy="0"/>
+          <a:chOff x="0" y="0"/>
+          <a:chExt cx="0" cy="0"/>
+        </a:xfrm>
+      </p:grpSpPr>
+      <p:sp>
+        <p:nvSpPr>
+          <p:cNvPr id="2" name="Title 1">
+            <a:extLst>
+              <a:ext uri="{FF2B5EF4-FFF2-40B4-BE49-F238E27FC236}">
+                <a16:creationId xmlns:a16="http://schemas.microsoft.com/office/drawing/2014/main" id="{1147EF03-8FEA-2C42-A25D-1BF98613C5AA}"/>
+              </a:ext>
+            </a:extLst>
+          </p:cNvPr>
+          <p:cNvSpPr>
+            <a:spLocks noGrp="1"/>
+          </p:cNvSpPr>
+          <p:nvPr>
+            <p:ph type="title"/>
+          </p:nvPr>
+        </p:nvSpPr>
+        <p:spPr/>
+        <p:txBody>
+          <a:bodyPr/>
+          <a:lstStyle/>
+          <a:p>
+            <a:r>
+              <a:rPr lang="en-US" dirty="0"/>
+              <a:t>Probability Notation</a:t>
+            </a:r>
+          </a:p>
+        </p:txBody>
+      </p:sp>
+      <p:sp>
+        <p:nvSpPr>
+          <p:cNvPr id="3" name="Content Placeholder 2">
+            <a:extLst>
+              <a:ext uri="{FF2B5EF4-FFF2-40B4-BE49-F238E27FC236}">
+                <a16:creationId xmlns:a16="http://schemas.microsoft.com/office/drawing/2014/main" id="{D4B34D7C-4418-D44A-9722-960449F34C2F}"/>
+              </a:ext>
+            </a:extLst>
+          </p:cNvPr>
+          <p:cNvSpPr>
+            <a:spLocks noGrp="1"/>
+          </p:cNvSpPr>
+          <p:nvPr>
+            <p:ph idx="1"/>
+          </p:nvPr>
+        </p:nvSpPr>
+        <p:spPr>
+          <a:xfrm>
+            <a:off x="1" y="1853754"/>
+            <a:ext cx="5156200" cy="4199727"/>
+          </a:xfrm>
+        </p:spPr>
+        <p:txBody>
+          <a:bodyPr>
+            <a:normAutofit lnSpcReduction="10000"/>
+          </a:bodyPr>
+          <a:lstStyle/>
+          <a:p>
+            <a:r>
+              <a:rPr lang="en-US" dirty="0"/>
+              <a:t>P(A) = Probability that A is true. </a:t>
+            </a:r>
+          </a:p>
+          <a:p>
+            <a:r>
+              <a:rPr lang="en-US" dirty="0"/>
+              <a:t>P(A and B) = P(A) * P(B). Probability that A and B are true. </a:t>
+            </a:r>
+          </a:p>
+          <a:p>
+            <a:r>
+              <a:rPr lang="en-US" dirty="0"/>
+              <a:t>P(A or B) = P(A) + P(B). Probability that A or B are true. </a:t>
+            </a:r>
+          </a:p>
+          <a:p>
+            <a:r>
+              <a:rPr lang="en-US" dirty="0"/>
+              <a:t>P(A</a:t>
+            </a:r>
+            <a:r>
+              <a:rPr lang="en-US" baseline="30000" dirty="0"/>
+              <a:t>c</a:t>
+            </a:r>
+            <a:r>
+              <a:rPr lang="en-US" dirty="0"/>
+              <a:t>) = 1-P(A) = P(not A). Probability that is is false. </a:t>
+            </a:r>
+          </a:p>
+          <a:p>
+            <a:r>
+              <a:rPr lang="en-US" dirty="0"/>
+              <a:t>Simple probability assumes mutual exclusivity (only one is true), and one thing is true. </a:t>
+            </a:r>
+          </a:p>
+          <a:p>
+            <a:pPr lvl="1"/>
+            <a:r>
+              <a:rPr lang="en-US" dirty="0"/>
+              <a:t>P(A and B) = 0, P(A or B) = 1. </a:t>
+            </a:r>
+          </a:p>
+        </p:txBody>
+      </p:sp>
+      <p:pic>
+        <p:nvPicPr>
+          <p:cNvPr id="4" name="Picture 3" descr="Probability Notation - Math Steps, Examples &amp; Questions">
+            <a:extLst>
+              <a:ext uri="{FF2B5EF4-FFF2-40B4-BE49-F238E27FC236}">
+                <a16:creationId xmlns:a16="http://schemas.microsoft.com/office/drawing/2014/main" id="{7FC4EC12-8C9B-8972-D728-94C5EF7545B6}"/>
+              </a:ext>
+            </a:extLst>
+          </p:cNvPr>
+          <p:cNvPicPr>
+            <a:picLocks noChangeAspect="1"/>
+          </p:cNvPicPr>
+          <p:nvPr/>
+        </p:nvPicPr>
+        <p:blipFill>
+          <a:blip r:embed="rId2"/>
+          <a:stretch>
+            <a:fillRect/>
+          </a:stretch>
+        </p:blipFill>
+        <p:spPr>
+          <a:xfrm>
+            <a:off x="5218029" y="2413001"/>
+            <a:ext cx="6973971" cy="2591246"/>
+          </a:xfrm>
+          <a:prstGeom prst="rect">
+            <a:avLst/>
+          </a:prstGeom>
+        </p:spPr>
+      </p:pic>
+    </p:spTree>
+    <p:extLst>
+      <p:ext uri="{BB962C8B-B14F-4D97-AF65-F5344CB8AC3E}">
+        <p14:creationId xmlns:p14="http://schemas.microsoft.com/office/powerpoint/2010/main" val="4279640077"/>
+      </p:ext>
+    </p:extLst>
+  </p:cSld>
+  <p:clrMapOvr>
+    <a:masterClrMapping/>
+  </p:clrMapOvr>
+</p:sld>
+</file>
+
+<file path=ppt/slides/slide12.xml><?xml version="1.0" encoding="utf-8"?>
+<p:sld xmlns:a="http://schemas.openxmlformats.org/drawingml/2006/main" xmlns:r="http://schemas.openxmlformats.org/officeDocument/2006/relationships" xmlns:p="http://schemas.openxmlformats.org/presentationml/2006/main">
+  <p:cSld>
+    <p:spTree>
+      <p:nvGrpSpPr>
+        <p:cNvPr id="1" name=""/>
+        <p:cNvGrpSpPr/>
+        <p:nvPr/>
+      </p:nvGrpSpPr>
+      <p:grpSpPr>
+        <a:xfrm>
+          <a:off x="0" y="0"/>
+          <a:ext cx="0" cy="0"/>
+          <a:chOff x="0" y="0"/>
+          <a:chExt cx="0" cy="0"/>
+        </a:xfrm>
+      </p:grpSpPr>
+      <p:sp>
+        <p:nvSpPr>
+          <p:cNvPr id="2" name="Title 1">
+            <a:extLst>
+              <a:ext uri="{FF2B5EF4-FFF2-40B4-BE49-F238E27FC236}">
+                <a16:creationId xmlns:a16="http://schemas.microsoft.com/office/drawing/2014/main" id="{67D5F4AB-0184-BAC1-DEFE-CAD595CCF950}"/>
+              </a:ext>
+            </a:extLst>
+          </p:cNvPr>
+          <p:cNvSpPr>
+            <a:spLocks noGrp="1"/>
+          </p:cNvSpPr>
+          <p:nvPr>
+            <p:ph type="title"/>
+          </p:nvPr>
+        </p:nvSpPr>
+        <p:spPr/>
+        <p:txBody>
+          <a:bodyPr/>
+          <a:lstStyle/>
+          <a:p>
+            <a:r>
+              <a:rPr lang="en-US" dirty="0"/>
+              <a:t>Probabilistic Statistics</a:t>
+            </a:r>
+          </a:p>
+        </p:txBody>
+      </p:sp>
+      <p:sp>
+        <p:nvSpPr>
+          <p:cNvPr id="3" name="Content Placeholder 2">
+            <a:extLst>
+              <a:ext uri="{FF2B5EF4-FFF2-40B4-BE49-F238E27FC236}">
+                <a16:creationId xmlns:a16="http://schemas.microsoft.com/office/drawing/2014/main" id="{1A469DAE-7237-DEE6-98EB-6A64F4CDA025}"/>
+              </a:ext>
+            </a:extLst>
+          </p:cNvPr>
+          <p:cNvSpPr>
+            <a:spLocks noGrp="1"/>
+          </p:cNvSpPr>
+          <p:nvPr>
+            <p:ph idx="1"/>
+          </p:nvPr>
+        </p:nvSpPr>
+        <p:spPr>
+          <a:xfrm>
+            <a:off x="4778298" y="2015732"/>
+            <a:ext cx="7413702" cy="4037749"/>
+          </a:xfrm>
+        </p:spPr>
+        <p:txBody>
+          <a:bodyPr/>
+          <a:lstStyle/>
+          <a:p>
+            <a:r>
+              <a:rPr lang="en-US" dirty="0"/>
+              <a:t>With our datasets, we often look at density – the percentage that falls in M range. </a:t>
+            </a:r>
+          </a:p>
+          <a:p>
+            <a:pPr lvl="1"/>
+            <a:r>
+              <a:rPr lang="en-US" dirty="0"/>
+              <a:t>Looking backwards, this is a percentage. </a:t>
+            </a:r>
+          </a:p>
+          <a:p>
+            <a:pPr lvl="1"/>
+            <a:r>
+              <a:rPr lang="en-US" dirty="0"/>
+              <a:t>Looking forwards, this is a likelihood a thing will happen. </a:t>
+            </a:r>
+          </a:p>
+          <a:p>
+            <a:r>
+              <a:rPr lang="en-US" dirty="0"/>
+              <a:t>Our distribution defines the probability that a new item on that distribution will be X. </a:t>
+            </a:r>
+          </a:p>
+          <a:p>
+            <a:r>
+              <a:rPr lang="en-US" dirty="0"/>
+              <a:t>If we’ve chosen a model that actually matches the data, all new occurrences should follow the defined pattern. </a:t>
+            </a:r>
+          </a:p>
+        </p:txBody>
+      </p:sp>
+      <p:pic>
+        <p:nvPicPr>
+          <p:cNvPr id="7170" name="Picture 2" descr="Intro to Statistics: Part 6: Probability Density Functions — L0ng  C0nnect10ns">
+            <a:extLst>
+              <a:ext uri="{FF2B5EF4-FFF2-40B4-BE49-F238E27FC236}">
+                <a16:creationId xmlns:a16="http://schemas.microsoft.com/office/drawing/2014/main" id="{A7279E28-37EA-932D-E446-5798D2F76391}"/>
+              </a:ext>
+            </a:extLst>
+          </p:cNvPr>
+          <p:cNvPicPr>
+            <a:picLocks noChangeAspect="1" noChangeArrowheads="1"/>
+          </p:cNvPicPr>
+          <p:nvPr/>
+        </p:nvPicPr>
+        <p:blipFill>
+          <a:blip r:embed="rId2">
+            <a:extLst>
+              <a:ext uri="{28A0092B-C50C-407E-A947-70E740481C1C}">
+                <a14:useLocalDpi xmlns:a14="http://schemas.microsoft.com/office/drawing/2010/main" val="0"/>
+              </a:ext>
+            </a:extLst>
+          </a:blip>
+          <a:srcRect/>
+          <a:stretch>
+            <a:fillRect/>
+          </a:stretch>
+        </p:blipFill>
+        <p:spPr bwMode="auto">
+          <a:xfrm>
+            <a:off x="0" y="1750741"/>
+            <a:ext cx="4778298" cy="4778298"/>
+          </a:xfrm>
+          <a:prstGeom prst="rect">
+            <a:avLst/>
+          </a:prstGeom>
+          <a:noFill/>
+          <a:extLst>
+            <a:ext uri="{909E8E84-426E-40DD-AFC4-6F175D3DCCD1}">
+              <a14:hiddenFill xmlns:a14="http://schemas.microsoft.com/office/drawing/2010/main">
+                <a:solidFill>
+                  <a:srgbClr val="FFFFFF"/>
+                </a:solidFill>
+              </a14:hiddenFill>
+            </a:ext>
+          </a:extLst>
+        </p:spPr>
+      </p:pic>
+    </p:spTree>
+    <p:extLst>
+      <p:ext uri="{BB962C8B-B14F-4D97-AF65-F5344CB8AC3E}">
+        <p14:creationId xmlns:p14="http://schemas.microsoft.com/office/powerpoint/2010/main" val="1387545396"/>
+      </p:ext>
+    </p:extLst>
+  </p:cSld>
+  <p:clrMapOvr>
+    <a:masterClrMapping/>
+  </p:clrMapOvr>
+</p:sld>
+</file>
+
+<file path=ppt/slides/slide13.xml><?xml version="1.0" encoding="utf-8"?>
+<p:sld xmlns:a="http://schemas.openxmlformats.org/drawingml/2006/main" xmlns:r="http://schemas.openxmlformats.org/officeDocument/2006/relationships" xmlns:p="http://schemas.openxmlformats.org/presentationml/2006/main" show="0">
+  <p:cSld>
+    <p:spTree>
+      <p:nvGrpSpPr>
+        <p:cNvPr id="1" name=""/>
+        <p:cNvGrpSpPr/>
+        <p:nvPr/>
+      </p:nvGrpSpPr>
+      <p:grpSpPr>
+        <a:xfrm>
+          <a:off x="0" y="0"/>
+          <a:ext cx="0" cy="0"/>
+          <a:chOff x="0" y="0"/>
+          <a:chExt cx="0" cy="0"/>
+        </a:xfrm>
+      </p:grpSpPr>
+      <p:sp>
+        <p:nvSpPr>
+          <p:cNvPr id="2" name="Title 1">
+            <a:extLst>
+              <a:ext uri="{FF2B5EF4-FFF2-40B4-BE49-F238E27FC236}">
+                <a16:creationId xmlns:a16="http://schemas.microsoft.com/office/drawing/2014/main" id="{0C8D2A44-53F1-7C87-B89E-A1FE083636EC}"/>
+              </a:ext>
+            </a:extLst>
+          </p:cNvPr>
+          <p:cNvSpPr>
+            <a:spLocks noGrp="1"/>
+          </p:cNvSpPr>
+          <p:nvPr>
+            <p:ph type="title"/>
+          </p:nvPr>
+        </p:nvSpPr>
+        <p:spPr/>
+        <p:txBody>
+          <a:bodyPr/>
+          <a:lstStyle/>
+          <a:p>
+            <a:r>
+              <a:rPr lang="en-US" dirty="0"/>
+              <a:t>Different View on Statistics</a:t>
+            </a:r>
+          </a:p>
+        </p:txBody>
+      </p:sp>
+      <p:sp>
+        <p:nvSpPr>
+          <p:cNvPr id="3" name="Content Placeholder 2">
+            <a:extLst>
+              <a:ext uri="{FF2B5EF4-FFF2-40B4-BE49-F238E27FC236}">
+                <a16:creationId xmlns:a16="http://schemas.microsoft.com/office/drawing/2014/main" id="{A411A130-C9ED-B53B-3E15-FE3080854294}"/>
+              </a:ext>
+            </a:extLst>
+          </p:cNvPr>
+          <p:cNvSpPr>
+            <a:spLocks noGrp="1"/>
+          </p:cNvSpPr>
+          <p:nvPr>
+            <p:ph idx="1"/>
+          </p:nvPr>
+        </p:nvSpPr>
+        <p:spPr>
+          <a:xfrm>
+            <a:off x="1451579" y="2015732"/>
+            <a:ext cx="4801637" cy="3450613"/>
+          </a:xfrm>
+        </p:spPr>
+        <p:txBody>
+          <a:bodyPr/>
+          <a:lstStyle/>
+          <a:p>
+            <a:r>
+              <a:rPr lang="en-US" dirty="0"/>
+              <a:t>Stats and probability (especially inferential) are two sides of a coin. </a:t>
+            </a:r>
+          </a:p>
+        </p:txBody>
+      </p:sp>
+      <p:pic>
+        <p:nvPicPr>
+          <p:cNvPr id="4" name="Picture 3" descr="Understanding frequentist vs. Bayesian inference — » Douglas Yao">
+            <a:extLst>
+              <a:ext uri="{FF2B5EF4-FFF2-40B4-BE49-F238E27FC236}">
+                <a16:creationId xmlns:a16="http://schemas.microsoft.com/office/drawing/2014/main" id="{4A5F48F1-2B94-A162-ED31-CD4CE6D5D54B}"/>
+              </a:ext>
+            </a:extLst>
+          </p:cNvPr>
+          <p:cNvPicPr>
+            <a:picLocks noChangeAspect="1"/>
+          </p:cNvPicPr>
+          <p:nvPr/>
+        </p:nvPicPr>
+        <p:blipFill>
+          <a:blip r:embed="rId2"/>
+          <a:stretch>
+            <a:fillRect/>
+          </a:stretch>
+        </p:blipFill>
+        <p:spPr>
+          <a:xfrm>
+            <a:off x="6253216" y="1818391"/>
+            <a:ext cx="5901353" cy="3647954"/>
+          </a:xfrm>
+          <a:prstGeom prst="rect">
+            <a:avLst/>
+          </a:prstGeom>
+        </p:spPr>
+      </p:pic>
+    </p:spTree>
+    <p:extLst>
+      <p:ext uri="{BB962C8B-B14F-4D97-AF65-F5344CB8AC3E}">
+        <p14:creationId xmlns:p14="http://schemas.microsoft.com/office/powerpoint/2010/main" val="3719969062"/>
+      </p:ext>
+    </p:extLst>
+  </p:cSld>
+  <p:clrMapOvr>
+    <a:masterClrMapping/>
+  </p:clrMapOvr>
+</p:sld>
+</file>
+
+<file path=ppt/slides/slide14.xml><?xml version="1.0" encoding="utf-8"?>
 <p:sld xmlns:a="http://schemas.openxmlformats.org/drawingml/2006/main" xmlns:r="http://schemas.openxmlformats.org/officeDocument/2006/relationships" xmlns:p="http://schemas.openxmlformats.org/presentationml/2006/main">
   <p:cSld>
     <p:bg>
@@ -3976,7 +4573,7 @@
 </p:sld>
 </file>
 
-<file path=ppt/slides/slide11.xml><?xml version="1.0" encoding="utf-8"?>
+<file path=ppt/slides/slide15.xml><?xml version="1.0" encoding="utf-8"?>
 <p:sld xmlns:a="http://schemas.openxmlformats.org/drawingml/2006/main" xmlns:r="http://schemas.openxmlformats.org/officeDocument/2006/relationships" xmlns:p="http://schemas.openxmlformats.org/presentationml/2006/main">
   <p:cSld>
     <p:spTree>
@@ -3998,6 +4595,165 @@
           <p:cNvPr id="2" name="Title 1">
             <a:extLst>
               <a:ext uri="{FF2B5EF4-FFF2-40B4-BE49-F238E27FC236}">
+                <a16:creationId xmlns:a16="http://schemas.microsoft.com/office/drawing/2014/main" id="{FA5DE9CC-6314-B98F-68A1-7C55A449CF78}"/>
+              </a:ext>
+            </a:extLst>
+          </p:cNvPr>
+          <p:cNvSpPr>
+            <a:spLocks noGrp="1"/>
+          </p:cNvSpPr>
+          <p:nvPr>
+            <p:ph type="title"/>
+          </p:nvPr>
+        </p:nvSpPr>
+        <p:spPr>
+          <a:xfrm>
+            <a:off x="7729154" y="804519"/>
+            <a:ext cx="3325700" cy="1049235"/>
+          </a:xfrm>
+        </p:spPr>
+        <p:txBody>
+          <a:bodyPr/>
+          <a:lstStyle/>
+          <a:p>
+            <a:r>
+              <a:rPr lang="en-US" dirty="0"/>
+              <a:t>Calculations</a:t>
+            </a:r>
+          </a:p>
+        </p:txBody>
+      </p:sp>
+      <p:sp>
+        <p:nvSpPr>
+          <p:cNvPr id="3" name="Content Placeholder 2">
+            <a:extLst>
+              <a:ext uri="{FF2B5EF4-FFF2-40B4-BE49-F238E27FC236}">
+                <a16:creationId xmlns:a16="http://schemas.microsoft.com/office/drawing/2014/main" id="{82E61F0F-0A17-89DD-B7BC-400C65D7EE56}"/>
+              </a:ext>
+            </a:extLst>
+          </p:cNvPr>
+          <p:cNvSpPr>
+            <a:spLocks noGrp="1"/>
+          </p:cNvSpPr>
+          <p:nvPr>
+            <p:ph idx="1"/>
+          </p:nvPr>
+        </p:nvSpPr>
+        <p:spPr>
+          <a:xfrm>
+            <a:off x="7729154" y="2015732"/>
+            <a:ext cx="4462846" cy="4037749"/>
+          </a:xfrm>
+        </p:spPr>
+        <p:txBody>
+          <a:bodyPr/>
+          <a:lstStyle/>
+          <a:p>
+            <a:r>
+              <a:rPr lang="en-US" dirty="0"/>
+              <a:t>We must be ok with basic calculations. </a:t>
+            </a:r>
+          </a:p>
+          <a:p>
+            <a:pPr lvl="1"/>
+            <a:r>
+              <a:rPr lang="en-US" dirty="0"/>
+              <a:t>Generally, assume independence. </a:t>
+            </a:r>
+          </a:p>
+          <a:p>
+            <a:r>
+              <a:rPr lang="en-US" dirty="0"/>
+              <a:t>Most notably:</a:t>
+            </a:r>
+          </a:p>
+          <a:p>
+            <a:pPr lvl="1"/>
+            <a:r>
+              <a:rPr lang="en-US" dirty="0"/>
+              <a:t>Joint probability. (Multiply)</a:t>
+            </a:r>
+          </a:p>
+          <a:p>
+            <a:pPr lvl="1"/>
+            <a:r>
+              <a:rPr lang="en-US" dirty="0"/>
+              <a:t>Union. (Add)</a:t>
+            </a:r>
+          </a:p>
+          <a:p>
+            <a:r>
+              <a:rPr lang="en-US" dirty="0"/>
+              <a:t>The hardest part can be translating things to consistent probability notation. </a:t>
+            </a:r>
+          </a:p>
+        </p:txBody>
+      </p:sp>
+      <p:pic>
+        <p:nvPicPr>
+          <p:cNvPr id="4" name="Picture 3" descr="Probability Concepts - Aced (formerly Exponent)">
+            <a:extLst>
+              <a:ext uri="{FF2B5EF4-FFF2-40B4-BE49-F238E27FC236}">
+                <a16:creationId xmlns:a16="http://schemas.microsoft.com/office/drawing/2014/main" id="{67AA013D-E4A3-CE9B-BA28-DEF4A75C846B}"/>
+              </a:ext>
+            </a:extLst>
+          </p:cNvPr>
+          <p:cNvPicPr>
+            <a:picLocks noChangeAspect="1"/>
+          </p:cNvPicPr>
+          <p:nvPr/>
+        </p:nvPicPr>
+        <p:blipFill>
+          <a:blip r:embed="rId2"/>
+          <a:stretch>
+            <a:fillRect/>
+          </a:stretch>
+        </p:blipFill>
+        <p:spPr>
+          <a:xfrm>
+            <a:off x="0" y="1164653"/>
+            <a:ext cx="7729154" cy="5152769"/>
+          </a:xfrm>
+          <a:prstGeom prst="rect">
+            <a:avLst/>
+          </a:prstGeom>
+        </p:spPr>
+      </p:pic>
+    </p:spTree>
+    <p:extLst>
+      <p:ext uri="{BB962C8B-B14F-4D97-AF65-F5344CB8AC3E}">
+        <p14:creationId xmlns:p14="http://schemas.microsoft.com/office/powerpoint/2010/main" val="521681178"/>
+      </p:ext>
+    </p:extLst>
+  </p:cSld>
+  <p:clrMapOvr>
+    <a:masterClrMapping/>
+  </p:clrMapOvr>
+</p:sld>
+</file>
+
+<file path=ppt/slides/slide16.xml><?xml version="1.0" encoding="utf-8"?>
+<p:sld xmlns:a="http://schemas.openxmlformats.org/drawingml/2006/main" xmlns:r="http://schemas.openxmlformats.org/officeDocument/2006/relationships" xmlns:p="http://schemas.openxmlformats.org/presentationml/2006/main">
+  <p:cSld>
+    <p:spTree>
+      <p:nvGrpSpPr>
+        <p:cNvPr id="1" name=""/>
+        <p:cNvGrpSpPr/>
+        <p:nvPr/>
+      </p:nvGrpSpPr>
+      <p:grpSpPr>
+        <a:xfrm>
+          <a:off x="0" y="0"/>
+          <a:ext cx="0" cy="0"/>
+          <a:chOff x="0" y="0"/>
+          <a:chExt cx="0" cy="0"/>
+        </a:xfrm>
+      </p:grpSpPr>
+      <p:sp>
+        <p:nvSpPr>
+          <p:cNvPr id="2" name="Title 1">
+            <a:extLst>
+              <a:ext uri="{FF2B5EF4-FFF2-40B4-BE49-F238E27FC236}">
                 <a16:creationId xmlns:a16="http://schemas.microsoft.com/office/drawing/2014/main" id="{D53E4AA8-B3D4-284A-B0CD-C0DA2209B755}"/>
               </a:ext>
             </a:extLst>
@@ -4123,7 +4879,7 @@
 </p:sld>
 </file>
 
-<file path=ppt/slides/slide12.xml><?xml version="1.0" encoding="utf-8"?>
+<file path=ppt/slides/slide17.xml><?xml version="1.0" encoding="utf-8"?>
 <p:sld xmlns:a="http://schemas.openxmlformats.org/drawingml/2006/main" xmlns:r="http://schemas.openxmlformats.org/officeDocument/2006/relationships" xmlns:p="http://schemas.openxmlformats.org/presentationml/2006/main">
   <p:cSld>
     <p:bg>
@@ -4217,19 +4973,19 @@
         </p:nvSpPr>
         <p:spPr>
           <a:xfrm>
-            <a:off x="233362" y="2015734"/>
-            <a:ext cx="6946371" cy="4125422"/>
+            <a:off x="0" y="1853754"/>
+            <a:ext cx="7422989" cy="4287402"/>
           </a:xfrm>
         </p:spPr>
         <p:txBody>
           <a:bodyPr>
-            <a:normAutofit lnSpcReduction="10000"/>
+            <a:normAutofit/>
           </a:bodyPr>
           <a:lstStyle/>
           <a:p>
             <a:r>
               <a:rPr lang="en-US" dirty="0"/>
-              <a:t>Probabilities, especially when there’s more than one involved, are not always intuitive.</a:t>
+              <a:t>Probabilities, especially when there’s more than one involved, are not always intuitive (i.e. don’t buy parlays). </a:t>
             </a:r>
           </a:p>
           <a:p>
@@ -4255,13 +5011,6 @@
             <a:pPr lvl="1"/>
             <a:r>
               <a:rPr lang="en-US" dirty="0"/>
-              <a:t>= .1%</a:t>
-            </a:r>
-          </a:p>
-          <a:p>
-            <a:pPr lvl="1"/>
-            <a:r>
-              <a:rPr lang="en-US" dirty="0"/>
               <a:t>Expected value:</a:t>
             </a:r>
           </a:p>
@@ -4269,17 +5018,25 @@
             <a:pPr lvl="2"/>
             <a:r>
               <a:rPr lang="en-US" dirty="0"/>
-              <a:t>15,600*$5 = $78,000</a:t>
+              <a:t>Cost: 15,600*$5 = $78,000.</a:t>
             </a:r>
           </a:p>
           <a:p>
             <a:pPr lvl="2"/>
             <a:r>
               <a:rPr lang="en-US" dirty="0"/>
-              <a:t>$10 million avg jackpot – $10,000 / people in pool</a:t>
-            </a:r>
-          </a:p>
-          <a:p>
+              <a:t>Income: $10 million avg jackpot. </a:t>
+            </a:r>
+          </a:p>
+          <a:p>
+            <a:pPr lvl="2"/>
+            <a:r>
+              <a:rPr lang="en-US" dirty="0"/>
+              <a:t>P(win) = (1/14mill) * 15600</a:t>
+            </a:r>
+          </a:p>
+          <a:p>
+            <a:pPr lvl="1"/>
             <a:r>
               <a:rPr lang="en-US" dirty="0"/>
               <a:t>Even so, some people in my old job won ~$3.5m each. </a:t>
@@ -4337,715 +5094,6 @@
     <p:extLst>
       <p:ext uri="{BB962C8B-B14F-4D97-AF65-F5344CB8AC3E}">
         <p14:creationId xmlns:p14="http://schemas.microsoft.com/office/powerpoint/2010/main" val="4095244745"/>
-      </p:ext>
-    </p:extLst>
-  </p:cSld>
-  <p:clrMapOvr>
-    <a:masterClrMapping/>
-  </p:clrMapOvr>
-</p:sld>
-</file>
-
-<file path=ppt/slides/slide13.xml><?xml version="1.0" encoding="utf-8"?>
-<p:sld xmlns:a="http://schemas.openxmlformats.org/drawingml/2006/main" xmlns:r="http://schemas.openxmlformats.org/officeDocument/2006/relationships" xmlns:p="http://schemas.openxmlformats.org/presentationml/2006/main">
-  <p:cSld>
-    <p:spTree>
-      <p:nvGrpSpPr>
-        <p:cNvPr id="1" name=""/>
-        <p:cNvGrpSpPr/>
-        <p:nvPr/>
-      </p:nvGrpSpPr>
-      <p:grpSpPr>
-        <a:xfrm>
-          <a:off x="0" y="0"/>
-          <a:ext cx="0" cy="0"/>
-          <a:chOff x="0" y="0"/>
-          <a:chExt cx="0" cy="0"/>
-        </a:xfrm>
-      </p:grpSpPr>
-      <p:sp>
-        <p:nvSpPr>
-          <p:cNvPr id="2" name="Title 1">
-            <a:extLst>
-              <a:ext uri="{FF2B5EF4-FFF2-40B4-BE49-F238E27FC236}">
-                <a16:creationId xmlns:a16="http://schemas.microsoft.com/office/drawing/2014/main" id="{3D20239F-9A82-DF45-AA6F-25B28BD41AA6}"/>
-              </a:ext>
-            </a:extLst>
-          </p:cNvPr>
-          <p:cNvSpPr>
-            <a:spLocks noGrp="1"/>
-          </p:cNvSpPr>
-          <p:nvPr>
-            <p:ph type="title"/>
-          </p:nvPr>
-        </p:nvSpPr>
-        <p:spPr/>
-        <p:txBody>
-          <a:bodyPr/>
-          <a:lstStyle/>
-          <a:p>
-            <a:r>
-              <a:rPr lang="en-US" dirty="0"/>
-              <a:t>Conditional Probability</a:t>
-            </a:r>
-          </a:p>
-        </p:txBody>
-      </p:sp>
-      <p:sp>
-        <p:nvSpPr>
-          <p:cNvPr id="3" name="Content Placeholder 2">
-            <a:extLst>
-              <a:ext uri="{FF2B5EF4-FFF2-40B4-BE49-F238E27FC236}">
-                <a16:creationId xmlns:a16="http://schemas.microsoft.com/office/drawing/2014/main" id="{DF913740-0231-894D-9658-BE40BCA0C9C4}"/>
-              </a:ext>
-            </a:extLst>
-          </p:cNvPr>
-          <p:cNvSpPr>
-            <a:spLocks noGrp="1"/>
-          </p:cNvSpPr>
-          <p:nvPr>
-            <p:ph idx="1"/>
-          </p:nvPr>
-        </p:nvSpPr>
-        <p:spPr/>
-        <p:txBody>
-          <a:bodyPr/>
-          <a:lstStyle/>
-          <a:p>
-            <a:r>
-              <a:rPr lang="en-US" dirty="0"/>
-              <a:t>P(A | B) = probability that A is true, given that B is true.</a:t>
-            </a:r>
-          </a:p>
-          <a:p>
-            <a:r>
-              <a:rPr lang="en-US" dirty="0"/>
-              <a:t>Conditional probability is allows us to say “how likely is X if something happens?”</a:t>
-            </a:r>
-          </a:p>
-          <a:p>
-            <a:pPr lvl="1"/>
-            <a:r>
-              <a:rPr lang="en-US" dirty="0"/>
-              <a:t>E.g. If we are over 7’0” how </a:t>
-            </a:r>
-            <a:r>
-              <a:rPr lang="en-US" dirty="0" err="1"/>
-              <a:t>likey</a:t>
-            </a:r>
-            <a:r>
-              <a:rPr lang="en-US" dirty="0"/>
-              <a:t> are we to make the NBA?</a:t>
-            </a:r>
-          </a:p>
-          <a:p>
-            <a:pPr lvl="1"/>
-            <a:r>
-              <a:rPr lang="en-US" dirty="0"/>
-              <a:t>In the 90s someone calculated that at about 14%</a:t>
-            </a:r>
-          </a:p>
-          <a:p>
-            <a:r>
-              <a:rPr lang="en-US" dirty="0"/>
-              <a:t>Some quick covid tests have reported about a 20% false negative rate. </a:t>
-            </a:r>
-          </a:p>
-          <a:p>
-            <a:pPr lvl="1"/>
-            <a:r>
-              <a:rPr lang="en-US" dirty="0"/>
-              <a:t>P(Test Positive | Have Covid) = 80%</a:t>
-            </a:r>
-          </a:p>
-        </p:txBody>
-      </p:sp>
-    </p:spTree>
-    <p:extLst>
-      <p:ext uri="{BB962C8B-B14F-4D97-AF65-F5344CB8AC3E}">
-        <p14:creationId xmlns:p14="http://schemas.microsoft.com/office/powerpoint/2010/main" val="702050722"/>
-      </p:ext>
-    </p:extLst>
-  </p:cSld>
-  <p:clrMapOvr>
-    <a:masterClrMapping/>
-  </p:clrMapOvr>
-</p:sld>
-</file>
-
-<file path=ppt/slides/slide14.xml><?xml version="1.0" encoding="utf-8"?>
-<p:sld xmlns:a="http://schemas.openxmlformats.org/drawingml/2006/main" xmlns:r="http://schemas.openxmlformats.org/officeDocument/2006/relationships" xmlns:p="http://schemas.openxmlformats.org/presentationml/2006/main">
-  <p:cSld>
-    <p:spTree>
-      <p:nvGrpSpPr>
-        <p:cNvPr id="1" name=""/>
-        <p:cNvGrpSpPr/>
-        <p:nvPr/>
-      </p:nvGrpSpPr>
-      <p:grpSpPr>
-        <a:xfrm>
-          <a:off x="0" y="0"/>
-          <a:ext cx="0" cy="0"/>
-          <a:chOff x="0" y="0"/>
-          <a:chExt cx="0" cy="0"/>
-        </a:xfrm>
-      </p:grpSpPr>
-      <p:sp>
-        <p:nvSpPr>
-          <p:cNvPr id="2" name="Title 1">
-            <a:extLst>
-              <a:ext uri="{FF2B5EF4-FFF2-40B4-BE49-F238E27FC236}">
-                <a16:creationId xmlns:a16="http://schemas.microsoft.com/office/drawing/2014/main" id="{5F4C1D0B-BFC8-C12F-F807-53E20790C6BA}"/>
-              </a:ext>
-            </a:extLst>
-          </p:cNvPr>
-          <p:cNvSpPr>
-            <a:spLocks noGrp="1"/>
-          </p:cNvSpPr>
-          <p:nvPr>
-            <p:ph type="title"/>
-          </p:nvPr>
-        </p:nvSpPr>
-        <p:spPr/>
-        <p:txBody>
-          <a:bodyPr/>
-          <a:lstStyle/>
-          <a:p>
-            <a:r>
-              <a:rPr lang="en-US" dirty="0"/>
-              <a:t>Probability at work</a:t>
-            </a:r>
-          </a:p>
-        </p:txBody>
-      </p:sp>
-      <p:sp>
-        <p:nvSpPr>
-          <p:cNvPr id="3" name="Content Placeholder 2">
-            <a:extLst>
-              <a:ext uri="{FF2B5EF4-FFF2-40B4-BE49-F238E27FC236}">
-                <a16:creationId xmlns:a16="http://schemas.microsoft.com/office/drawing/2014/main" id="{5D34C7E8-23F5-DE2A-79B8-909246B2FB98}"/>
-              </a:ext>
-            </a:extLst>
-          </p:cNvPr>
-          <p:cNvSpPr>
-            <a:spLocks noGrp="1"/>
-          </p:cNvSpPr>
-          <p:nvPr>
-            <p:ph idx="1"/>
-          </p:nvPr>
-        </p:nvSpPr>
-        <p:spPr/>
-        <p:txBody>
-          <a:bodyPr/>
-          <a:lstStyle/>
-          <a:p>
-            <a:endParaRPr lang="en-US"/>
-          </a:p>
-        </p:txBody>
-      </p:sp>
-    </p:spTree>
-    <p:extLst>
-      <p:ext uri="{BB962C8B-B14F-4D97-AF65-F5344CB8AC3E}">
-        <p14:creationId xmlns:p14="http://schemas.microsoft.com/office/powerpoint/2010/main" val="1421394941"/>
-      </p:ext>
-    </p:extLst>
-  </p:cSld>
-  <p:clrMapOvr>
-    <a:masterClrMapping/>
-  </p:clrMapOvr>
-</p:sld>
-</file>
-
-<file path=ppt/slides/slide15.xml><?xml version="1.0" encoding="utf-8"?>
-<p:sld xmlns:a="http://schemas.openxmlformats.org/drawingml/2006/main" xmlns:r="http://schemas.openxmlformats.org/officeDocument/2006/relationships" xmlns:p="http://schemas.openxmlformats.org/presentationml/2006/main">
-  <p:cSld>
-    <p:spTree>
-      <p:nvGrpSpPr>
-        <p:cNvPr id="1" name=""/>
-        <p:cNvGrpSpPr/>
-        <p:nvPr/>
-      </p:nvGrpSpPr>
-      <p:grpSpPr>
-        <a:xfrm>
-          <a:off x="0" y="0"/>
-          <a:ext cx="0" cy="0"/>
-          <a:chOff x="0" y="0"/>
-          <a:chExt cx="0" cy="0"/>
-        </a:xfrm>
-      </p:grpSpPr>
-      <p:sp>
-        <p:nvSpPr>
-          <p:cNvPr id="2" name="Title 1">
-            <a:extLst>
-              <a:ext uri="{FF2B5EF4-FFF2-40B4-BE49-F238E27FC236}">
-                <a16:creationId xmlns:a16="http://schemas.microsoft.com/office/drawing/2014/main" id="{22FBDAFD-0666-669A-7138-2CCA97ACDB76}"/>
-              </a:ext>
-            </a:extLst>
-          </p:cNvPr>
-          <p:cNvSpPr>
-            <a:spLocks noGrp="1"/>
-          </p:cNvSpPr>
-          <p:nvPr>
-            <p:ph type="title"/>
-          </p:nvPr>
-        </p:nvSpPr>
-        <p:spPr/>
-        <p:txBody>
-          <a:bodyPr/>
-          <a:lstStyle/>
-          <a:p>
-            <a:r>
-              <a:rPr lang="en-US" dirty="0"/>
-              <a:t>Distribution Comparison</a:t>
-            </a:r>
-          </a:p>
-        </p:txBody>
-      </p:sp>
-      <p:sp>
-        <p:nvSpPr>
-          <p:cNvPr id="3" name="Content Placeholder 2">
-            <a:extLst>
-              <a:ext uri="{FF2B5EF4-FFF2-40B4-BE49-F238E27FC236}">
-                <a16:creationId xmlns:a16="http://schemas.microsoft.com/office/drawing/2014/main" id="{4F2C3283-F2EB-0A1F-9B93-8BC3D76D0E8C}"/>
-              </a:ext>
-            </a:extLst>
-          </p:cNvPr>
-          <p:cNvSpPr>
-            <a:spLocks noGrp="1"/>
-          </p:cNvSpPr>
-          <p:nvPr>
-            <p:ph idx="1"/>
-          </p:nvPr>
-        </p:nvSpPr>
-        <p:spPr>
-          <a:xfrm>
-            <a:off x="6427129" y="2015732"/>
-            <a:ext cx="5764871" cy="4037749"/>
-          </a:xfrm>
-        </p:spPr>
-        <p:txBody>
-          <a:bodyPr/>
-          <a:lstStyle/>
-          <a:p>
-            <a:r>
-              <a:rPr lang="en-US" dirty="0"/>
-              <a:t>Comparing distributions of data for a difference involves probability. </a:t>
-            </a:r>
-          </a:p>
-          <a:p>
-            <a:pPr lvl="1"/>
-            <a:r>
-              <a:rPr lang="en-US" dirty="0"/>
-              <a:t>We can’t just calculate one value like mean and compare. </a:t>
-            </a:r>
-          </a:p>
-          <a:p>
-            <a:pPr lvl="1"/>
-            <a:r>
-              <a:rPr lang="en-US" dirty="0"/>
-              <a:t>We need some concept of ‘different enough’ to compare all items in the set. </a:t>
-            </a:r>
-          </a:p>
-          <a:p>
-            <a:pPr lvl="1"/>
-            <a:r>
-              <a:rPr lang="en-US" dirty="0"/>
-              <a:t>The overall shape of the distribution matters, not just stats like mean. </a:t>
-            </a:r>
-          </a:p>
-          <a:p>
-            <a:r>
-              <a:rPr lang="en-US" dirty="0"/>
-              <a:t>Therefore, we don’t really have an answer like ‘regular’ equality/inequality. </a:t>
-            </a:r>
-          </a:p>
-          <a:p>
-            <a:endParaRPr lang="en-US" dirty="0"/>
-          </a:p>
-        </p:txBody>
-      </p:sp>
-      <p:pic>
-        <p:nvPicPr>
-          <p:cNvPr id="8194" name="Picture 2" descr="Distributions of treatment responses for placebo and an FDA approved... |  Download Scientific Diagram">
-            <a:extLst>
-              <a:ext uri="{FF2B5EF4-FFF2-40B4-BE49-F238E27FC236}">
-                <a16:creationId xmlns:a16="http://schemas.microsoft.com/office/drawing/2014/main" id="{63AF78F2-D6F1-68EC-7033-69F2B989F4D8}"/>
-              </a:ext>
-            </a:extLst>
-          </p:cNvPr>
-          <p:cNvPicPr>
-            <a:picLocks noChangeAspect="1" noChangeArrowheads="1"/>
-          </p:cNvPicPr>
-          <p:nvPr/>
-        </p:nvPicPr>
-        <p:blipFill>
-          <a:blip r:embed="rId2">
-            <a:extLst>
-              <a:ext uri="{28A0092B-C50C-407E-A947-70E740481C1C}">
-                <a14:useLocalDpi xmlns:a14="http://schemas.microsoft.com/office/drawing/2010/main" val="0"/>
-              </a:ext>
-            </a:extLst>
-          </a:blip>
-          <a:srcRect/>
-          <a:stretch>
-            <a:fillRect/>
-          </a:stretch>
-        </p:blipFill>
-        <p:spPr bwMode="auto">
-          <a:xfrm>
-            <a:off x="0" y="1853754"/>
-            <a:ext cx="6427129" cy="4037749"/>
-          </a:xfrm>
-          <a:prstGeom prst="rect">
-            <a:avLst/>
-          </a:prstGeom>
-          <a:noFill/>
-          <a:extLst>
-            <a:ext uri="{909E8E84-426E-40DD-AFC4-6F175D3DCCD1}">
-              <a14:hiddenFill xmlns:a14="http://schemas.microsoft.com/office/drawing/2010/main">
-                <a:solidFill>
-                  <a:srgbClr val="FFFFFF"/>
-                </a:solidFill>
-              </a14:hiddenFill>
-            </a:ext>
-          </a:extLst>
-        </p:spPr>
-      </p:pic>
-    </p:spTree>
-    <p:extLst>
-      <p:ext uri="{BB962C8B-B14F-4D97-AF65-F5344CB8AC3E}">
-        <p14:creationId xmlns:p14="http://schemas.microsoft.com/office/powerpoint/2010/main" val="1704552580"/>
-      </p:ext>
-    </p:extLst>
-  </p:cSld>
-  <p:clrMapOvr>
-    <a:masterClrMapping/>
-  </p:clrMapOvr>
-</p:sld>
-</file>
-
-<file path=ppt/slides/slide16.xml><?xml version="1.0" encoding="utf-8"?>
-<p:sld xmlns:a="http://schemas.openxmlformats.org/drawingml/2006/main" xmlns:r="http://schemas.openxmlformats.org/officeDocument/2006/relationships" xmlns:p="http://schemas.openxmlformats.org/presentationml/2006/main">
-  <p:cSld>
-    <p:spTree>
-      <p:nvGrpSpPr>
-        <p:cNvPr id="1" name=""/>
-        <p:cNvGrpSpPr/>
-        <p:nvPr/>
-      </p:nvGrpSpPr>
-      <p:grpSpPr>
-        <a:xfrm>
-          <a:off x="0" y="0"/>
-          <a:ext cx="0" cy="0"/>
-          <a:chOff x="0" y="0"/>
-          <a:chExt cx="0" cy="0"/>
-        </a:xfrm>
-      </p:grpSpPr>
-      <p:sp>
-        <p:nvSpPr>
-          <p:cNvPr id="2" name="Title 1">
-            <a:extLst>
-              <a:ext uri="{FF2B5EF4-FFF2-40B4-BE49-F238E27FC236}">
-                <a16:creationId xmlns:a16="http://schemas.microsoft.com/office/drawing/2014/main" id="{5517B2D7-A503-B515-44A2-AD8F388A9F74}"/>
-              </a:ext>
-            </a:extLst>
-          </p:cNvPr>
-          <p:cNvSpPr>
-            <a:spLocks noGrp="1"/>
-          </p:cNvSpPr>
-          <p:nvPr>
-            <p:ph type="title"/>
-          </p:nvPr>
-        </p:nvSpPr>
-        <p:spPr/>
-        <p:txBody>
-          <a:bodyPr/>
-          <a:lstStyle/>
-          <a:p>
-            <a:r>
-              <a:rPr lang="en-US" dirty="0"/>
-              <a:t>Odds and Effect Sizes</a:t>
-            </a:r>
-          </a:p>
-        </p:txBody>
-      </p:sp>
-      <p:sp>
-        <p:nvSpPr>
-          <p:cNvPr id="3" name="Content Placeholder 2">
-            <a:extLst>
-              <a:ext uri="{FF2B5EF4-FFF2-40B4-BE49-F238E27FC236}">
-                <a16:creationId xmlns:a16="http://schemas.microsoft.com/office/drawing/2014/main" id="{1CC57BBE-5EB0-A7A4-E217-B236AD739519}"/>
-              </a:ext>
-            </a:extLst>
-          </p:cNvPr>
-          <p:cNvSpPr>
-            <a:spLocks noGrp="1"/>
-          </p:cNvSpPr>
-          <p:nvPr>
-            <p:ph idx="1"/>
-          </p:nvPr>
-        </p:nvSpPr>
-        <p:spPr>
-          <a:xfrm>
-            <a:off x="1451579" y="1853754"/>
-            <a:ext cx="9603275" cy="4199727"/>
-          </a:xfrm>
-        </p:spPr>
-        <p:txBody>
-          <a:bodyPr/>
-          <a:lstStyle/>
-          <a:p>
-            <a:r>
-              <a:rPr lang="en-US" dirty="0"/>
-              <a:t>We’ve seen one way to compare distributions – effect sizes. </a:t>
-            </a:r>
-          </a:p>
-          <a:p>
-            <a:pPr lvl="1"/>
-            <a:r>
-              <a:rPr lang="en-US" dirty="0"/>
-              <a:t>The effect size measures, in context of the variance, how different two distributions are. </a:t>
-            </a:r>
-          </a:p>
-          <a:p>
-            <a:r>
-              <a:rPr lang="en-US" dirty="0"/>
-              <a:t>We can also think of this in terms of probability. </a:t>
-            </a:r>
-          </a:p>
-          <a:p>
-            <a:pPr lvl="1"/>
-            <a:r>
-              <a:rPr lang="en-US" dirty="0"/>
-              <a:t>Are these two samples likely from the same population – hypothesis tests. </a:t>
-            </a:r>
-          </a:p>
-          <a:p>
-            <a:pPr lvl="1"/>
-            <a:r>
-              <a:rPr lang="en-US" dirty="0"/>
-              <a:t>Does this data come from a normal population – normality test. </a:t>
-            </a:r>
-          </a:p>
-          <a:p>
-            <a:r>
-              <a:rPr lang="en-US" dirty="0"/>
-              <a:t>More generically – superiority. </a:t>
-            </a:r>
-          </a:p>
-          <a:p>
-            <a:pPr lvl="1"/>
-            <a:r>
-              <a:rPr lang="en-US" dirty="0"/>
-              <a:t>Two distributions that are totally different will not/barely overlap. </a:t>
-            </a:r>
-          </a:p>
-          <a:p>
-            <a:pPr lvl="1"/>
-            <a:r>
-              <a:rPr lang="en-US" dirty="0"/>
-              <a:t>Two distributions that are from the same population will overlap a lot. </a:t>
-            </a:r>
-          </a:p>
-        </p:txBody>
-      </p:sp>
-    </p:spTree>
-    <p:extLst>
-      <p:ext uri="{BB962C8B-B14F-4D97-AF65-F5344CB8AC3E}">
-        <p14:creationId xmlns:p14="http://schemas.microsoft.com/office/powerpoint/2010/main" val="3956611292"/>
-      </p:ext>
-    </p:extLst>
-  </p:cSld>
-  <p:clrMapOvr>
-    <a:masterClrMapping/>
-  </p:clrMapOvr>
-</p:sld>
-</file>
-
-<file path=ppt/slides/slide17.xml><?xml version="1.0" encoding="utf-8"?>
-<p:sld xmlns:a="http://schemas.openxmlformats.org/drawingml/2006/main" xmlns:r="http://schemas.openxmlformats.org/officeDocument/2006/relationships" xmlns:p="http://schemas.openxmlformats.org/presentationml/2006/main">
-  <p:cSld>
-    <p:spTree>
-      <p:nvGrpSpPr>
-        <p:cNvPr id="1" name=""/>
-        <p:cNvGrpSpPr/>
-        <p:nvPr/>
-      </p:nvGrpSpPr>
-      <p:grpSpPr>
-        <a:xfrm>
-          <a:off x="0" y="0"/>
-          <a:ext cx="0" cy="0"/>
-          <a:chOff x="0" y="0"/>
-          <a:chExt cx="0" cy="0"/>
-        </a:xfrm>
-      </p:grpSpPr>
-      <p:sp>
-        <p:nvSpPr>
-          <p:cNvPr id="2" name="Title 1">
-            <a:extLst>
-              <a:ext uri="{FF2B5EF4-FFF2-40B4-BE49-F238E27FC236}">
-                <a16:creationId xmlns:a16="http://schemas.microsoft.com/office/drawing/2014/main" id="{9E0B047E-DBBC-3D04-CD14-D93E739FED37}"/>
-              </a:ext>
-            </a:extLst>
-          </p:cNvPr>
-          <p:cNvSpPr>
-            <a:spLocks noGrp="1"/>
-          </p:cNvSpPr>
-          <p:nvPr>
-            <p:ph type="title"/>
-          </p:nvPr>
-        </p:nvSpPr>
-        <p:spPr/>
-        <p:txBody>
-          <a:bodyPr/>
-          <a:lstStyle/>
-          <a:p>
-            <a:r>
-              <a:rPr lang="en-US" dirty="0"/>
-              <a:t>Thresholds on Overlap</a:t>
-            </a:r>
-          </a:p>
-        </p:txBody>
-      </p:sp>
-      <p:sp>
-        <p:nvSpPr>
-          <p:cNvPr id="3" name="Content Placeholder 2">
-            <a:extLst>
-              <a:ext uri="{FF2B5EF4-FFF2-40B4-BE49-F238E27FC236}">
-                <a16:creationId xmlns:a16="http://schemas.microsoft.com/office/drawing/2014/main" id="{9F43E4B6-F690-C8B3-76EE-CF219A11E89A}"/>
-              </a:ext>
-            </a:extLst>
-          </p:cNvPr>
-          <p:cNvSpPr>
-            <a:spLocks noGrp="1"/>
-          </p:cNvSpPr>
-          <p:nvPr>
-            <p:ph idx="1"/>
-          </p:nvPr>
-        </p:nvSpPr>
-        <p:spPr>
-          <a:xfrm>
-            <a:off x="0" y="1853754"/>
-            <a:ext cx="6438396" cy="4199727"/>
-          </a:xfrm>
-        </p:spPr>
-        <p:txBody>
-          <a:bodyPr>
-            <a:normAutofit fontScale="92500" lnSpcReduction="20000"/>
-          </a:bodyPr>
-          <a:lstStyle/>
-          <a:p>
-            <a:r>
-              <a:rPr lang="en-US" dirty="0"/>
-              <a:t>Can also compare distributions by looking at their overlap. </a:t>
-            </a:r>
-          </a:p>
-          <a:p>
-            <a:r>
-              <a:rPr lang="en-US" dirty="0"/>
-              <a:t>We can extend this thinking to the idea of a threshold. </a:t>
-            </a:r>
-          </a:p>
-          <a:p>
-            <a:pPr lvl="1"/>
-            <a:r>
-              <a:rPr lang="en-US" dirty="0"/>
-              <a:t>The threshold is a cutoff point that we can use to separate classes (distributions). </a:t>
-            </a:r>
-          </a:p>
-          <a:p>
-            <a:r>
-              <a:rPr lang="en-US" dirty="0"/>
-              <a:t>There are a couple of threshold calculations:</a:t>
-            </a:r>
-          </a:p>
-          <a:p>
-            <a:pPr lvl="1"/>
-            <a:r>
-              <a:rPr lang="en-US" dirty="0"/>
-              <a:t>Simple – average of the means. </a:t>
-            </a:r>
-          </a:p>
-          <a:p>
-            <a:pPr lvl="1"/>
-            <a:r>
-              <a:rPr lang="en-US" dirty="0"/>
-              <a:t>Complex – calculation with means and standard deviations. </a:t>
-            </a:r>
-          </a:p>
-          <a:p>
-            <a:r>
-              <a:rPr lang="en-US" dirty="0"/>
-              <a:t>Can act as a cutoff – over is one distribution, under is the other. </a:t>
-            </a:r>
-          </a:p>
-          <a:p>
-            <a:pPr lvl="1"/>
-            <a:r>
-              <a:rPr lang="en-US" dirty="0"/>
-              <a:t>The purity of the two groups is the quality of the threshold. </a:t>
-            </a:r>
-          </a:p>
-          <a:p>
-            <a:pPr lvl="1"/>
-            <a:r>
-              <a:rPr lang="en-US" dirty="0"/>
-              <a:t>A perfect cutoff means that we can use one value to separate the groups with no errors.</a:t>
-            </a:r>
-          </a:p>
-        </p:txBody>
-      </p:sp>
-      <p:pic>
-        <p:nvPicPr>
-          <p:cNvPr id="5124" name="Picture 4" descr="Risk distributions and area under the ROC curve (AUC) (adapted from... |  Download Scientific Diagram">
-            <a:extLst>
-              <a:ext uri="{FF2B5EF4-FFF2-40B4-BE49-F238E27FC236}">
-                <a16:creationId xmlns:a16="http://schemas.microsoft.com/office/drawing/2014/main" id="{09D8CC62-F962-9F2E-5D29-241523E7B1A3}"/>
-              </a:ext>
-            </a:extLst>
-          </p:cNvPr>
-          <p:cNvPicPr>
-            <a:picLocks noChangeAspect="1" noChangeArrowheads="1"/>
-          </p:cNvPicPr>
-          <p:nvPr/>
-        </p:nvPicPr>
-        <p:blipFill rotWithShape="1">
-          <a:blip r:embed="rId2">
-            <a:extLst>
-              <a:ext uri="{28A0092B-C50C-407E-A947-70E740481C1C}">
-                <a14:useLocalDpi xmlns:a14="http://schemas.microsoft.com/office/drawing/2010/main" val="0"/>
-              </a:ext>
-            </a:extLst>
-          </a:blip>
-          <a:srcRect b="47480"/>
-          <a:stretch>
-            <a:fillRect/>
-          </a:stretch>
-        </p:blipFill>
-        <p:spPr bwMode="auto">
-          <a:xfrm>
-            <a:off x="6438396" y="2610754"/>
-            <a:ext cx="5753604" cy="2072757"/>
-          </a:xfrm>
-          <a:prstGeom prst="rect">
-            <a:avLst/>
-          </a:prstGeom>
-          <a:noFill/>
-          <a:extLst>
-            <a:ext uri="{909E8E84-426E-40DD-AFC4-6F175D3DCCD1}">
-              <a14:hiddenFill xmlns:a14="http://schemas.microsoft.com/office/drawing/2010/main">
-                <a:solidFill>
-                  <a:srgbClr val="FFFFFF"/>
-                </a:solidFill>
-              </a14:hiddenFill>
-            </a:ext>
-          </a:extLst>
-        </p:spPr>
-      </p:pic>
-    </p:spTree>
-    <p:extLst>
-      <p:ext uri="{BB962C8B-B14F-4D97-AF65-F5344CB8AC3E}">
-        <p14:creationId xmlns:p14="http://schemas.microsoft.com/office/powerpoint/2010/main" val="257233449"/>
       </p:ext>
     </p:extLst>
   </p:cSld>
@@ -5077,7 +5125,7 @@
           <p:cNvPr id="2" name="Title 1">
             <a:extLst>
               <a:ext uri="{FF2B5EF4-FFF2-40B4-BE49-F238E27FC236}">
-                <a16:creationId xmlns:a16="http://schemas.microsoft.com/office/drawing/2014/main" id="{DFD6CBCA-25D9-57B1-30E5-A6B31A24F2A9}"/>
+                <a16:creationId xmlns:a16="http://schemas.microsoft.com/office/drawing/2014/main" id="{3FE60D53-C53E-0CA9-ECA8-5259942ECD6B}"/>
               </a:ext>
             </a:extLst>
           </p:cNvPr>
@@ -5095,7 +5143,7 @@
           <a:p>
             <a:r>
               <a:rPr lang="en-US" dirty="0"/>
-              <a:t>Using a Threshold</a:t>
+              <a:t>So…</a:t>
             </a:r>
           </a:p>
         </p:txBody>
@@ -5105,7 +5153,7 @@
           <p:cNvPr id="3" name="Content Placeholder 2">
             <a:extLst>
               <a:ext uri="{FF2B5EF4-FFF2-40B4-BE49-F238E27FC236}">
-                <a16:creationId xmlns:a16="http://schemas.microsoft.com/office/drawing/2014/main" id="{433BB145-9A75-66C8-C7A0-00784B3BD9DE}"/>
+                <a16:creationId xmlns:a16="http://schemas.microsoft.com/office/drawing/2014/main" id="{7FC672AD-E113-A552-68B4-3E885C6E68FC}"/>
               </a:ext>
             </a:extLst>
           </p:cNvPr>
@@ -5116,19 +5164,61 @@
             <p:ph idx="1"/>
           </p:nvPr>
         </p:nvSpPr>
-        <p:spPr/>
-        <p:txBody>
-          <a:bodyPr/>
-          <a:lstStyle/>
-          <a:p>
-            <a:endParaRPr lang="en-US"/>
+        <p:spPr>
+          <a:xfrm>
+            <a:off x="1451579" y="1853754"/>
+            <a:ext cx="9603275" cy="4199727"/>
+          </a:xfrm>
+        </p:spPr>
+        <p:txBody>
+          <a:bodyPr/>
+          <a:lstStyle/>
+          <a:p>
+            <a:r>
+              <a:rPr lang="en-US" dirty="0"/>
+              <a:t>We can frame any (discreet*) thing we’ve collected a sample on as probabilistic. </a:t>
+            </a:r>
+          </a:p>
+          <a:p>
+            <a:pPr lvl="1"/>
+            <a:r>
+              <a:rPr lang="en-US" dirty="0"/>
+              <a:t>The samples tells us the # of times it occurred vs not. </a:t>
+            </a:r>
+          </a:p>
+          <a:p>
+            <a:pPr lvl="1"/>
+            <a:r>
+              <a:rPr lang="en-US" dirty="0"/>
+              <a:t>If we have a model of the distribution, that gives us an expectation of what will happen. </a:t>
+            </a:r>
+          </a:p>
+          <a:p>
+            <a:pPr lvl="1"/>
+            <a:r>
+              <a:rPr lang="en-US" dirty="0"/>
+              <a:t>Looking forward, that percentage is the expected probability. </a:t>
+            </a:r>
+          </a:p>
+          <a:p>
+            <a:pPr lvl="1"/>
+            <a:r>
+              <a:rPr lang="en-US" dirty="0"/>
+              <a:t>*with continuous data this usually equates to &lt;&gt;, or similar. </a:t>
+            </a:r>
+          </a:p>
+          <a:p>
+            <a:r>
+              <a:rPr lang="en-US" dirty="0"/>
+              <a:t>This depends on how well the model matches reality. </a:t>
+            </a:r>
           </a:p>
         </p:txBody>
       </p:sp>
     </p:spTree>
     <p:extLst>
       <p:ext uri="{BB962C8B-B14F-4D97-AF65-F5344CB8AC3E}">
-        <p14:creationId xmlns:p14="http://schemas.microsoft.com/office/powerpoint/2010/main" val="2429307724"/>
+        <p14:creationId xmlns:p14="http://schemas.microsoft.com/office/powerpoint/2010/main" val="39305104"/>
       </p:ext>
     </p:extLst>
   </p:cSld>
@@ -5160,7 +5250,7 @@
           <p:cNvPr id="2" name="Title 1">
             <a:extLst>
               <a:ext uri="{FF2B5EF4-FFF2-40B4-BE49-F238E27FC236}">
-                <a16:creationId xmlns:a16="http://schemas.microsoft.com/office/drawing/2014/main" id="{D6145CC1-C337-5213-81D8-E4E36A6B8DA7}"/>
+                <a16:creationId xmlns:a16="http://schemas.microsoft.com/office/drawing/2014/main" id="{3D20239F-9A82-DF45-AA6F-25B28BD41AA6}"/>
               </a:ext>
             </a:extLst>
           </p:cNvPr>
@@ -5171,148 +5261,129 @@
             <p:ph type="title"/>
           </p:nvPr>
         </p:nvSpPr>
+        <p:spPr/>
+        <p:txBody>
+          <a:bodyPr/>
+          <a:lstStyle/>
+          <a:p>
+            <a:r>
+              <a:rPr lang="en-US" dirty="0"/>
+              <a:t>Conditional Probability</a:t>
+            </a:r>
+          </a:p>
+        </p:txBody>
+      </p:sp>
+      <p:sp>
+        <p:nvSpPr>
+          <p:cNvPr id="3" name="Content Placeholder 2">
+            <a:extLst>
+              <a:ext uri="{FF2B5EF4-FFF2-40B4-BE49-F238E27FC236}">
+                <a16:creationId xmlns:a16="http://schemas.microsoft.com/office/drawing/2014/main" id="{DF913740-0231-894D-9658-BE40BCA0C9C4}"/>
+              </a:ext>
+            </a:extLst>
+          </p:cNvPr>
+          <p:cNvSpPr>
+            <a:spLocks noGrp="1"/>
+          </p:cNvSpPr>
+          <p:nvPr>
+            <p:ph idx="1"/>
+          </p:nvPr>
+        </p:nvSpPr>
         <p:spPr>
           <a:xfrm>
-            <a:off x="1451579" y="804519"/>
-            <a:ext cx="3272821" cy="1049235"/>
-          </a:xfrm>
-        </p:spPr>
-        <p:txBody>
-          <a:bodyPr/>
-          <a:lstStyle/>
-          <a:p>
-            <a:r>
-              <a:rPr lang="en-US" dirty="0"/>
-              <a:t>Overlap</a:t>
-            </a:r>
-          </a:p>
-        </p:txBody>
-      </p:sp>
-      <p:sp>
-        <p:nvSpPr>
-          <p:cNvPr id="3" name="Content Placeholder 2">
-            <a:extLst>
-              <a:ext uri="{FF2B5EF4-FFF2-40B4-BE49-F238E27FC236}">
-                <a16:creationId xmlns:a16="http://schemas.microsoft.com/office/drawing/2014/main" id="{460E7EAB-A663-F42F-BAED-DD52E6A94762}"/>
-              </a:ext>
-            </a:extLst>
-          </p:cNvPr>
-          <p:cNvSpPr>
-            <a:spLocks noGrp="1"/>
-          </p:cNvSpPr>
-          <p:nvPr>
-            <p:ph idx="1"/>
-          </p:nvPr>
-        </p:nvSpPr>
-        <p:spPr>
-          <a:xfrm>
-            <a:off x="1" y="1853754"/>
-            <a:ext cx="5273944" cy="4199727"/>
-          </a:xfrm>
-        </p:spPr>
-        <p:txBody>
-          <a:bodyPr/>
-          <a:lstStyle/>
-          <a:p>
-            <a:r>
-              <a:rPr lang="en-US" dirty="0"/>
-              <a:t>If the two </a:t>
+            <a:off x="5313593" y="1853754"/>
+            <a:ext cx="6743035" cy="4199727"/>
+          </a:xfrm>
+        </p:spPr>
+        <p:txBody>
+          <a:bodyPr>
+            <a:normAutofit/>
+          </a:bodyPr>
+          <a:lstStyle/>
+          <a:p>
+            <a:r>
+              <a:rPr lang="en-US" dirty="0"/>
+              <a:t>P(A | B) = probability that A is true, given that B is true.</a:t>
+            </a:r>
+          </a:p>
+          <a:p>
+            <a:r>
+              <a:rPr lang="en-US" dirty="0"/>
+              <a:t>Conditional probability is allows us to say “how likely is X if something happens?”</a:t>
+            </a:r>
+          </a:p>
+          <a:p>
+            <a:pPr lvl="1"/>
+            <a:r>
+              <a:rPr lang="en-US" dirty="0"/>
+              <a:t>E.g. If we are over 7’0” how </a:t>
             </a:r>
             <a:r>
               <a:rPr lang="en-US" dirty="0" err="1"/>
-              <a:t>dists</a:t>
-            </a:r>
-            <a:r>
-              <a:rPr lang="en-US" dirty="0"/>
-              <a:t> don’t overlap much at all, we can clearly classify into group A or B. </a:t>
-            </a:r>
-          </a:p>
-          <a:p>
-            <a:pPr lvl="1"/>
-            <a:r>
-              <a:rPr lang="en-US" dirty="0"/>
-              <a:t>The overlap area is where we might make mistakes. </a:t>
-            </a:r>
-          </a:p>
-          <a:p>
-            <a:pPr lvl="1"/>
-            <a:r>
-              <a:rPr lang="en-US" dirty="0"/>
-              <a:t>On either side of the overlap, we know exactly what class a value belongs to. </a:t>
-            </a:r>
-          </a:p>
-          <a:p>
-            <a:r>
-              <a:rPr lang="en-US" dirty="0"/>
-              <a:t>E.g. a value of .5 could be in either group. </a:t>
-            </a:r>
-          </a:p>
-          <a:p>
-            <a:pPr lvl="1"/>
-            <a:r>
-              <a:rPr lang="en-US" dirty="0"/>
-              <a:t>A value of 8 can only be blue. </a:t>
-            </a:r>
-          </a:p>
-          <a:p>
-            <a:r>
-              <a:rPr lang="en-US" dirty="0"/>
-              <a:t>More different distributions have less overlap. </a:t>
+              <a:t>likley</a:t>
+            </a:r>
+            <a:r>
+              <a:rPr lang="en-US" dirty="0"/>
+              <a:t> are we to make the NBA?</a:t>
+            </a:r>
+          </a:p>
+          <a:p>
+            <a:pPr lvl="1"/>
+            <a:r>
+              <a:rPr lang="en-US" dirty="0"/>
+              <a:t>In the 90s someone calculated that at about 14%</a:t>
+            </a:r>
+          </a:p>
+          <a:p>
+            <a:r>
+              <a:rPr lang="en-US" dirty="0"/>
+              <a:t>Some quick covid tests have reported about a 20% false negative rate. </a:t>
+            </a:r>
+          </a:p>
+          <a:p>
+            <a:pPr lvl="1"/>
+            <a:r>
+              <a:rPr lang="en-US" dirty="0"/>
+              <a:t>P(Test Positive | Have Covid) = 80%</a:t>
             </a:r>
           </a:p>
         </p:txBody>
       </p:sp>
       <p:pic>
         <p:nvPicPr>
-          <p:cNvPr id="4098" name="Picture 2" descr="machine learning - How to find the threshold between two histograms at  fixed false positive rate? - Cross Validated">
-            <a:extLst>
-              <a:ext uri="{FF2B5EF4-FFF2-40B4-BE49-F238E27FC236}">
-                <a16:creationId xmlns:a16="http://schemas.microsoft.com/office/drawing/2014/main" id="{EA2D23F6-BED9-55DB-56BB-A84CFD6F14C3}"/>
+          <p:cNvPr id="4" name="Picture 3" descr="Statistics: Ch 4 Probability in Statistics (46 of 74) Conditional  Probability">
+            <a:extLst>
+              <a:ext uri="{FF2B5EF4-FFF2-40B4-BE49-F238E27FC236}">
+                <a16:creationId xmlns:a16="http://schemas.microsoft.com/office/drawing/2014/main" id="{356701C1-8AFE-743C-56FF-BB8E78FEB9AF}"/>
               </a:ext>
             </a:extLst>
           </p:cNvPr>
           <p:cNvPicPr>
-            <a:picLocks noChangeAspect="1" noChangeArrowheads="1"/>
+            <a:picLocks noChangeAspect="1"/>
           </p:cNvPicPr>
           <p:nvPr/>
         </p:nvPicPr>
-        <p:blipFill rotWithShape="1">
-          <a:blip r:embed="rId2">
-            <a:extLst>
-              <a:ext uri="{28A0092B-C50C-407E-A947-70E740481C1C}">
-                <a14:useLocalDpi xmlns:a14="http://schemas.microsoft.com/office/drawing/2010/main" val="0"/>
-              </a:ext>
-            </a:extLst>
-          </a:blip>
-          <a:srcRect t="10224"/>
+        <p:blipFill>
+          <a:blip r:embed="rId2"/>
+          <a:srcRect t="10586" b="10247"/>
           <a:stretch>
             <a:fillRect/>
           </a:stretch>
         </p:blipFill>
-        <p:spPr bwMode="auto">
-          <a:xfrm>
-            <a:off x="5273944" y="1423851"/>
-            <a:ext cx="6918056" cy="5027748"/>
+        <p:spPr>
+          <a:xfrm>
+            <a:off x="1" y="2349499"/>
+            <a:ext cx="5313592" cy="3154945"/>
           </a:xfrm>
           <a:prstGeom prst="rect">
             <a:avLst/>
           </a:prstGeom>
-          <a:noFill/>
-          <a:extLst>
-            <a:ext uri="{909E8E84-426E-40DD-AFC4-6F175D3DCCD1}">
-              <a14:hiddenFill xmlns:a14="http://schemas.microsoft.com/office/drawing/2010/main">
-                <a:solidFill>
-                  <a:srgbClr val="FFFFFF"/>
-                </a:solidFill>
-              </a14:hiddenFill>
-            </a:ext>
-          </a:extLst>
         </p:spPr>
       </p:pic>
     </p:spTree>
     <p:extLst>
       <p:ext uri="{BB962C8B-B14F-4D97-AF65-F5344CB8AC3E}">
-        <p14:creationId xmlns:p14="http://schemas.microsoft.com/office/powerpoint/2010/main" val="2168809185"/>
+        <p14:creationId xmlns:p14="http://schemas.microsoft.com/office/powerpoint/2010/main" val="702050722"/>
       </p:ext>
     </p:extLst>
   </p:cSld>
@@ -5501,7 +5572,7 @@
           <p:cNvPr id="2" name="Title 1">
             <a:extLst>
               <a:ext uri="{FF2B5EF4-FFF2-40B4-BE49-F238E27FC236}">
-                <a16:creationId xmlns:a16="http://schemas.microsoft.com/office/drawing/2014/main" id="{578C9733-3D0E-E3ED-AB04-A5715761AC08}"/>
+                <a16:creationId xmlns:a16="http://schemas.microsoft.com/office/drawing/2014/main" id="{EEC9A070-01E8-F3C0-9C66-5F89A6087481}"/>
               </a:ext>
             </a:extLst>
           </p:cNvPr>
@@ -5517,10 +5588,7 @@
           <a:bodyPr/>
           <a:lstStyle/>
           <a:p>
-            <a:r>
-              <a:rPr lang="en-US" dirty="0"/>
-              <a:t>Probability of Superiority</a:t>
-            </a:r>
+            <a:endParaRPr lang="en-US"/>
           </a:p>
         </p:txBody>
       </p:sp>
@@ -5529,7 +5597,7 @@
           <p:cNvPr id="3" name="Content Placeholder 2">
             <a:extLst>
               <a:ext uri="{FF2B5EF4-FFF2-40B4-BE49-F238E27FC236}">
-                <a16:creationId xmlns:a16="http://schemas.microsoft.com/office/drawing/2014/main" id="{E9061EE7-8686-94A9-824B-A5D5FCE50ACE}"/>
+                <a16:creationId xmlns:a16="http://schemas.microsoft.com/office/drawing/2014/main" id="{326F1E76-D977-0924-94F9-DB0593499D3E}"/>
               </a:ext>
             </a:extLst>
           </p:cNvPr>
@@ -5540,118 +5608,49 @@
             <p:ph idx="1"/>
           </p:nvPr>
         </p:nvSpPr>
-        <p:spPr>
-          <a:xfrm>
-            <a:off x="100361" y="1940312"/>
-            <a:ext cx="5956125" cy="4215161"/>
-          </a:xfrm>
-        </p:spPr>
-        <p:txBody>
-          <a:bodyPr>
-            <a:normAutofit/>
-          </a:bodyPr>
-          <a:lstStyle/>
-          <a:p>
-            <a:r>
-              <a:rPr lang="en-US" dirty="0"/>
-              <a:t>The overlap and threshold ideas can be formed into the Probability of Superiority. </a:t>
-            </a:r>
-          </a:p>
-          <a:p>
-            <a:pPr lvl="1"/>
-            <a:r>
-              <a:rPr lang="en-US" dirty="0"/>
-              <a:t>If we pick a random value from the higher group what is the probability it is larger than a random value from the lower group. </a:t>
-            </a:r>
-          </a:p>
-          <a:p>
-            <a:pPr lvl="1"/>
-            <a:r>
-              <a:rPr lang="en-US" dirty="0"/>
-              <a:t>E.g. does a random treatment person live longer than a random placebo person? </a:t>
-            </a:r>
-          </a:p>
-          <a:p>
-            <a:r>
-              <a:rPr lang="en-US" dirty="0"/>
-              <a:t>This is in line with the overlap is we plot the PDFs. </a:t>
-            </a:r>
-          </a:p>
-          <a:p>
-            <a:r>
-              <a:rPr lang="en-US" dirty="0"/>
-              <a:t>https://</a:t>
-            </a:r>
-            <a:r>
-              <a:rPr lang="en-US" dirty="0" err="1"/>
-              <a:t>rpsychologist.com</a:t>
-            </a:r>
-            <a:r>
-              <a:rPr lang="en-US" dirty="0"/>
-              <a:t>/</a:t>
-            </a:r>
-            <a:r>
-              <a:rPr lang="en-US" dirty="0" err="1"/>
-              <a:t>cohend</a:t>
-            </a:r>
-            <a:r>
-              <a:rPr lang="en-US" dirty="0"/>
-              <a:t>/</a:t>
-            </a:r>
+        <p:spPr/>
+        <p:txBody>
+          <a:bodyPr/>
+          <a:lstStyle/>
+          <a:p>
+            <a:endParaRPr lang="en-US"/>
           </a:p>
         </p:txBody>
       </p:sp>
       <p:pic>
         <p:nvPicPr>
-          <p:cNvPr id="6146" name="Picture 2" descr="因果推理方法— 全栈DS/DA养成手册">
-            <a:extLst>
-              <a:ext uri="{FF2B5EF4-FFF2-40B4-BE49-F238E27FC236}">
-                <a16:creationId xmlns:a16="http://schemas.microsoft.com/office/drawing/2014/main" id="{4030EC37-F6AA-B971-1402-E7052B7B0992}"/>
+          <p:cNvPr id="4" name="Picture 3" descr="Conditional Probability - Math Steps, Examples &amp; Questions">
+            <a:extLst>
+              <a:ext uri="{FF2B5EF4-FFF2-40B4-BE49-F238E27FC236}">
+                <a16:creationId xmlns:a16="http://schemas.microsoft.com/office/drawing/2014/main" id="{799F6C06-00C5-4A78-E1CC-090925B923DE}"/>
               </a:ext>
             </a:extLst>
           </p:cNvPr>
           <p:cNvPicPr>
-            <a:picLocks noChangeAspect="1" noChangeArrowheads="1"/>
+            <a:picLocks noChangeAspect="1"/>
           </p:cNvPicPr>
           <p:nvPr/>
         </p:nvPicPr>
-        <p:blipFill rotWithShape="1">
-          <a:blip r:embed="rId2">
-            <a:extLst>
-              <a:ext uri="{28A0092B-C50C-407E-A947-70E740481C1C}">
-                <a14:useLocalDpi xmlns:a14="http://schemas.microsoft.com/office/drawing/2010/main" val="0"/>
-              </a:ext>
-            </a:extLst>
-          </a:blip>
-          <a:srcRect l="6702" r="5149"/>
+        <p:blipFill>
+          <a:blip r:embed="rId2"/>
           <a:stretch>
             <a:fillRect/>
           </a:stretch>
         </p:blipFill>
-        <p:spPr bwMode="auto">
-          <a:xfrm>
-            <a:off x="6054201" y="2061802"/>
-            <a:ext cx="6037438" cy="3424598"/>
+        <p:spPr>
+          <a:xfrm>
+            <a:off x="0" y="-15043"/>
+            <a:ext cx="12192000" cy="6891130"/>
           </a:xfrm>
           <a:prstGeom prst="rect">
             <a:avLst/>
           </a:prstGeom>
-          <a:noFill/>
-          <a:extLst>
-            <a:ext uri="{909E8E84-426E-40DD-AFC4-6F175D3DCCD1}">
-              <a14:hiddenFill xmlns:a14="http://schemas.microsoft.com/office/drawing/2010/main">
-                <a:solidFill>
-                  <a:srgbClr val="FFFFFF"/>
-                </a:solidFill>
-              </a14:hiddenFill>
-            </a:ext>
-          </a:extLst>
         </p:spPr>
       </p:pic>
     </p:spTree>
     <p:extLst>
       <p:ext uri="{BB962C8B-B14F-4D97-AF65-F5344CB8AC3E}">
-        <p14:creationId xmlns:p14="http://schemas.microsoft.com/office/powerpoint/2010/main" val="1298076308"/>
+        <p14:creationId xmlns:p14="http://schemas.microsoft.com/office/powerpoint/2010/main" val="3403699131"/>
       </p:ext>
     </p:extLst>
   </p:cSld>
@@ -5683,7 +5682,7 @@
           <p:cNvPr id="2" name="Title 1">
             <a:extLst>
               <a:ext uri="{FF2B5EF4-FFF2-40B4-BE49-F238E27FC236}">
-                <a16:creationId xmlns:a16="http://schemas.microsoft.com/office/drawing/2014/main" id="{46857B74-29CE-E500-AAF6-BAE7098B78A3}"/>
+                <a16:creationId xmlns:a16="http://schemas.microsoft.com/office/drawing/2014/main" id="{B7FE739A-EA3E-0AA7-29C6-2EF044B4137A}"/>
               </a:ext>
             </a:extLst>
           </p:cNvPr>
@@ -5701,7 +5700,7 @@
           <a:p>
             <a:r>
               <a:rPr lang="en-US" dirty="0"/>
-              <a:t>Comparison Tools</a:t>
+              <a:t>Conditional Probabilities</a:t>
             </a:r>
           </a:p>
         </p:txBody>
@@ -5711,7 +5710,7 @@
           <p:cNvPr id="3" name="Content Placeholder 2">
             <a:extLst>
               <a:ext uri="{FF2B5EF4-FFF2-40B4-BE49-F238E27FC236}">
-                <a16:creationId xmlns:a16="http://schemas.microsoft.com/office/drawing/2014/main" id="{95D89D88-9AC9-1850-D5BF-65E65362FAAF}"/>
+                <a16:creationId xmlns:a16="http://schemas.microsoft.com/office/drawing/2014/main" id="{9C12B345-73B9-6B2C-3AA1-CB4C48BD7634}"/>
               </a:ext>
             </a:extLst>
           </p:cNvPr>
@@ -5724,57 +5723,72 @@
         </p:nvSpPr>
         <p:spPr>
           <a:xfrm>
-            <a:off x="1451579" y="1951464"/>
-            <a:ext cx="9603275" cy="4102018"/>
-          </a:xfrm>
-        </p:spPr>
-        <p:txBody>
-          <a:bodyPr/>
-          <a:lstStyle/>
-          <a:p>
-            <a:r>
-              <a:rPr lang="en-US" dirty="0"/>
-              <a:t>All of these things allow us to do a comparison of distributions. </a:t>
-            </a:r>
-          </a:p>
-          <a:p>
-            <a:pPr lvl="1"/>
-            <a:r>
-              <a:rPr lang="en-US" dirty="0"/>
-              <a:t>Effect size, overlap, superiority. </a:t>
-            </a:r>
-          </a:p>
-          <a:p>
-            <a:pPr lvl="1"/>
-            <a:r>
-              <a:rPr lang="en-US" dirty="0"/>
-              <a:t>None give a definitive &lt;&gt;= result. </a:t>
-            </a:r>
-          </a:p>
-          <a:p>
-            <a:r>
-              <a:rPr lang="en-US" dirty="0"/>
-              <a:t>After we do estimation we’ll add another, hypothesis tests. </a:t>
-            </a:r>
-          </a:p>
-          <a:p>
-            <a:r>
-              <a:rPr lang="en-US" dirty="0"/>
-              <a:t>Each leaves us with some uncertainty. </a:t>
-            </a:r>
-          </a:p>
-          <a:p>
-            <a:pPr lvl="1"/>
-            <a:r>
-              <a:rPr lang="en-US" dirty="0"/>
-              <a:t>Each thing is evidence of difference/similarity. </a:t>
-            </a:r>
-          </a:p>
-          <a:p>
-            <a:pPr lvl="1"/>
-            <a:r>
-              <a:rPr lang="en-US" dirty="0"/>
-              <a:t>We need ‘reasonable doubt’. </a:t>
+            <a:off x="1451579" y="1929284"/>
+            <a:ext cx="9603275" cy="4124197"/>
+          </a:xfrm>
+        </p:spPr>
+        <p:txBody>
+          <a:bodyPr/>
+          <a:lstStyle/>
+          <a:p>
+            <a:r>
+              <a:rPr lang="en-US" dirty="0"/>
+              <a:t>Conditional probabilities allow us to learn more details from data. </a:t>
+            </a:r>
+          </a:p>
+          <a:p>
+            <a:r>
+              <a:rPr lang="en-US" dirty="0"/>
+              <a:t>E.g. the risk of getting cancer at all is something like 45%. </a:t>
+            </a:r>
+          </a:p>
+          <a:p>
+            <a:pPr lvl="1"/>
+            <a:r>
+              <a:rPr lang="en-US" dirty="0"/>
+              <a:t>That risk doesn’t apply the same to all people in Canada. </a:t>
+            </a:r>
+          </a:p>
+          <a:p>
+            <a:pPr lvl="1"/>
+            <a:r>
+              <a:rPr lang="en-US" dirty="0"/>
+              <a:t>The risk for white-collar, clean eating, exercise enthusiasts is comparatively low. </a:t>
+            </a:r>
+          </a:p>
+          <a:p>
+            <a:pPr lvl="1"/>
+            <a:r>
+              <a:rPr lang="en-US" dirty="0"/>
+              <a:t>The risk for chronic smoking, tanning addicts is high. </a:t>
+            </a:r>
+          </a:p>
+          <a:p>
+            <a:pPr lvl="1"/>
+            <a:r>
+              <a:rPr lang="en-US" dirty="0"/>
+              <a:t>If we need to plan for future cancer clinic capacity, this can matter. </a:t>
+            </a:r>
+          </a:p>
+          <a:p>
+            <a:r>
+              <a:rPr lang="en-US" dirty="0"/>
+              <a:t>Framed differently, we can also imagine this as our expectation getting </a:t>
+            </a:r>
+            <a:r>
+              <a:rPr lang="en-US" i="1" dirty="0"/>
+              <a:t>updated</a:t>
+            </a:r>
+            <a:r>
+              <a:rPr lang="en-US" dirty="0"/>
+              <a:t> each time we ‘learn something’, or get information from a ‘new’ variable. </a:t>
+            </a:r>
+          </a:p>
+          <a:p>
+            <a:pPr lvl="1"/>
+            <a:r>
+              <a:rPr lang="en-US" dirty="0"/>
+              <a:t>This idea will come up again soon…</a:t>
             </a:r>
           </a:p>
         </p:txBody>
@@ -5782,7 +5796,7 @@
     </p:spTree>
     <p:extLst>
       <p:ext uri="{BB962C8B-B14F-4D97-AF65-F5344CB8AC3E}">
-        <p14:creationId xmlns:p14="http://schemas.microsoft.com/office/powerpoint/2010/main" val="300796387"/>
+        <p14:creationId xmlns:p14="http://schemas.microsoft.com/office/powerpoint/2010/main" val="3334995097"/>
       </p:ext>
     </p:extLst>
   </p:cSld>
@@ -5814,7 +5828,7 @@
           <p:cNvPr id="2" name="Title 1">
             <a:extLst>
               <a:ext uri="{FF2B5EF4-FFF2-40B4-BE49-F238E27FC236}">
-                <a16:creationId xmlns:a16="http://schemas.microsoft.com/office/drawing/2014/main" id="{E02EB4AF-E945-3564-AE2C-8D101A281F72}"/>
+                <a16:creationId xmlns:a16="http://schemas.microsoft.com/office/drawing/2014/main" id="{2D3FC65A-5AA4-42A5-4E22-DAF3D1F0ECC3}"/>
               </a:ext>
             </a:extLst>
           </p:cNvPr>
@@ -5830,10 +5844,7 @@
           <a:bodyPr/>
           <a:lstStyle/>
           <a:p>
-            <a:r>
-              <a:rPr lang="en-US" dirty="0"/>
-              <a:t>Odds</a:t>
-            </a:r>
+            <a:endParaRPr lang="en-US" dirty="0"/>
           </a:p>
         </p:txBody>
       </p:sp>
@@ -5842,7 +5853,7 @@
           <p:cNvPr id="3" name="Content Placeholder 2">
             <a:extLst>
               <a:ext uri="{FF2B5EF4-FFF2-40B4-BE49-F238E27FC236}">
-                <a16:creationId xmlns:a16="http://schemas.microsoft.com/office/drawing/2014/main" id="{0D19A075-03D3-CE2C-2556-1E467F68CFCB}"/>
+                <a16:creationId xmlns:a16="http://schemas.microsoft.com/office/drawing/2014/main" id="{31E159BA-9ADF-55C3-1522-CF22725349F8}"/>
               </a:ext>
             </a:extLst>
           </p:cNvPr>
@@ -5858,23 +5869,14 @@
           <a:bodyPr/>
           <a:lstStyle/>
           <a:p>
-            <a:r>
-              <a:rPr lang="en-US" dirty="0"/>
-              <a:t>All of this probability talk leads us to one of the most important ML concepts – odds. </a:t>
-            </a:r>
-          </a:p>
-          <a:p>
-            <a:r>
-              <a:rPr lang="en-US" dirty="0"/>
-              <a:t>Odds are an alternate expression of probability. </a:t>
-            </a:r>
+            <a:endParaRPr lang="en-US"/>
           </a:p>
         </p:txBody>
       </p:sp>
     </p:spTree>
     <p:extLst>
       <p:ext uri="{BB962C8B-B14F-4D97-AF65-F5344CB8AC3E}">
-        <p14:creationId xmlns:p14="http://schemas.microsoft.com/office/powerpoint/2010/main" val="429911426"/>
+        <p14:creationId xmlns:p14="http://schemas.microsoft.com/office/powerpoint/2010/main" val="4102312996"/>
       </p:ext>
     </p:extLst>
   </p:cSld>
@@ -5906,7 +5908,7 @@
           <p:cNvPr id="2" name="Title 1">
             <a:extLst>
               <a:ext uri="{FF2B5EF4-FFF2-40B4-BE49-F238E27FC236}">
-                <a16:creationId xmlns:a16="http://schemas.microsoft.com/office/drawing/2014/main" id="{35230F09-B44A-CB77-DFE0-6E063223B214}"/>
+                <a16:creationId xmlns:a16="http://schemas.microsoft.com/office/drawing/2014/main" id="{5F4C1D0B-BFC8-C12F-F807-53E20790C6BA}"/>
               </a:ext>
             </a:extLst>
           </p:cNvPr>
@@ -5917,144 +5919,52 @@
             <p:ph type="title"/>
           </p:nvPr>
         </p:nvSpPr>
+        <p:spPr>
+          <a:xfrm>
+            <a:off x="1076446" y="804519"/>
+            <a:ext cx="10370915" cy="1049235"/>
+          </a:xfrm>
+        </p:spPr>
+        <p:txBody>
+          <a:bodyPr/>
+          <a:lstStyle/>
+          <a:p>
+            <a:r>
+              <a:rPr lang="en-US" dirty="0"/>
+              <a:t>Probability at work – Comparing Distributions</a:t>
+            </a:r>
+          </a:p>
+        </p:txBody>
+      </p:sp>
+      <p:sp>
+        <p:nvSpPr>
+          <p:cNvPr id="3" name="Content Placeholder 2">
+            <a:extLst>
+              <a:ext uri="{FF2B5EF4-FFF2-40B4-BE49-F238E27FC236}">
+                <a16:creationId xmlns:a16="http://schemas.microsoft.com/office/drawing/2014/main" id="{5D34C7E8-23F5-DE2A-79B8-909246B2FB98}"/>
+              </a:ext>
+            </a:extLst>
+          </p:cNvPr>
+          <p:cNvSpPr>
+            <a:spLocks noGrp="1"/>
+          </p:cNvSpPr>
+          <p:nvPr>
+            <p:ph idx="1"/>
+          </p:nvPr>
+        </p:nvSpPr>
         <p:spPr/>
         <p:txBody>
           <a:bodyPr/>
           <a:lstStyle/>
           <a:p>
-            <a:r>
-              <a:rPr lang="en-US" dirty="0"/>
-              <a:t>Odds</a:t>
-            </a:r>
-          </a:p>
-        </p:txBody>
-      </p:sp>
-      <p:sp>
-        <p:nvSpPr>
-          <p:cNvPr id="3" name="Content Placeholder 2">
-            <a:extLst>
-              <a:ext uri="{FF2B5EF4-FFF2-40B4-BE49-F238E27FC236}">
-                <a16:creationId xmlns:a16="http://schemas.microsoft.com/office/drawing/2014/main" id="{F7464E83-DAA2-5F11-C3F2-FD8C920A5071}"/>
-              </a:ext>
-            </a:extLst>
-          </p:cNvPr>
-          <p:cNvSpPr>
-            <a:spLocks noGrp="1"/>
-          </p:cNvSpPr>
-          <p:nvPr>
-            <p:ph idx="1"/>
-          </p:nvPr>
-        </p:nvSpPr>
-        <p:spPr>
-          <a:xfrm>
-            <a:off x="135924" y="1853754"/>
-            <a:ext cx="4569891" cy="4199727"/>
-          </a:xfrm>
-        </p:spPr>
-        <p:txBody>
-          <a:bodyPr>
-            <a:normAutofit/>
-          </a:bodyPr>
-          <a:lstStyle/>
-          <a:p>
-            <a:r>
-              <a:rPr lang="en-US" sz="2400" dirty="0"/>
-              <a:t>Odds are ratio to 1 to 0.</a:t>
-            </a:r>
-          </a:p>
-          <a:p>
-            <a:pPr lvl="1"/>
-            <a:r>
-              <a:rPr lang="en-US" dirty="0"/>
-              <a:t>Binary – ‘true’ can be either. </a:t>
-            </a:r>
-          </a:p>
-          <a:p>
-            <a:pPr lvl="1"/>
-            <a:r>
-              <a:rPr lang="en-US" dirty="0"/>
-              <a:t>We can translate at will. </a:t>
-            </a:r>
-          </a:p>
-          <a:p>
-            <a:r>
-              <a:rPr lang="en-US" sz="2400" dirty="0"/>
-              <a:t>Example - 80% chance of winning. </a:t>
-            </a:r>
-          </a:p>
-          <a:p>
-            <a:pPr lvl="1"/>
-            <a:r>
-              <a:rPr lang="en-US" sz="2000" dirty="0"/>
-              <a:t>.8 / .2 = 4. 4 to 1 odds of winning. </a:t>
-            </a:r>
-          </a:p>
-          <a:p>
-            <a:pPr lvl="1"/>
-            <a:r>
-              <a:rPr lang="en-US" sz="2000" dirty="0"/>
-              <a:t>.2 / .8 = .25. 1 to 4 odds of losing. </a:t>
-            </a:r>
-          </a:p>
-          <a:p>
-            <a:r>
-              <a:rPr lang="en-US" sz="2200" dirty="0"/>
-              <a:t>Translating probability to odds is needed in some places…</a:t>
-            </a:r>
-          </a:p>
-        </p:txBody>
-      </p:sp>
-      <p:pic>
-        <p:nvPicPr>
-          <p:cNvPr id="3074" name="Picture 2" descr="WHAT ARE THE ODDS? | Stats With Cats Blog">
-            <a:extLst>
-              <a:ext uri="{FF2B5EF4-FFF2-40B4-BE49-F238E27FC236}">
-                <a16:creationId xmlns:a16="http://schemas.microsoft.com/office/drawing/2014/main" id="{749D1FBF-A66F-6103-FE5B-671112D689EB}"/>
-              </a:ext>
-            </a:extLst>
-          </p:cNvPr>
-          <p:cNvPicPr>
-            <a:picLocks noChangeAspect="1" noChangeArrowheads="1"/>
-          </p:cNvPicPr>
-          <p:nvPr/>
-        </p:nvPicPr>
-        <p:blipFill>
-          <a:blip r:embed="rId2">
-            <a:extLst>
-              <a:ext uri="{28A0092B-C50C-407E-A947-70E740481C1C}">
-                <a14:useLocalDpi xmlns:a14="http://schemas.microsoft.com/office/drawing/2010/main" val="0"/>
-              </a:ext>
-            </a:extLst>
-          </a:blip>
-          <a:srcRect/>
-          <a:stretch>
-            <a:fillRect/>
-          </a:stretch>
-        </p:blipFill>
-        <p:spPr bwMode="auto">
-          <a:xfrm>
-            <a:off x="4704998" y="1120775"/>
-            <a:ext cx="7487001" cy="4443684"/>
-          </a:xfrm>
-          <a:prstGeom prst="rect">
-            <a:avLst/>
-          </a:prstGeom>
-          <a:noFill/>
-          <a:extLst>
-            <a:ext uri="{909E8E84-426E-40DD-AFC4-6F175D3DCCD1}">
-              <a14:hiddenFill xmlns:a14="http://schemas.microsoft.com/office/drawing/2010/main">
-                <a:solidFill>
-                  <a:srgbClr val="FFFFFF"/>
-                </a:solidFill>
-              </a14:hiddenFill>
-            </a:ext>
-          </a:extLst>
-        </p:spPr>
-      </p:pic>
+            <a:endParaRPr lang="en-US" dirty="0"/>
+          </a:p>
+        </p:txBody>
+      </p:sp>
     </p:spTree>
     <p:extLst>
       <p:ext uri="{BB962C8B-B14F-4D97-AF65-F5344CB8AC3E}">
-        <p14:creationId xmlns:p14="http://schemas.microsoft.com/office/powerpoint/2010/main" val="3516702342"/>
+        <p14:creationId xmlns:p14="http://schemas.microsoft.com/office/powerpoint/2010/main" val="1421394941"/>
       </p:ext>
     </p:extLst>
   </p:cSld>
@@ -6086,7 +5996,7 @@
           <p:cNvPr id="2" name="Title 1">
             <a:extLst>
               <a:ext uri="{FF2B5EF4-FFF2-40B4-BE49-F238E27FC236}">
-                <a16:creationId xmlns:a16="http://schemas.microsoft.com/office/drawing/2014/main" id="{1082E946-B9B1-7098-30FB-63E737FCEC88}"/>
+                <a16:creationId xmlns:a16="http://schemas.microsoft.com/office/drawing/2014/main" id="{22FBDAFD-0666-669A-7138-2CCA97ACDB76}"/>
               </a:ext>
             </a:extLst>
           </p:cNvPr>
@@ -6104,7 +6014,7 @@
           <a:p>
             <a:r>
               <a:rPr lang="en-US" dirty="0"/>
-              <a:t>Gambling Odds</a:t>
+              <a:t>Distribution Comparison</a:t>
             </a:r>
           </a:p>
         </p:txBody>
@@ -6114,7 +6024,7 @@
           <p:cNvPr id="3" name="Content Placeholder 2">
             <a:extLst>
               <a:ext uri="{FF2B5EF4-FFF2-40B4-BE49-F238E27FC236}">
-                <a16:creationId xmlns:a16="http://schemas.microsoft.com/office/drawing/2014/main" id="{E868D726-2503-34A2-A378-F0F3B97F6889}"/>
+                <a16:creationId xmlns:a16="http://schemas.microsoft.com/office/drawing/2014/main" id="{4F2C3283-F2EB-0A1F-9B93-8BC3D76D0E8C}"/>
               </a:ext>
             </a:extLst>
           </p:cNvPr>
@@ -6125,64 +6035,116 @@
             <p:ph idx="1"/>
           </p:nvPr>
         </p:nvSpPr>
-        <p:spPr/>
-        <p:txBody>
-          <a:bodyPr/>
-          <a:lstStyle/>
-          <a:p>
-            <a:r>
-              <a:rPr lang="en-US" dirty="0"/>
-              <a:t>If you like gambling, odds are your old best friend. </a:t>
-            </a:r>
-          </a:p>
-          <a:p>
-            <a:r>
-              <a:rPr lang="en-US" dirty="0"/>
-              <a:t>In gambling we see both ratios and +/- (American) odds. </a:t>
-            </a:r>
-          </a:p>
-          <a:p>
-            <a:r>
-              <a:rPr lang="en-US" dirty="0"/>
-              <a:t>We often see payouts expressed in odds:</a:t>
-            </a:r>
+        <p:spPr>
+          <a:xfrm>
+            <a:off x="6427129" y="1853754"/>
+            <a:ext cx="5764871" cy="4199727"/>
+          </a:xfrm>
+        </p:spPr>
+        <p:txBody>
+          <a:bodyPr/>
+          <a:lstStyle/>
+          <a:p>
+            <a:r>
+              <a:rPr lang="en-US" dirty="0"/>
+              <a:t>A difference between distributions is an effect.</a:t>
+            </a:r>
+          </a:p>
+          <a:p>
+            <a:pPr lvl="1"/>
+            <a:r>
+              <a:rPr lang="en-US" dirty="0"/>
+              <a:t>Can’t just calculate one value like mean to compare. </a:t>
+            </a:r>
+          </a:p>
+          <a:p>
+            <a:pPr lvl="1"/>
+            <a:r>
+              <a:rPr lang="en-US" dirty="0"/>
+              <a:t>We need some concept of ‘different enough’ to compare all items in the set. </a:t>
+            </a:r>
+          </a:p>
+          <a:p>
+            <a:pPr lvl="1"/>
+            <a:r>
+              <a:rPr lang="en-US" dirty="0"/>
+              <a:t>The overall shape of the distribution matters, not just stats like mean. </a:t>
+            </a:r>
+          </a:p>
+          <a:p>
+            <a:r>
+              <a:rPr lang="en-US" dirty="0"/>
+              <a:t>Therefore, we don’t really have an answer like ‘regular’ equality/inequality. </a:t>
+            </a:r>
+          </a:p>
+          <a:p>
+            <a:r>
+              <a:rPr lang="en-US" dirty="0"/>
+              <a:t>We saw one way to compare, effect sizes. </a:t>
+            </a:r>
+          </a:p>
+          <a:p>
+            <a:r>
+              <a:rPr lang="en-US" dirty="0"/>
+              <a:t>Let’s look deeper at how we can compare…</a:t>
+            </a:r>
+          </a:p>
+          <a:p>
+            <a:endParaRPr lang="en-US" dirty="0"/>
           </a:p>
         </p:txBody>
       </p:sp>
       <p:pic>
         <p:nvPicPr>
-          <p:cNvPr id="4" name="Picture 3">
-            <a:extLst>
-              <a:ext uri="{FF2B5EF4-FFF2-40B4-BE49-F238E27FC236}">
-                <a16:creationId xmlns:a16="http://schemas.microsoft.com/office/drawing/2014/main" id="{D7551F29-D6E3-80A7-2F03-C21A48809DA5}"/>
+          <p:cNvPr id="8194" name="Picture 2" descr="Distributions of treatment responses for placebo and an FDA approved... |  Download Scientific Diagram">
+            <a:extLst>
+              <a:ext uri="{FF2B5EF4-FFF2-40B4-BE49-F238E27FC236}">
+                <a16:creationId xmlns:a16="http://schemas.microsoft.com/office/drawing/2014/main" id="{63AF78F2-D6F1-68EC-7033-69F2B989F4D8}"/>
               </a:ext>
             </a:extLst>
           </p:cNvPr>
           <p:cNvPicPr>
-            <a:picLocks noChangeAspect="1"/>
+            <a:picLocks noChangeAspect="1" noChangeArrowheads="1"/>
           </p:cNvPicPr>
           <p:nvPr/>
         </p:nvPicPr>
         <p:blipFill>
-          <a:blip r:embed="rId2"/>
+          <a:blip r:embed="rId2">
+            <a:extLst>
+              <a:ext uri="{28A0092B-C50C-407E-A947-70E740481C1C}">
+                <a14:useLocalDpi xmlns:a14="http://schemas.microsoft.com/office/drawing/2010/main" val="0"/>
+              </a:ext>
+            </a:extLst>
+          </a:blip>
+          <a:srcRect/>
           <a:stretch>
             <a:fillRect/>
           </a:stretch>
         </p:blipFill>
-        <p:spPr>
-          <a:xfrm>
-            <a:off x="6056838" y="0"/>
-            <a:ext cx="6135162" cy="1391655"/>
+        <p:spPr bwMode="auto">
+          <a:xfrm>
+            <a:off x="0" y="1853754"/>
+            <a:ext cx="6427129" cy="4037749"/>
           </a:xfrm>
           <a:prstGeom prst="rect">
             <a:avLst/>
           </a:prstGeom>
+          <a:noFill/>
+          <a:extLst>
+            <a:ext uri="{909E8E84-426E-40DD-AFC4-6F175D3DCCD1}">
+              <a14:hiddenFill xmlns:a14="http://schemas.microsoft.com/office/drawing/2010/main">
+                <a:solidFill>
+                  <a:srgbClr val="FFFFFF"/>
+                </a:solidFill>
+              </a14:hiddenFill>
+            </a:ext>
+          </a:extLst>
         </p:spPr>
       </p:pic>
     </p:spTree>
     <p:extLst>
       <p:ext uri="{BB962C8B-B14F-4D97-AF65-F5344CB8AC3E}">
-        <p14:creationId xmlns:p14="http://schemas.microsoft.com/office/powerpoint/2010/main" val="3244536568"/>
+        <p14:creationId xmlns:p14="http://schemas.microsoft.com/office/powerpoint/2010/main" val="1704552580"/>
       </p:ext>
     </p:extLst>
   </p:cSld>
@@ -6214,7 +6176,7 @@
           <p:cNvPr id="2" name="Title 1">
             <a:extLst>
               <a:ext uri="{FF2B5EF4-FFF2-40B4-BE49-F238E27FC236}">
-                <a16:creationId xmlns:a16="http://schemas.microsoft.com/office/drawing/2014/main" id="{F19675AC-B6AC-2B2A-EBAB-D6EDA961AD26}"/>
+                <a16:creationId xmlns:a16="http://schemas.microsoft.com/office/drawing/2014/main" id="{2E6CCFB6-8494-157C-6045-692EA0B7D09E}"/>
               </a:ext>
             </a:extLst>
           </p:cNvPr>
@@ -6232,7 +6194,7 @@
           <a:p>
             <a:r>
               <a:rPr lang="en-US" dirty="0"/>
-              <a:t>Log Odds</a:t>
+              <a:t>Distribution Comparisons</a:t>
             </a:r>
           </a:p>
         </p:txBody>
@@ -6242,7 +6204,7 @@
           <p:cNvPr id="3" name="Content Placeholder 2">
             <a:extLst>
               <a:ext uri="{FF2B5EF4-FFF2-40B4-BE49-F238E27FC236}">
-                <a16:creationId xmlns:a16="http://schemas.microsoft.com/office/drawing/2014/main" id="{B1CD082F-37FD-EDCB-33E4-44300595AF3C}"/>
+                <a16:creationId xmlns:a16="http://schemas.microsoft.com/office/drawing/2014/main" id="{BD733458-D74A-1327-A263-5FFB7343148A}"/>
               </a:ext>
             </a:extLst>
           </p:cNvPr>
@@ -6256,100 +6218,84 @@
         <p:spPr>
           <a:xfrm>
             <a:off x="1451579" y="1853754"/>
-            <a:ext cx="9603275" cy="4290568"/>
-          </a:xfrm>
-        </p:spPr>
-        <p:txBody>
-          <a:bodyPr>
-            <a:normAutofit/>
-          </a:bodyPr>
-          <a:lstStyle/>
-          <a:p>
-            <a:r>
-              <a:rPr lang="en-US" dirty="0"/>
-              <a:t>Probabilities have one problem (that will matter soon) – changes in each direction. </a:t>
-            </a:r>
-          </a:p>
-          <a:p>
-            <a:pPr lvl="1"/>
-            <a:r>
-              <a:rPr lang="en-US" dirty="0"/>
-              <a:t>Going from 100 to 10 is a 90% reduction. </a:t>
-            </a:r>
-          </a:p>
-          <a:p>
-            <a:pPr lvl="1"/>
-            <a:r>
-              <a:rPr lang="en-US" dirty="0"/>
-              <a:t>Going from 10 to 100 is a 900% increase. </a:t>
-            </a:r>
-          </a:p>
-          <a:p>
-            <a:r>
-              <a:rPr lang="en-US" dirty="0"/>
-              <a:t>Odds are useful in comparing probabilities in combination with logs. </a:t>
-            </a:r>
-          </a:p>
-          <a:p>
-            <a:r>
-              <a:rPr lang="en-US" dirty="0"/>
-              <a:t>By taking the log of the odds, the value becomes symmetrical. </a:t>
-            </a:r>
-          </a:p>
-          <a:p>
-            <a:r>
-              <a:rPr lang="en-US" dirty="0"/>
-              <a:t>This is called the logit – important later in ML. </a:t>
-            </a:r>
-          </a:p>
-          <a:p>
-            <a:r>
-              <a:rPr lang="en-US" dirty="0"/>
-              <a:t>Allows for comparisons of probabilities that is comparable. </a:t>
-            </a:r>
-          </a:p>
-          <a:p>
-            <a:r>
-              <a:rPr lang="en-US" dirty="0"/>
-              <a:t>*intercept bit of the formula can be ignored for now. </a:t>
-            </a:r>
-          </a:p>
-        </p:txBody>
-      </p:sp>
-      <p:pic>
-        <p:nvPicPr>
-          <p:cNvPr id="6" name="Picture 5">
-            <a:extLst>
-              <a:ext uri="{FF2B5EF4-FFF2-40B4-BE49-F238E27FC236}">
-                <a16:creationId xmlns:a16="http://schemas.microsoft.com/office/drawing/2014/main" id="{CDA1C5F9-E4A2-7DF4-9E10-F4EB438C23BF}"/>
-              </a:ext>
-            </a:extLst>
-          </p:cNvPr>
-          <p:cNvPicPr>
-            <a:picLocks noChangeAspect="1"/>
-          </p:cNvPicPr>
-          <p:nvPr/>
-        </p:nvPicPr>
-        <p:blipFill>
-          <a:blip r:embed="rId2"/>
-          <a:stretch>
-            <a:fillRect/>
-          </a:stretch>
-        </p:blipFill>
-        <p:spPr>
-          <a:xfrm>
-            <a:off x="7169961" y="0"/>
-            <a:ext cx="5026158" cy="1853754"/>
-          </a:xfrm>
-          <a:prstGeom prst="rect">
-            <a:avLst/>
-          </a:prstGeom>
-        </p:spPr>
-      </p:pic>
+            <a:ext cx="9603275" cy="4287554"/>
+          </a:xfrm>
+        </p:spPr>
+        <p:txBody>
+          <a:bodyPr/>
+          <a:lstStyle/>
+          <a:p>
+            <a:r>
+              <a:rPr lang="en-US" dirty="0"/>
+              <a:t>We can think of comparing distributions in 3 ways. </a:t>
+            </a:r>
+          </a:p>
+          <a:p>
+            <a:r>
+              <a:rPr lang="en-US" dirty="0"/>
+              <a:t>How large is the effect?</a:t>
+            </a:r>
+          </a:p>
+          <a:p>
+            <a:pPr lvl="1"/>
+            <a:r>
+              <a:rPr lang="en-US" dirty="0"/>
+              <a:t>What is the difference between distributions A and B?</a:t>
+            </a:r>
+          </a:p>
+          <a:p>
+            <a:pPr lvl="1"/>
+            <a:r>
+              <a:rPr lang="en-US" dirty="0"/>
+              <a:t>This is what effect size measures. </a:t>
+            </a:r>
+          </a:p>
+          <a:p>
+            <a:r>
+              <a:rPr lang="en-US" dirty="0"/>
+              <a:t>Is the effect significant?</a:t>
+            </a:r>
+          </a:p>
+          <a:p>
+            <a:pPr lvl="1"/>
+            <a:r>
+              <a:rPr lang="en-US" dirty="0"/>
+              <a:t>Is the effect something that would not occur randomly? </a:t>
+            </a:r>
+          </a:p>
+          <a:p>
+            <a:pPr lvl="1"/>
+            <a:r>
+              <a:rPr lang="en-US" dirty="0"/>
+              <a:t>Hypothesis testing, next week. </a:t>
+            </a:r>
+          </a:p>
+          <a:p>
+            <a:r>
+              <a:rPr lang="en-US" dirty="0"/>
+              <a:t>Does this difference matter? </a:t>
+            </a:r>
+          </a:p>
+          <a:p>
+            <a:pPr lvl="1"/>
+            <a:r>
+              <a:rPr lang="en-US" dirty="0"/>
+              <a:t>This requires domain knowledge and context. </a:t>
+            </a:r>
+          </a:p>
+          <a:p>
+            <a:pPr lvl="1"/>
+            <a:r>
+              <a:rPr lang="en-US" dirty="0"/>
+              <a:t>A judgement call. </a:t>
+            </a:r>
+          </a:p>
+        </p:txBody>
+      </p:sp>
     </p:spTree>
     <p:extLst>
       <p:ext uri="{BB962C8B-B14F-4D97-AF65-F5344CB8AC3E}">
-        <p14:creationId xmlns:p14="http://schemas.microsoft.com/office/powerpoint/2010/main" val="3868561471"/>
+        <p14:creationId xmlns:p14="http://schemas.microsoft.com/office/powerpoint/2010/main" val="153718185"/>
       </p:ext>
     </p:extLst>
   </p:cSld>
@@ -6381,7 +6327,7 @@
           <p:cNvPr id="2" name="Title 1">
             <a:extLst>
               <a:ext uri="{FF2B5EF4-FFF2-40B4-BE49-F238E27FC236}">
-                <a16:creationId xmlns:a16="http://schemas.microsoft.com/office/drawing/2014/main" id="{52FA847A-1163-5E49-A407-9CEA36D1942E}"/>
+                <a16:creationId xmlns:a16="http://schemas.microsoft.com/office/drawing/2014/main" id="{5517B2D7-A503-B515-44A2-AD8F388A9F74}"/>
               </a:ext>
             </a:extLst>
           </p:cNvPr>
@@ -6399,7 +6345,7 @@
           <a:p>
             <a:r>
               <a:rPr lang="en-US" dirty="0"/>
-              <a:t>Bayes</a:t>
+              <a:t>Odds and Effect Sizes</a:t>
             </a:r>
           </a:p>
         </p:txBody>
@@ -6409,7 +6355,7 @@
           <p:cNvPr id="3" name="Content Placeholder 2">
             <a:extLst>
               <a:ext uri="{FF2B5EF4-FFF2-40B4-BE49-F238E27FC236}">
-                <a16:creationId xmlns:a16="http://schemas.microsoft.com/office/drawing/2014/main" id="{1F53A5AB-70E3-5942-8353-02D7E65E9EB9}"/>
+                <a16:creationId xmlns:a16="http://schemas.microsoft.com/office/drawing/2014/main" id="{1CC57BBE-5EB0-A7A4-E217-B236AD739519}"/>
               </a:ext>
             </a:extLst>
           </p:cNvPr>
@@ -6420,26 +6366,73 @@
             <p:ph idx="1"/>
           </p:nvPr>
         </p:nvSpPr>
-        <p:spPr/>
-        <p:txBody>
-          <a:bodyPr/>
-          <a:lstStyle/>
-          <a:p>
-            <a:r>
-              <a:rPr lang="en-US" dirty="0"/>
-              <a:t>Bayes theorem expands on the idea of conditional probability. </a:t>
-            </a:r>
-          </a:p>
-          <a:p>
-            <a:r>
-              <a:rPr lang="en-US" dirty="0"/>
-              <a:t>We can derive it pretty easily, by looking at examples. </a:t>
-            </a:r>
-          </a:p>
-          <a:p>
-            <a:r>
-              <a:rPr lang="en-US" dirty="0"/>
-              <a:t>It is the basis of Bayesian statistics, which we will touch on a little, but not do in great depth. </a:t>
+        <p:spPr>
+          <a:xfrm>
+            <a:off x="1451579" y="1853754"/>
+            <a:ext cx="9603275" cy="4199727"/>
+          </a:xfrm>
+        </p:spPr>
+        <p:txBody>
+          <a:bodyPr/>
+          <a:lstStyle/>
+          <a:p>
+            <a:r>
+              <a:rPr lang="en-US" dirty="0"/>
+              <a:t>We’ve seen one way to compare distributions – effect sizes. </a:t>
+            </a:r>
+          </a:p>
+          <a:p>
+            <a:pPr lvl="1"/>
+            <a:r>
+              <a:rPr lang="en-US" dirty="0"/>
+              <a:t>The effect size measures, in context of the variance, how different two distributions are. </a:t>
+            </a:r>
+          </a:p>
+          <a:p>
+            <a:pPr lvl="1"/>
+            <a:r>
+              <a:rPr lang="en-US" dirty="0"/>
+              <a:t>I.e. is the difference between groups significant compared to differences within groups. </a:t>
+            </a:r>
+          </a:p>
+          <a:p>
+            <a:r>
+              <a:rPr lang="en-US" dirty="0"/>
+              <a:t>We can also think of this in terms of probability. </a:t>
+            </a:r>
+          </a:p>
+          <a:p>
+            <a:pPr lvl="1"/>
+            <a:r>
+              <a:rPr lang="en-US" dirty="0"/>
+              <a:t>Are these two samples likely from the same population – hypothesis tests. </a:t>
+            </a:r>
+          </a:p>
+          <a:p>
+            <a:pPr lvl="1"/>
+            <a:r>
+              <a:rPr lang="en-US" dirty="0"/>
+              <a:t>Does this data come from a normal population – normality test. </a:t>
+            </a:r>
+          </a:p>
+          <a:p>
+            <a:r>
+              <a:rPr lang="en-US" dirty="0"/>
+              <a:t>More generically – superiority. </a:t>
+            </a:r>
+          </a:p>
+          <a:p>
+            <a:pPr lvl="1"/>
+            <a:r>
+              <a:rPr lang="en-US" dirty="0"/>
+              <a:t>Two distributions that are totally different will not/barely overlap. </a:t>
+            </a:r>
+          </a:p>
+          <a:p>
+            <a:pPr lvl="1"/>
+            <a:r>
+              <a:rPr lang="en-US" dirty="0"/>
+              <a:t>Two distributions that are from the same population will overlap a lot. </a:t>
             </a:r>
           </a:p>
         </p:txBody>
@@ -6447,7 +6440,7 @@
     </p:spTree>
     <p:extLst>
       <p:ext uri="{BB962C8B-B14F-4D97-AF65-F5344CB8AC3E}">
-        <p14:creationId xmlns:p14="http://schemas.microsoft.com/office/powerpoint/2010/main" val="1442097028"/>
+        <p14:creationId xmlns:p14="http://schemas.microsoft.com/office/powerpoint/2010/main" val="3956611292"/>
       </p:ext>
     </p:extLst>
   </p:cSld>
@@ -6479,7 +6472,7 @@
           <p:cNvPr id="2" name="Title 1">
             <a:extLst>
               <a:ext uri="{FF2B5EF4-FFF2-40B4-BE49-F238E27FC236}">
-                <a16:creationId xmlns:a16="http://schemas.microsoft.com/office/drawing/2014/main" id="{30D14190-7D92-DEC6-84E4-D1D940F21649}"/>
+                <a16:creationId xmlns:a16="http://schemas.microsoft.com/office/drawing/2014/main" id="{9E0B047E-DBBC-3D04-CD14-D93E739FED37}"/>
               </a:ext>
             </a:extLst>
           </p:cNvPr>
@@ -6497,7 +6490,7 @@
           <a:p>
             <a:r>
               <a:rPr lang="en-US" dirty="0"/>
-              <a:t>Probability and Estimation</a:t>
+              <a:t>Thresholds on Overlap</a:t>
             </a:r>
           </a:p>
         </p:txBody>
@@ -6507,7 +6500,7 @@
           <p:cNvPr id="3" name="Content Placeholder 2">
             <a:extLst>
               <a:ext uri="{FF2B5EF4-FFF2-40B4-BE49-F238E27FC236}">
-                <a16:creationId xmlns:a16="http://schemas.microsoft.com/office/drawing/2014/main" id="{2E81BFAB-1E58-E3F3-96EB-F722C988A76C}"/>
+                <a16:creationId xmlns:a16="http://schemas.microsoft.com/office/drawing/2014/main" id="{9F43E4B6-F690-C8B3-76EE-CF219A11E89A}"/>
               </a:ext>
             </a:extLst>
           </p:cNvPr>
@@ -6520,87 +6513,489 @@
         </p:nvSpPr>
         <p:spPr>
           <a:xfrm>
-            <a:off x="1451579" y="1853754"/>
-            <a:ext cx="9603275" cy="4199727"/>
+            <a:off x="0" y="1853754"/>
+            <a:ext cx="6438396" cy="4199727"/>
           </a:xfrm>
         </p:spPr>
         <p:txBody>
           <a:bodyPr>
-            <a:normAutofit lnSpcReduction="10000"/>
+            <a:normAutofit/>
           </a:bodyPr>
           <a:lstStyle/>
           <a:p>
             <a:r>
               <a:rPr lang="en-US" dirty="0"/>
-              <a:t>The idea of probability underlies much of the analysis we want to do. </a:t>
-            </a:r>
-          </a:p>
-          <a:p>
-            <a:pPr lvl="1"/>
-            <a:r>
-              <a:rPr lang="en-US" dirty="0"/>
-              <a:t>When dealing with samples, we rarely know ’the’ answer, we have uncertainty. </a:t>
-            </a:r>
-          </a:p>
-          <a:p>
-            <a:r>
-              <a:rPr lang="en-US" dirty="0"/>
-              <a:t>Core idea – based on this expectation, does the reality match that. </a:t>
-            </a:r>
-          </a:p>
-          <a:p>
-            <a:pPr lvl="1"/>
-            <a:r>
-              <a:rPr lang="en-US" dirty="0"/>
-              <a:t>I.e. Hypothesis testing – what are the odds these two things are different? </a:t>
-            </a:r>
-          </a:p>
-          <a:p>
-            <a:pPr lvl="1"/>
-            <a:r>
-              <a:rPr lang="en-US" dirty="0"/>
-              <a:t>Generalization – if we expand from a sample to population, how confident are we? </a:t>
-            </a:r>
-          </a:p>
-          <a:p>
-            <a:r>
-              <a:rPr lang="en-US" dirty="0"/>
-              <a:t>Answering a question is (usually) not a yes/no thing:</a:t>
-            </a:r>
-          </a:p>
-          <a:p>
-            <a:pPr lvl="1"/>
-            <a:r>
-              <a:rPr lang="en-US" dirty="0"/>
-              <a:t>Are the life expectancies of treatment/placebo different after a drug trial?</a:t>
-            </a:r>
-          </a:p>
-          <a:p>
-            <a:pPr lvl="1"/>
-            <a:r>
-              <a:rPr lang="en-US" dirty="0"/>
-              <a:t>Some treated people will die quick, some placebo people will live a long time. </a:t>
-            </a:r>
-          </a:p>
-          <a:p>
-            <a:pPr lvl="1"/>
-            <a:r>
-              <a:rPr lang="en-US" dirty="0"/>
-              <a:t>What is the likelihood that drug people outlive placebo people? </a:t>
-            </a:r>
-          </a:p>
-          <a:p>
-            <a:r>
-              <a:rPr lang="en-US" dirty="0"/>
-              <a:t>There’s an alternative branch of stats, Bayesian, that does all basic stats via probability. </a:t>
-            </a:r>
-          </a:p>
-        </p:txBody>
-      </p:sp>
+              <a:t>The most simple way to compare </a:t>
+            </a:r>
+            <a:r>
+              <a:rPr lang="en-US" dirty="0" err="1"/>
+              <a:t>dists</a:t>
+            </a:r>
+            <a:r>
+              <a:rPr lang="en-US" dirty="0"/>
+              <a:t> is to a threshold. </a:t>
+            </a:r>
+          </a:p>
+          <a:p>
+            <a:pPr lvl="1"/>
+            <a:r>
+              <a:rPr lang="en-US" dirty="0"/>
+              <a:t>The threshold is a cutoff point that we can use to separate classes (distributions). </a:t>
+            </a:r>
+          </a:p>
+          <a:p>
+            <a:r>
+              <a:rPr lang="en-US" dirty="0"/>
+              <a:t>There are a couple of threshold calculations:</a:t>
+            </a:r>
+          </a:p>
+          <a:p>
+            <a:pPr lvl="1"/>
+            <a:r>
+              <a:rPr lang="en-US" dirty="0"/>
+              <a:t>Simple – average of the means. </a:t>
+            </a:r>
+          </a:p>
+          <a:p>
+            <a:pPr lvl="1"/>
+            <a:r>
+              <a:rPr lang="en-US" dirty="0"/>
+              <a:t>Complex – calculation with means and standard deviations. </a:t>
+            </a:r>
+          </a:p>
+          <a:p>
+            <a:r>
+              <a:rPr lang="en-US" dirty="0"/>
+              <a:t>Can be cutoff – over is a distribution, under is the other. </a:t>
+            </a:r>
+          </a:p>
+          <a:p>
+            <a:pPr lvl="1"/>
+            <a:r>
+              <a:rPr lang="en-US" dirty="0"/>
+              <a:t>The purity of the two groups is the quality of the threshold. </a:t>
+            </a:r>
+          </a:p>
+          <a:p>
+            <a:pPr lvl="1"/>
+            <a:r>
+              <a:rPr lang="en-US" dirty="0"/>
+              <a:t>A perfect cutoff means that we can use one value to separate the groups with no errors.</a:t>
+            </a:r>
+          </a:p>
+        </p:txBody>
+      </p:sp>
+      <p:pic>
+        <p:nvPicPr>
+          <p:cNvPr id="5124" name="Picture 4" descr="Risk distributions and area under the ROC curve (AUC) (adapted from... |  Download Scientific Diagram">
+            <a:extLst>
+              <a:ext uri="{FF2B5EF4-FFF2-40B4-BE49-F238E27FC236}">
+                <a16:creationId xmlns:a16="http://schemas.microsoft.com/office/drawing/2014/main" id="{09D8CC62-F962-9F2E-5D29-241523E7B1A3}"/>
+              </a:ext>
+            </a:extLst>
+          </p:cNvPr>
+          <p:cNvPicPr>
+            <a:picLocks noChangeAspect="1" noChangeArrowheads="1"/>
+          </p:cNvPicPr>
+          <p:nvPr/>
+        </p:nvPicPr>
+        <p:blipFill rotWithShape="1">
+          <a:blip r:embed="rId2">
+            <a:extLst>
+              <a:ext uri="{28A0092B-C50C-407E-A947-70E740481C1C}">
+                <a14:useLocalDpi xmlns:a14="http://schemas.microsoft.com/office/drawing/2010/main" val="0"/>
+              </a:ext>
+            </a:extLst>
+          </a:blip>
+          <a:srcRect b="47480"/>
+          <a:stretch>
+            <a:fillRect/>
+          </a:stretch>
+        </p:blipFill>
+        <p:spPr bwMode="auto">
+          <a:xfrm>
+            <a:off x="6438396" y="2610754"/>
+            <a:ext cx="5753604" cy="2072757"/>
+          </a:xfrm>
+          <a:prstGeom prst="rect">
+            <a:avLst/>
+          </a:prstGeom>
+          <a:noFill/>
+          <a:extLst>
+            <a:ext uri="{909E8E84-426E-40DD-AFC4-6F175D3DCCD1}">
+              <a14:hiddenFill xmlns:a14="http://schemas.microsoft.com/office/drawing/2010/main">
+                <a:solidFill>
+                  <a:srgbClr val="FFFFFF"/>
+                </a:solidFill>
+              </a14:hiddenFill>
+            </a:ext>
+          </a:extLst>
+        </p:spPr>
+      </p:pic>
     </p:spTree>
     <p:extLst>
       <p:ext uri="{BB962C8B-B14F-4D97-AF65-F5344CB8AC3E}">
-        <p14:creationId xmlns:p14="http://schemas.microsoft.com/office/powerpoint/2010/main" val="3371470544"/>
+        <p14:creationId xmlns:p14="http://schemas.microsoft.com/office/powerpoint/2010/main" val="257233449"/>
+      </p:ext>
+    </p:extLst>
+  </p:cSld>
+  <p:clrMapOvr>
+    <a:masterClrMapping/>
+  </p:clrMapOvr>
+</p:sld>
+</file>
+
+<file path=ppt/slides/slide28.xml><?xml version="1.0" encoding="utf-8"?>
+<p:sld xmlns:a="http://schemas.openxmlformats.org/drawingml/2006/main" xmlns:r="http://schemas.openxmlformats.org/officeDocument/2006/relationships" xmlns:p="http://schemas.openxmlformats.org/presentationml/2006/main">
+  <p:cSld>
+    <p:spTree>
+      <p:nvGrpSpPr>
+        <p:cNvPr id="1" name=""/>
+        <p:cNvGrpSpPr/>
+        <p:nvPr/>
+      </p:nvGrpSpPr>
+      <p:grpSpPr>
+        <a:xfrm>
+          <a:off x="0" y="0"/>
+          <a:ext cx="0" cy="0"/>
+          <a:chOff x="0" y="0"/>
+          <a:chExt cx="0" cy="0"/>
+        </a:xfrm>
+      </p:grpSpPr>
+      <p:sp>
+        <p:nvSpPr>
+          <p:cNvPr id="2" name="Title 1">
+            <a:extLst>
+              <a:ext uri="{FF2B5EF4-FFF2-40B4-BE49-F238E27FC236}">
+                <a16:creationId xmlns:a16="http://schemas.microsoft.com/office/drawing/2014/main" id="{D6145CC1-C337-5213-81D8-E4E36A6B8DA7}"/>
+              </a:ext>
+            </a:extLst>
+          </p:cNvPr>
+          <p:cNvSpPr>
+            <a:spLocks noGrp="1"/>
+          </p:cNvSpPr>
+          <p:nvPr>
+            <p:ph type="title"/>
+          </p:nvPr>
+        </p:nvSpPr>
+        <p:spPr>
+          <a:xfrm>
+            <a:off x="1451579" y="804519"/>
+            <a:ext cx="3272821" cy="1049235"/>
+          </a:xfrm>
+        </p:spPr>
+        <p:txBody>
+          <a:bodyPr/>
+          <a:lstStyle/>
+          <a:p>
+            <a:r>
+              <a:rPr lang="en-US" dirty="0"/>
+              <a:t>Overlap</a:t>
+            </a:r>
+          </a:p>
+        </p:txBody>
+      </p:sp>
+      <p:sp>
+        <p:nvSpPr>
+          <p:cNvPr id="3" name="Content Placeholder 2">
+            <a:extLst>
+              <a:ext uri="{FF2B5EF4-FFF2-40B4-BE49-F238E27FC236}">
+                <a16:creationId xmlns:a16="http://schemas.microsoft.com/office/drawing/2014/main" id="{460E7EAB-A663-F42F-BAED-DD52E6A94762}"/>
+              </a:ext>
+            </a:extLst>
+          </p:cNvPr>
+          <p:cNvSpPr>
+            <a:spLocks noGrp="1"/>
+          </p:cNvSpPr>
+          <p:nvPr>
+            <p:ph idx="1"/>
+          </p:nvPr>
+        </p:nvSpPr>
+        <p:spPr>
+          <a:xfrm>
+            <a:off x="1" y="1853754"/>
+            <a:ext cx="5273944" cy="4199727"/>
+          </a:xfrm>
+        </p:spPr>
+        <p:txBody>
+          <a:bodyPr/>
+          <a:lstStyle/>
+          <a:p>
+            <a:r>
+              <a:rPr lang="en-US" dirty="0"/>
+              <a:t>If the two </a:t>
+            </a:r>
+            <a:r>
+              <a:rPr lang="en-US" dirty="0" err="1"/>
+              <a:t>dists</a:t>
+            </a:r>
+            <a:r>
+              <a:rPr lang="en-US" dirty="0"/>
+              <a:t> don’t overlap much at all, we can clearly classify into group A or B. </a:t>
+            </a:r>
+          </a:p>
+          <a:p>
+            <a:pPr lvl="1"/>
+            <a:r>
+              <a:rPr lang="en-US" dirty="0"/>
+              <a:t>The overlap area is where we might make mistakes. </a:t>
+            </a:r>
+          </a:p>
+          <a:p>
+            <a:pPr lvl="1"/>
+            <a:r>
+              <a:rPr lang="en-US" dirty="0"/>
+              <a:t>On either side of the overlap, we know exactly what class a value belongs to. </a:t>
+            </a:r>
+          </a:p>
+          <a:p>
+            <a:r>
+              <a:rPr lang="en-US" dirty="0"/>
+              <a:t>E.g. a value of .5 could be in either group. </a:t>
+            </a:r>
+          </a:p>
+          <a:p>
+            <a:pPr lvl="1"/>
+            <a:r>
+              <a:rPr lang="en-US" dirty="0"/>
+              <a:t>A value of 8 can only be blue. </a:t>
+            </a:r>
+          </a:p>
+          <a:p>
+            <a:r>
+              <a:rPr lang="en-US" dirty="0"/>
+              <a:t>More different distributions have less overlap. </a:t>
+            </a:r>
+          </a:p>
+        </p:txBody>
+      </p:sp>
+      <p:pic>
+        <p:nvPicPr>
+          <p:cNvPr id="4098" name="Picture 2" descr="machine learning - How to find the threshold between two histograms at  fixed false positive rate? - Cross Validated">
+            <a:extLst>
+              <a:ext uri="{FF2B5EF4-FFF2-40B4-BE49-F238E27FC236}">
+                <a16:creationId xmlns:a16="http://schemas.microsoft.com/office/drawing/2014/main" id="{EA2D23F6-BED9-55DB-56BB-A84CFD6F14C3}"/>
+              </a:ext>
+            </a:extLst>
+          </p:cNvPr>
+          <p:cNvPicPr>
+            <a:picLocks noChangeAspect="1" noChangeArrowheads="1"/>
+          </p:cNvPicPr>
+          <p:nvPr/>
+        </p:nvPicPr>
+        <p:blipFill rotWithShape="1">
+          <a:blip r:embed="rId2">
+            <a:extLst>
+              <a:ext uri="{28A0092B-C50C-407E-A947-70E740481C1C}">
+                <a14:useLocalDpi xmlns:a14="http://schemas.microsoft.com/office/drawing/2010/main" val="0"/>
+              </a:ext>
+            </a:extLst>
+          </a:blip>
+          <a:srcRect t="10224"/>
+          <a:stretch>
+            <a:fillRect/>
+          </a:stretch>
+        </p:blipFill>
+        <p:spPr bwMode="auto">
+          <a:xfrm>
+            <a:off x="5273944" y="1423851"/>
+            <a:ext cx="6918056" cy="5027748"/>
+          </a:xfrm>
+          <a:prstGeom prst="rect">
+            <a:avLst/>
+          </a:prstGeom>
+          <a:noFill/>
+          <a:extLst>
+            <a:ext uri="{909E8E84-426E-40DD-AFC4-6F175D3DCCD1}">
+              <a14:hiddenFill xmlns:a14="http://schemas.microsoft.com/office/drawing/2010/main">
+                <a:solidFill>
+                  <a:srgbClr val="FFFFFF"/>
+                </a:solidFill>
+              </a14:hiddenFill>
+            </a:ext>
+          </a:extLst>
+        </p:spPr>
+      </p:pic>
+    </p:spTree>
+    <p:extLst>
+      <p:ext uri="{BB962C8B-B14F-4D97-AF65-F5344CB8AC3E}">
+        <p14:creationId xmlns:p14="http://schemas.microsoft.com/office/powerpoint/2010/main" val="2168809185"/>
+      </p:ext>
+    </p:extLst>
+  </p:cSld>
+  <p:clrMapOvr>
+    <a:masterClrMapping/>
+  </p:clrMapOvr>
+</p:sld>
+</file>
+
+<file path=ppt/slides/slide29.xml><?xml version="1.0" encoding="utf-8"?>
+<p:sld xmlns:a="http://schemas.openxmlformats.org/drawingml/2006/main" xmlns:r="http://schemas.openxmlformats.org/officeDocument/2006/relationships" xmlns:p="http://schemas.openxmlformats.org/presentationml/2006/main">
+  <p:cSld>
+    <p:spTree>
+      <p:nvGrpSpPr>
+        <p:cNvPr id="1" name=""/>
+        <p:cNvGrpSpPr/>
+        <p:nvPr/>
+      </p:nvGrpSpPr>
+      <p:grpSpPr>
+        <a:xfrm>
+          <a:off x="0" y="0"/>
+          <a:ext cx="0" cy="0"/>
+          <a:chOff x="0" y="0"/>
+          <a:chExt cx="0" cy="0"/>
+        </a:xfrm>
+      </p:grpSpPr>
+      <p:sp>
+        <p:nvSpPr>
+          <p:cNvPr id="2" name="Title 1">
+            <a:extLst>
+              <a:ext uri="{FF2B5EF4-FFF2-40B4-BE49-F238E27FC236}">
+                <a16:creationId xmlns:a16="http://schemas.microsoft.com/office/drawing/2014/main" id="{E4515952-7972-3DF6-4A04-E3546CDF0C4F}"/>
+              </a:ext>
+            </a:extLst>
+          </p:cNvPr>
+          <p:cNvSpPr>
+            <a:spLocks noGrp="1"/>
+          </p:cNvSpPr>
+          <p:nvPr>
+            <p:ph type="title"/>
+          </p:nvPr>
+        </p:nvSpPr>
+        <p:spPr/>
+        <p:txBody>
+          <a:bodyPr/>
+          <a:lstStyle/>
+          <a:p>
+            <a:r>
+              <a:rPr lang="en-US" dirty="0"/>
+              <a:t>Effect Size Review</a:t>
+            </a:r>
+          </a:p>
+        </p:txBody>
+      </p:sp>
+      <p:sp>
+        <p:nvSpPr>
+          <p:cNvPr id="3" name="Content Placeholder 2">
+            <a:extLst>
+              <a:ext uri="{FF2B5EF4-FFF2-40B4-BE49-F238E27FC236}">
+                <a16:creationId xmlns:a16="http://schemas.microsoft.com/office/drawing/2014/main" id="{2D647B11-0B57-9D2E-39B1-158C376A1A29}"/>
+              </a:ext>
+            </a:extLst>
+          </p:cNvPr>
+          <p:cNvSpPr>
+            <a:spLocks noGrp="1"/>
+          </p:cNvSpPr>
+          <p:nvPr>
+            <p:ph idx="1"/>
+          </p:nvPr>
+        </p:nvSpPr>
+        <p:spPr>
+          <a:xfrm>
+            <a:off x="3433120" y="2015732"/>
+            <a:ext cx="4440880" cy="4037749"/>
+          </a:xfrm>
+        </p:spPr>
+        <p:txBody>
+          <a:bodyPr/>
+          <a:lstStyle/>
+          <a:p>
+            <a:r>
+              <a:rPr lang="en-US" dirty="0"/>
+              <a:t>Effect size shows us differences. </a:t>
+            </a:r>
+          </a:p>
+          <a:p>
+            <a:pPr lvl="1"/>
+            <a:r>
+              <a:rPr lang="en-US" dirty="0"/>
+              <a:t>Compares the means, with consideration of the variance. </a:t>
+            </a:r>
+          </a:p>
+          <a:p>
+            <a:r>
+              <a:rPr lang="en-US" dirty="0"/>
+              <a:t>If data varies little, small differences matter more. </a:t>
+            </a:r>
+          </a:p>
+          <a:p>
+            <a:r>
+              <a:rPr lang="en-US" dirty="0"/>
+              <a:t>If data varies a lot, differences between groups matters less. </a:t>
+            </a:r>
+          </a:p>
+          <a:p>
+            <a:r>
+              <a:rPr lang="en-US" dirty="0"/>
+              <a:t>”Difference within groups vs differences between groups.” </a:t>
+            </a:r>
+          </a:p>
+        </p:txBody>
+      </p:sp>
+      <p:pic>
+        <p:nvPicPr>
+          <p:cNvPr id="4" name="Picture 3" descr="Research Design: Interpreting and Calculating Effect Sizes | Lauren  Margulieux">
+            <a:extLst>
+              <a:ext uri="{FF2B5EF4-FFF2-40B4-BE49-F238E27FC236}">
+                <a16:creationId xmlns:a16="http://schemas.microsoft.com/office/drawing/2014/main" id="{531C909F-44C6-8108-6A82-D7A8C99E43A1}"/>
+              </a:ext>
+            </a:extLst>
+          </p:cNvPr>
+          <p:cNvPicPr>
+            <a:picLocks noChangeAspect="1"/>
+          </p:cNvPicPr>
+          <p:nvPr/>
+        </p:nvPicPr>
+        <p:blipFill>
+          <a:blip r:embed="rId2"/>
+          <a:stretch>
+            <a:fillRect/>
+          </a:stretch>
+        </p:blipFill>
+        <p:spPr>
+          <a:xfrm>
+            <a:off x="7874000" y="2323070"/>
+            <a:ext cx="4318000" cy="2590800"/>
+          </a:xfrm>
+          <a:prstGeom prst="rect">
+            <a:avLst/>
+          </a:prstGeom>
+        </p:spPr>
+      </p:pic>
+      <p:pic>
+        <p:nvPicPr>
+          <p:cNvPr id="5" name="Picture 4" descr="Cohens d: Definition, Calculation, and Interpretation of Effect Size">
+            <a:extLst>
+              <a:ext uri="{FF2B5EF4-FFF2-40B4-BE49-F238E27FC236}">
+                <a16:creationId xmlns:a16="http://schemas.microsoft.com/office/drawing/2014/main" id="{D6F6DE78-CEFC-41F6-BBA0-1CEE1FABD250}"/>
+              </a:ext>
+            </a:extLst>
+          </p:cNvPr>
+          <p:cNvPicPr>
+            <a:picLocks noChangeAspect="1"/>
+          </p:cNvPicPr>
+          <p:nvPr/>
+        </p:nvPicPr>
+        <p:blipFill>
+          <a:blip r:embed="rId3"/>
+          <a:stretch>
+            <a:fillRect/>
+          </a:stretch>
+        </p:blipFill>
+        <p:spPr>
+          <a:xfrm>
+            <a:off x="0" y="1812565"/>
+            <a:ext cx="3435179" cy="5152769"/>
+          </a:xfrm>
+          <a:prstGeom prst="rect">
+            <a:avLst/>
+          </a:prstGeom>
+        </p:spPr>
+      </p:pic>
+    </p:spTree>
+    <p:extLst>
+      <p:ext uri="{BB962C8B-B14F-4D97-AF65-F5344CB8AC3E}">
+        <p14:creationId xmlns:p14="http://schemas.microsoft.com/office/powerpoint/2010/main" val="1627562914"/>
       </p:ext>
     </p:extLst>
   </p:cSld>
@@ -6684,6 +7079,1538 @@
     <p:extLst>
       <p:ext uri="{BB962C8B-B14F-4D97-AF65-F5344CB8AC3E}">
         <p14:creationId xmlns:p14="http://schemas.microsoft.com/office/powerpoint/2010/main" val="3217872114"/>
+      </p:ext>
+    </p:extLst>
+  </p:cSld>
+  <p:clrMapOvr>
+    <a:masterClrMapping/>
+  </p:clrMapOvr>
+</p:sld>
+</file>
+
+<file path=ppt/slides/slide30.xml><?xml version="1.0" encoding="utf-8"?>
+<p:sld xmlns:a="http://schemas.openxmlformats.org/drawingml/2006/main" xmlns:r="http://schemas.openxmlformats.org/officeDocument/2006/relationships" xmlns:p="http://schemas.openxmlformats.org/presentationml/2006/main">
+  <p:cSld>
+    <p:spTree>
+      <p:nvGrpSpPr>
+        <p:cNvPr id="1" name=""/>
+        <p:cNvGrpSpPr/>
+        <p:nvPr/>
+      </p:nvGrpSpPr>
+      <p:grpSpPr>
+        <a:xfrm>
+          <a:off x="0" y="0"/>
+          <a:ext cx="0" cy="0"/>
+          <a:chOff x="0" y="0"/>
+          <a:chExt cx="0" cy="0"/>
+        </a:xfrm>
+      </p:grpSpPr>
+      <p:sp>
+        <p:nvSpPr>
+          <p:cNvPr id="2" name="Title 1">
+            <a:extLst>
+              <a:ext uri="{FF2B5EF4-FFF2-40B4-BE49-F238E27FC236}">
+                <a16:creationId xmlns:a16="http://schemas.microsoft.com/office/drawing/2014/main" id="{578C9733-3D0E-E3ED-AB04-A5715761AC08}"/>
+              </a:ext>
+            </a:extLst>
+          </p:cNvPr>
+          <p:cNvSpPr>
+            <a:spLocks noGrp="1"/>
+          </p:cNvSpPr>
+          <p:nvPr>
+            <p:ph type="title"/>
+          </p:nvPr>
+        </p:nvSpPr>
+        <p:spPr/>
+        <p:txBody>
+          <a:bodyPr/>
+          <a:lstStyle/>
+          <a:p>
+            <a:r>
+              <a:rPr lang="en-US" dirty="0"/>
+              <a:t>Probability of Superiority</a:t>
+            </a:r>
+          </a:p>
+        </p:txBody>
+      </p:sp>
+      <p:sp>
+        <p:nvSpPr>
+          <p:cNvPr id="3" name="Content Placeholder 2">
+            <a:extLst>
+              <a:ext uri="{FF2B5EF4-FFF2-40B4-BE49-F238E27FC236}">
+                <a16:creationId xmlns:a16="http://schemas.microsoft.com/office/drawing/2014/main" id="{E9061EE7-8686-94A9-824B-A5D5FCE50ACE}"/>
+              </a:ext>
+            </a:extLst>
+          </p:cNvPr>
+          <p:cNvSpPr>
+            <a:spLocks noGrp="1"/>
+          </p:cNvSpPr>
+          <p:nvPr>
+            <p:ph idx="1"/>
+          </p:nvPr>
+        </p:nvSpPr>
+        <p:spPr>
+          <a:xfrm>
+            <a:off x="19049" y="1853754"/>
+            <a:ext cx="6037437" cy="4301719"/>
+          </a:xfrm>
+        </p:spPr>
+        <p:txBody>
+          <a:bodyPr>
+            <a:normAutofit fontScale="92500" lnSpcReduction="10000"/>
+          </a:bodyPr>
+          <a:lstStyle/>
+          <a:p>
+            <a:r>
+              <a:rPr lang="en-US" dirty="0"/>
+              <a:t>The overlap and threshold ideas can be formed into the Probability of Superiority. </a:t>
+            </a:r>
+          </a:p>
+          <a:p>
+            <a:pPr lvl="1"/>
+            <a:r>
+              <a:rPr lang="en-US" dirty="0"/>
+              <a:t>If we pick a random value from the higher group what is the probability it is larger than a random value from the lower group. </a:t>
+            </a:r>
+          </a:p>
+          <a:p>
+            <a:pPr lvl="1"/>
+            <a:r>
+              <a:rPr lang="en-US" dirty="0"/>
+              <a:t>E.g. does a random treatment person live longer than a random placebo person? </a:t>
+            </a:r>
+          </a:p>
+          <a:p>
+            <a:pPr lvl="1"/>
+            <a:r>
+              <a:rPr lang="en-US" dirty="0"/>
+              <a:t>This is in line with the overlap is we plot the PDFs. </a:t>
+            </a:r>
+          </a:p>
+          <a:p>
+            <a:r>
+              <a:rPr lang="en-US" dirty="0">
+                <a:hlinkClick r:id="rId2"/>
+              </a:rPr>
+              <a:t>https://rpsychologist.com/cohend/</a:t>
+            </a:r>
+            <a:endParaRPr lang="en-US" dirty="0"/>
+          </a:p>
+          <a:p>
+            <a:r>
+              <a:rPr lang="en-US" dirty="0"/>
+              <a:t>If there’s a big diff, samples from high groups should almost always be higher than lower one. If not a diff than we’d see lots of the opposite occurring. </a:t>
+            </a:r>
+          </a:p>
+        </p:txBody>
+      </p:sp>
+      <p:pic>
+        <p:nvPicPr>
+          <p:cNvPr id="6146" name="Picture 2" descr="因果推理方法— 全栈DS/DA养成手册">
+            <a:extLst>
+              <a:ext uri="{FF2B5EF4-FFF2-40B4-BE49-F238E27FC236}">
+                <a16:creationId xmlns:a16="http://schemas.microsoft.com/office/drawing/2014/main" id="{4030EC37-F6AA-B971-1402-E7052B7B0992}"/>
+              </a:ext>
+            </a:extLst>
+          </p:cNvPr>
+          <p:cNvPicPr>
+            <a:picLocks noChangeAspect="1" noChangeArrowheads="1"/>
+          </p:cNvPicPr>
+          <p:nvPr/>
+        </p:nvPicPr>
+        <p:blipFill rotWithShape="1">
+          <a:blip r:embed="rId3">
+            <a:extLst>
+              <a:ext uri="{28A0092B-C50C-407E-A947-70E740481C1C}">
+                <a14:useLocalDpi xmlns:a14="http://schemas.microsoft.com/office/drawing/2010/main" val="0"/>
+              </a:ext>
+            </a:extLst>
+          </a:blip>
+          <a:srcRect l="6702" r="5149"/>
+          <a:stretch>
+            <a:fillRect/>
+          </a:stretch>
+        </p:blipFill>
+        <p:spPr bwMode="auto">
+          <a:xfrm>
+            <a:off x="6054201" y="2061802"/>
+            <a:ext cx="6037438" cy="3424598"/>
+          </a:xfrm>
+          <a:prstGeom prst="rect">
+            <a:avLst/>
+          </a:prstGeom>
+          <a:noFill/>
+          <a:extLst>
+            <a:ext uri="{909E8E84-426E-40DD-AFC4-6F175D3DCCD1}">
+              <a14:hiddenFill xmlns:a14="http://schemas.microsoft.com/office/drawing/2010/main">
+                <a:solidFill>
+                  <a:srgbClr val="FFFFFF"/>
+                </a:solidFill>
+              </a14:hiddenFill>
+            </a:ext>
+          </a:extLst>
+        </p:spPr>
+      </p:pic>
+    </p:spTree>
+    <p:extLst>
+      <p:ext uri="{BB962C8B-B14F-4D97-AF65-F5344CB8AC3E}">
+        <p14:creationId xmlns:p14="http://schemas.microsoft.com/office/powerpoint/2010/main" val="1298076308"/>
+      </p:ext>
+    </p:extLst>
+  </p:cSld>
+  <p:clrMapOvr>
+    <a:masterClrMapping/>
+  </p:clrMapOvr>
+</p:sld>
+</file>
+
+<file path=ppt/slides/slide31.xml><?xml version="1.0" encoding="utf-8"?>
+<p:sld xmlns:a="http://schemas.openxmlformats.org/drawingml/2006/main" xmlns:r="http://schemas.openxmlformats.org/officeDocument/2006/relationships" xmlns:p="http://schemas.openxmlformats.org/presentationml/2006/main">
+  <p:cSld>
+    <p:spTree>
+      <p:nvGrpSpPr>
+        <p:cNvPr id="1" name=""/>
+        <p:cNvGrpSpPr/>
+        <p:nvPr/>
+      </p:nvGrpSpPr>
+      <p:grpSpPr>
+        <a:xfrm>
+          <a:off x="0" y="0"/>
+          <a:ext cx="0" cy="0"/>
+          <a:chOff x="0" y="0"/>
+          <a:chExt cx="0" cy="0"/>
+        </a:xfrm>
+      </p:grpSpPr>
+      <p:sp>
+        <p:nvSpPr>
+          <p:cNvPr id="2" name="Title 1">
+            <a:extLst>
+              <a:ext uri="{FF2B5EF4-FFF2-40B4-BE49-F238E27FC236}">
+                <a16:creationId xmlns:a16="http://schemas.microsoft.com/office/drawing/2014/main" id="{46857B74-29CE-E500-AAF6-BAE7098B78A3}"/>
+              </a:ext>
+            </a:extLst>
+          </p:cNvPr>
+          <p:cNvSpPr>
+            <a:spLocks noGrp="1"/>
+          </p:cNvSpPr>
+          <p:nvPr>
+            <p:ph type="title"/>
+          </p:nvPr>
+        </p:nvSpPr>
+        <p:spPr/>
+        <p:txBody>
+          <a:bodyPr/>
+          <a:lstStyle/>
+          <a:p>
+            <a:r>
+              <a:rPr lang="en-US" dirty="0"/>
+              <a:t>Comparison Tools</a:t>
+            </a:r>
+          </a:p>
+        </p:txBody>
+      </p:sp>
+      <p:sp>
+        <p:nvSpPr>
+          <p:cNvPr id="3" name="Content Placeholder 2">
+            <a:extLst>
+              <a:ext uri="{FF2B5EF4-FFF2-40B4-BE49-F238E27FC236}">
+                <a16:creationId xmlns:a16="http://schemas.microsoft.com/office/drawing/2014/main" id="{95D89D88-9AC9-1850-D5BF-65E65362FAAF}"/>
+              </a:ext>
+            </a:extLst>
+          </p:cNvPr>
+          <p:cNvSpPr>
+            <a:spLocks noGrp="1"/>
+          </p:cNvSpPr>
+          <p:nvPr>
+            <p:ph idx="1"/>
+          </p:nvPr>
+        </p:nvSpPr>
+        <p:spPr>
+          <a:xfrm>
+            <a:off x="1451579" y="1853753"/>
+            <a:ext cx="9603275" cy="4299911"/>
+          </a:xfrm>
+        </p:spPr>
+        <p:txBody>
+          <a:bodyPr>
+            <a:normAutofit/>
+          </a:bodyPr>
+          <a:lstStyle/>
+          <a:p>
+            <a:r>
+              <a:rPr lang="en-US" dirty="0"/>
+              <a:t>All of these things allow us to do a comparison of distributions. </a:t>
+            </a:r>
+          </a:p>
+          <a:p>
+            <a:pPr lvl="1"/>
+            <a:r>
+              <a:rPr lang="en-US" dirty="0"/>
+              <a:t>Effect size, overlap, superiority. None give a definitive result. </a:t>
+            </a:r>
+          </a:p>
+          <a:p>
+            <a:pPr lvl="1"/>
+            <a:r>
+              <a:rPr lang="en-US" dirty="0"/>
+              <a:t>We’ll soon add another, hypothesis tests. </a:t>
+            </a:r>
+          </a:p>
+          <a:p>
+            <a:r>
+              <a:rPr lang="en-US" dirty="0"/>
+              <a:t>Each leaves us with some uncertainty. </a:t>
+            </a:r>
+          </a:p>
+          <a:p>
+            <a:pPr lvl="1"/>
+            <a:r>
+              <a:rPr lang="en-US" dirty="0"/>
+              <a:t>Each thing is evidence of difference/similarity. </a:t>
+            </a:r>
+          </a:p>
+          <a:p>
+            <a:r>
+              <a:rPr lang="en-US" dirty="0"/>
+              <a:t>This is a less simple question than it appears here, and often </a:t>
+            </a:r>
+            <a:r>
+              <a:rPr lang="en-US" i="1" dirty="0"/>
+              <a:t>really</a:t>
+            </a:r>
+            <a:r>
+              <a:rPr lang="en-US" dirty="0"/>
+              <a:t> matters. </a:t>
+            </a:r>
+          </a:p>
+          <a:p>
+            <a:pPr lvl="1"/>
+            <a:r>
+              <a:rPr lang="en-US" dirty="0"/>
+              <a:t>We have large-</a:t>
+            </a:r>
+            <a:r>
+              <a:rPr lang="en-US" dirty="0" err="1"/>
+              <a:t>ish</a:t>
+            </a:r>
+            <a:r>
+              <a:rPr lang="en-US" dirty="0"/>
+              <a:t> sample sizes, so comparisons look simple. </a:t>
+            </a:r>
+          </a:p>
+          <a:p>
+            <a:pPr lvl="1"/>
+            <a:r>
+              <a:rPr lang="en-US" dirty="0"/>
+              <a:t>Picture a drug trial, big decisions on small datasets. </a:t>
+            </a:r>
+          </a:p>
+          <a:p>
+            <a:pPr lvl="1"/>
+            <a:r>
+              <a:rPr lang="en-US" dirty="0"/>
+              <a:t>Outcomes of public vs catholic school – high variance by nature, many confounding factors. </a:t>
+            </a:r>
+          </a:p>
+        </p:txBody>
+      </p:sp>
+    </p:spTree>
+    <p:extLst>
+      <p:ext uri="{BB962C8B-B14F-4D97-AF65-F5344CB8AC3E}">
+        <p14:creationId xmlns:p14="http://schemas.microsoft.com/office/powerpoint/2010/main" val="300796387"/>
+      </p:ext>
+    </p:extLst>
+  </p:cSld>
+  <p:clrMapOvr>
+    <a:masterClrMapping/>
+  </p:clrMapOvr>
+</p:sld>
+</file>
+
+<file path=ppt/slides/slide32.xml><?xml version="1.0" encoding="utf-8"?>
+<p:sld xmlns:a="http://schemas.openxmlformats.org/drawingml/2006/main" xmlns:r="http://schemas.openxmlformats.org/officeDocument/2006/relationships" xmlns:p="http://schemas.openxmlformats.org/presentationml/2006/main">
+  <p:cSld>
+    <p:spTree>
+      <p:nvGrpSpPr>
+        <p:cNvPr id="1" name=""/>
+        <p:cNvGrpSpPr/>
+        <p:nvPr/>
+      </p:nvGrpSpPr>
+      <p:grpSpPr>
+        <a:xfrm>
+          <a:off x="0" y="0"/>
+          <a:ext cx="0" cy="0"/>
+          <a:chOff x="0" y="0"/>
+          <a:chExt cx="0" cy="0"/>
+        </a:xfrm>
+      </p:grpSpPr>
+      <p:sp>
+        <p:nvSpPr>
+          <p:cNvPr id="2" name="Title 1">
+            <a:extLst>
+              <a:ext uri="{FF2B5EF4-FFF2-40B4-BE49-F238E27FC236}">
+                <a16:creationId xmlns:a16="http://schemas.microsoft.com/office/drawing/2014/main" id="{27D12C1B-AB5A-2215-6C77-879C2257C547}"/>
+              </a:ext>
+            </a:extLst>
+          </p:cNvPr>
+          <p:cNvSpPr>
+            <a:spLocks noGrp="1"/>
+          </p:cNvSpPr>
+          <p:nvPr>
+            <p:ph type="title"/>
+          </p:nvPr>
+        </p:nvSpPr>
+        <p:spPr/>
+        <p:txBody>
+          <a:bodyPr/>
+          <a:lstStyle/>
+          <a:p>
+            <a:r>
+              <a:rPr lang="en-US" dirty="0"/>
+              <a:t>Understanding Cohen’s D</a:t>
+            </a:r>
+          </a:p>
+        </p:txBody>
+      </p:sp>
+      <p:sp>
+        <p:nvSpPr>
+          <p:cNvPr id="3" name="Content Placeholder 2">
+            <a:extLst>
+              <a:ext uri="{FF2B5EF4-FFF2-40B4-BE49-F238E27FC236}">
+                <a16:creationId xmlns:a16="http://schemas.microsoft.com/office/drawing/2014/main" id="{260D2B34-F291-BB51-7CE2-BF05F5FC5913}"/>
+              </a:ext>
+            </a:extLst>
+          </p:cNvPr>
+          <p:cNvSpPr>
+            <a:spLocks noGrp="1"/>
+          </p:cNvSpPr>
+          <p:nvPr>
+            <p:ph idx="1"/>
+          </p:nvPr>
+        </p:nvSpPr>
+        <p:spPr>
+          <a:xfrm>
+            <a:off x="1451579" y="1853754"/>
+            <a:ext cx="9603275" cy="4336981"/>
+          </a:xfrm>
+        </p:spPr>
+        <p:txBody>
+          <a:bodyPr>
+            <a:normAutofit/>
+          </a:bodyPr>
+          <a:lstStyle/>
+          <a:p>
+            <a:r>
+              <a:rPr lang="en-CA" b="1" dirty="0"/>
+              <a:t>Is d precisely estimated?</a:t>
+            </a:r>
+          </a:p>
+          <a:p>
+            <a:pPr lvl="1"/>
+            <a:r>
+              <a:rPr lang="en-CA" dirty="0"/>
+              <a:t>Do we have enough of a sample? Is it likely representative? </a:t>
+            </a:r>
+          </a:p>
+          <a:p>
+            <a:r>
+              <a:rPr lang="en-CA" b="1" dirty="0"/>
+              <a:t>What is the field norm?</a:t>
+            </a:r>
+          </a:p>
+          <a:p>
+            <a:pPr lvl="1"/>
+            <a:r>
+              <a:rPr lang="en-CA" dirty="0"/>
+              <a:t>Depending on what exactly you’re dealing with, the expected d differs. </a:t>
+            </a:r>
+          </a:p>
+          <a:p>
+            <a:r>
+              <a:rPr lang="en-CA" b="1" dirty="0"/>
+              <a:t>What are the stakes? What does the outcome variable mean?</a:t>
+            </a:r>
+          </a:p>
+          <a:p>
+            <a:pPr lvl="1"/>
+            <a:r>
+              <a:rPr lang="en-CA" dirty="0"/>
+              <a:t>In real life, what is the impact of the difference?</a:t>
+            </a:r>
+          </a:p>
+          <a:p>
+            <a:r>
+              <a:rPr lang="en-CA" b="1" dirty="0"/>
+              <a:t>The difference and the significance are independent. </a:t>
+            </a:r>
+          </a:p>
+          <a:p>
+            <a:pPr lvl="1"/>
+            <a:r>
+              <a:rPr lang="en-CA" dirty="0"/>
+              <a:t>We can have a small difference that is statistically significant, or a large one that isn’t. </a:t>
+            </a:r>
+          </a:p>
+          <a:p>
+            <a:pPr lvl="1"/>
+            <a:r>
+              <a:rPr lang="en-CA" dirty="0"/>
+              <a:t>We can have a small difference that matters, or a large one that doesn’t. </a:t>
+            </a:r>
+          </a:p>
+          <a:p>
+            <a:pPr lvl="1"/>
+            <a:r>
+              <a:rPr lang="en-CA" dirty="0"/>
+              <a:t>More than one value* is needed to draw conclusions. </a:t>
+            </a:r>
+          </a:p>
+        </p:txBody>
+      </p:sp>
+    </p:spTree>
+    <p:extLst>
+      <p:ext uri="{BB962C8B-B14F-4D97-AF65-F5344CB8AC3E}">
+        <p14:creationId xmlns:p14="http://schemas.microsoft.com/office/powerpoint/2010/main" val="1512768265"/>
+      </p:ext>
+    </p:extLst>
+  </p:cSld>
+  <p:clrMapOvr>
+    <a:masterClrMapping/>
+  </p:clrMapOvr>
+</p:sld>
+</file>
+
+<file path=ppt/slides/slide33.xml><?xml version="1.0" encoding="utf-8"?>
+<p:sld xmlns:a="http://schemas.openxmlformats.org/drawingml/2006/main" xmlns:r="http://schemas.openxmlformats.org/officeDocument/2006/relationships" xmlns:p="http://schemas.openxmlformats.org/presentationml/2006/main">
+  <p:cSld>
+    <p:spTree>
+      <p:nvGrpSpPr>
+        <p:cNvPr id="1" name=""/>
+        <p:cNvGrpSpPr/>
+        <p:nvPr/>
+      </p:nvGrpSpPr>
+      <p:grpSpPr>
+        <a:xfrm>
+          <a:off x="0" y="0"/>
+          <a:ext cx="0" cy="0"/>
+          <a:chOff x="0" y="0"/>
+          <a:chExt cx="0" cy="0"/>
+        </a:xfrm>
+      </p:grpSpPr>
+      <p:sp>
+        <p:nvSpPr>
+          <p:cNvPr id="2" name="Title 1">
+            <a:extLst>
+              <a:ext uri="{FF2B5EF4-FFF2-40B4-BE49-F238E27FC236}">
+                <a16:creationId xmlns:a16="http://schemas.microsoft.com/office/drawing/2014/main" id="{E02EB4AF-E945-3564-AE2C-8D101A281F72}"/>
+              </a:ext>
+            </a:extLst>
+          </p:cNvPr>
+          <p:cNvSpPr>
+            <a:spLocks noGrp="1"/>
+          </p:cNvSpPr>
+          <p:nvPr>
+            <p:ph type="title"/>
+          </p:nvPr>
+        </p:nvSpPr>
+        <p:spPr/>
+        <p:txBody>
+          <a:bodyPr/>
+          <a:lstStyle/>
+          <a:p>
+            <a:r>
+              <a:rPr lang="en-US" dirty="0"/>
+              <a:t>Odds</a:t>
+            </a:r>
+          </a:p>
+        </p:txBody>
+      </p:sp>
+      <p:sp>
+        <p:nvSpPr>
+          <p:cNvPr id="3" name="Content Placeholder 2">
+            <a:extLst>
+              <a:ext uri="{FF2B5EF4-FFF2-40B4-BE49-F238E27FC236}">
+                <a16:creationId xmlns:a16="http://schemas.microsoft.com/office/drawing/2014/main" id="{0D19A075-03D3-CE2C-2556-1E467F68CFCB}"/>
+              </a:ext>
+            </a:extLst>
+          </p:cNvPr>
+          <p:cNvSpPr>
+            <a:spLocks noGrp="1"/>
+          </p:cNvSpPr>
+          <p:nvPr>
+            <p:ph idx="1"/>
+          </p:nvPr>
+        </p:nvSpPr>
+        <p:spPr/>
+        <p:txBody>
+          <a:bodyPr/>
+          <a:lstStyle/>
+          <a:p>
+            <a:r>
+              <a:rPr lang="en-US" dirty="0"/>
+              <a:t>All of this probability talk leads us to one of the most important ML concepts – odds. </a:t>
+            </a:r>
+          </a:p>
+          <a:p>
+            <a:r>
+              <a:rPr lang="en-US" dirty="0"/>
+              <a:t>Odds are an alternate expression of probability. </a:t>
+            </a:r>
+          </a:p>
+        </p:txBody>
+      </p:sp>
+    </p:spTree>
+    <p:extLst>
+      <p:ext uri="{BB962C8B-B14F-4D97-AF65-F5344CB8AC3E}">
+        <p14:creationId xmlns:p14="http://schemas.microsoft.com/office/powerpoint/2010/main" val="429911426"/>
+      </p:ext>
+    </p:extLst>
+  </p:cSld>
+  <p:clrMapOvr>
+    <a:masterClrMapping/>
+  </p:clrMapOvr>
+</p:sld>
+</file>
+
+<file path=ppt/slides/slide34.xml><?xml version="1.0" encoding="utf-8"?>
+<p:sld xmlns:a="http://schemas.openxmlformats.org/drawingml/2006/main" xmlns:r="http://schemas.openxmlformats.org/officeDocument/2006/relationships" xmlns:p="http://schemas.openxmlformats.org/presentationml/2006/main">
+  <p:cSld>
+    <p:spTree>
+      <p:nvGrpSpPr>
+        <p:cNvPr id="1" name=""/>
+        <p:cNvGrpSpPr/>
+        <p:nvPr/>
+      </p:nvGrpSpPr>
+      <p:grpSpPr>
+        <a:xfrm>
+          <a:off x="0" y="0"/>
+          <a:ext cx="0" cy="0"/>
+          <a:chOff x="0" y="0"/>
+          <a:chExt cx="0" cy="0"/>
+        </a:xfrm>
+      </p:grpSpPr>
+      <p:sp>
+        <p:nvSpPr>
+          <p:cNvPr id="2" name="Title 1">
+            <a:extLst>
+              <a:ext uri="{FF2B5EF4-FFF2-40B4-BE49-F238E27FC236}">
+                <a16:creationId xmlns:a16="http://schemas.microsoft.com/office/drawing/2014/main" id="{35230F09-B44A-CB77-DFE0-6E063223B214}"/>
+              </a:ext>
+            </a:extLst>
+          </p:cNvPr>
+          <p:cNvSpPr>
+            <a:spLocks noGrp="1"/>
+          </p:cNvSpPr>
+          <p:nvPr>
+            <p:ph type="title"/>
+          </p:nvPr>
+        </p:nvSpPr>
+        <p:spPr/>
+        <p:txBody>
+          <a:bodyPr/>
+          <a:lstStyle/>
+          <a:p>
+            <a:r>
+              <a:rPr lang="en-US" dirty="0"/>
+              <a:t>Odds</a:t>
+            </a:r>
+          </a:p>
+        </p:txBody>
+      </p:sp>
+      <p:sp>
+        <p:nvSpPr>
+          <p:cNvPr id="3" name="Content Placeholder 2">
+            <a:extLst>
+              <a:ext uri="{FF2B5EF4-FFF2-40B4-BE49-F238E27FC236}">
+                <a16:creationId xmlns:a16="http://schemas.microsoft.com/office/drawing/2014/main" id="{F7464E83-DAA2-5F11-C3F2-FD8C920A5071}"/>
+              </a:ext>
+            </a:extLst>
+          </p:cNvPr>
+          <p:cNvSpPr>
+            <a:spLocks noGrp="1"/>
+          </p:cNvSpPr>
+          <p:nvPr>
+            <p:ph idx="1"/>
+          </p:nvPr>
+        </p:nvSpPr>
+        <p:spPr>
+          <a:xfrm>
+            <a:off x="135924" y="1853754"/>
+            <a:ext cx="4569891" cy="4199727"/>
+          </a:xfrm>
+        </p:spPr>
+        <p:txBody>
+          <a:bodyPr>
+            <a:normAutofit/>
+          </a:bodyPr>
+          <a:lstStyle/>
+          <a:p>
+            <a:r>
+              <a:rPr lang="en-US" sz="2400" dirty="0"/>
+              <a:t>Odds are ratio to 1 to 0.</a:t>
+            </a:r>
+          </a:p>
+          <a:p>
+            <a:pPr lvl="1"/>
+            <a:r>
+              <a:rPr lang="en-US" dirty="0"/>
+              <a:t>Binary – ‘true’ can be either. </a:t>
+            </a:r>
+          </a:p>
+          <a:p>
+            <a:pPr lvl="1"/>
+            <a:r>
+              <a:rPr lang="en-US" dirty="0"/>
+              <a:t>We can translate at will. </a:t>
+            </a:r>
+          </a:p>
+          <a:p>
+            <a:r>
+              <a:rPr lang="en-US" sz="2400" dirty="0"/>
+              <a:t>Example - 80% chance of winning. </a:t>
+            </a:r>
+          </a:p>
+          <a:p>
+            <a:pPr lvl="1"/>
+            <a:r>
+              <a:rPr lang="en-US" sz="2200" dirty="0"/>
+              <a:t>P(win) = .8 = 80%</a:t>
+            </a:r>
+          </a:p>
+          <a:p>
+            <a:pPr lvl="1"/>
+            <a:r>
+              <a:rPr lang="en-US" sz="2000" dirty="0"/>
+              <a:t>.8 / .2 = 4. 4 to 1 odds of winning. </a:t>
+            </a:r>
+          </a:p>
+          <a:p>
+            <a:pPr lvl="1"/>
+            <a:r>
+              <a:rPr lang="en-US" sz="2000" dirty="0"/>
+              <a:t>.2 / .8 = .25. 1 to 4 odds of losing. </a:t>
+            </a:r>
+          </a:p>
+          <a:p>
+            <a:r>
+              <a:rPr lang="en-US" sz="2200" dirty="0"/>
+              <a:t>Translating probability to odds is needed in some places…</a:t>
+            </a:r>
+          </a:p>
+        </p:txBody>
+      </p:sp>
+      <p:pic>
+        <p:nvPicPr>
+          <p:cNvPr id="3074" name="Picture 2" descr="WHAT ARE THE ODDS? | Stats With Cats Blog">
+            <a:extLst>
+              <a:ext uri="{FF2B5EF4-FFF2-40B4-BE49-F238E27FC236}">
+                <a16:creationId xmlns:a16="http://schemas.microsoft.com/office/drawing/2014/main" id="{749D1FBF-A66F-6103-FE5B-671112D689EB}"/>
+              </a:ext>
+            </a:extLst>
+          </p:cNvPr>
+          <p:cNvPicPr>
+            <a:picLocks noChangeAspect="1" noChangeArrowheads="1"/>
+          </p:cNvPicPr>
+          <p:nvPr/>
+        </p:nvPicPr>
+        <p:blipFill>
+          <a:blip r:embed="rId2">
+            <a:extLst>
+              <a:ext uri="{28A0092B-C50C-407E-A947-70E740481C1C}">
+                <a14:useLocalDpi xmlns:a14="http://schemas.microsoft.com/office/drawing/2010/main" val="0"/>
+              </a:ext>
+            </a:extLst>
+          </a:blip>
+          <a:srcRect/>
+          <a:stretch>
+            <a:fillRect/>
+          </a:stretch>
+        </p:blipFill>
+        <p:spPr bwMode="auto">
+          <a:xfrm>
+            <a:off x="4704998" y="1120775"/>
+            <a:ext cx="7487001" cy="4443684"/>
+          </a:xfrm>
+          <a:prstGeom prst="rect">
+            <a:avLst/>
+          </a:prstGeom>
+          <a:noFill/>
+          <a:extLst>
+            <a:ext uri="{909E8E84-426E-40DD-AFC4-6F175D3DCCD1}">
+              <a14:hiddenFill xmlns:a14="http://schemas.microsoft.com/office/drawing/2010/main">
+                <a:solidFill>
+                  <a:srgbClr val="FFFFFF"/>
+                </a:solidFill>
+              </a14:hiddenFill>
+            </a:ext>
+          </a:extLst>
+        </p:spPr>
+      </p:pic>
+    </p:spTree>
+    <p:extLst>
+      <p:ext uri="{BB962C8B-B14F-4D97-AF65-F5344CB8AC3E}">
+        <p14:creationId xmlns:p14="http://schemas.microsoft.com/office/powerpoint/2010/main" val="3516702342"/>
+      </p:ext>
+    </p:extLst>
+  </p:cSld>
+  <p:clrMapOvr>
+    <a:masterClrMapping/>
+  </p:clrMapOvr>
+</p:sld>
+</file>
+
+<file path=ppt/slides/slide35.xml><?xml version="1.0" encoding="utf-8"?>
+<p:sld xmlns:a="http://schemas.openxmlformats.org/drawingml/2006/main" xmlns:r="http://schemas.openxmlformats.org/officeDocument/2006/relationships" xmlns:p="http://schemas.openxmlformats.org/presentationml/2006/main">
+  <p:cSld>
+    <p:spTree>
+      <p:nvGrpSpPr>
+        <p:cNvPr id="1" name=""/>
+        <p:cNvGrpSpPr/>
+        <p:nvPr/>
+      </p:nvGrpSpPr>
+      <p:grpSpPr>
+        <a:xfrm>
+          <a:off x="0" y="0"/>
+          <a:ext cx="0" cy="0"/>
+          <a:chOff x="0" y="0"/>
+          <a:chExt cx="0" cy="0"/>
+        </a:xfrm>
+      </p:grpSpPr>
+      <p:sp>
+        <p:nvSpPr>
+          <p:cNvPr id="2" name="Title 1">
+            <a:extLst>
+              <a:ext uri="{FF2B5EF4-FFF2-40B4-BE49-F238E27FC236}">
+                <a16:creationId xmlns:a16="http://schemas.microsoft.com/office/drawing/2014/main" id="{1082E946-B9B1-7098-30FB-63E737FCEC88}"/>
+              </a:ext>
+            </a:extLst>
+          </p:cNvPr>
+          <p:cNvSpPr>
+            <a:spLocks noGrp="1"/>
+          </p:cNvSpPr>
+          <p:nvPr>
+            <p:ph type="title"/>
+          </p:nvPr>
+        </p:nvSpPr>
+        <p:spPr>
+          <a:xfrm>
+            <a:off x="6588897" y="804519"/>
+            <a:ext cx="4465957" cy="1049235"/>
+          </a:xfrm>
+        </p:spPr>
+        <p:txBody>
+          <a:bodyPr/>
+          <a:lstStyle/>
+          <a:p>
+            <a:r>
+              <a:rPr lang="en-US" dirty="0"/>
+              <a:t>Gambling Odds</a:t>
+            </a:r>
+          </a:p>
+        </p:txBody>
+      </p:sp>
+      <p:sp>
+        <p:nvSpPr>
+          <p:cNvPr id="3" name="Content Placeholder 2">
+            <a:extLst>
+              <a:ext uri="{FF2B5EF4-FFF2-40B4-BE49-F238E27FC236}">
+                <a16:creationId xmlns:a16="http://schemas.microsoft.com/office/drawing/2014/main" id="{E868D726-2503-34A2-A378-F0F3B97F6889}"/>
+              </a:ext>
+            </a:extLst>
+          </p:cNvPr>
+          <p:cNvSpPr>
+            <a:spLocks noGrp="1"/>
+          </p:cNvSpPr>
+          <p:nvPr>
+            <p:ph idx="1"/>
+          </p:nvPr>
+        </p:nvSpPr>
+        <p:spPr>
+          <a:xfrm>
+            <a:off x="6689504" y="2015732"/>
+            <a:ext cx="5502496" cy="3972692"/>
+          </a:xfrm>
+        </p:spPr>
+        <p:txBody>
+          <a:bodyPr/>
+          <a:lstStyle/>
+          <a:p>
+            <a:r>
+              <a:rPr lang="en-US" dirty="0"/>
+              <a:t>If you like gambling, odds are your old best friend. </a:t>
+            </a:r>
+          </a:p>
+          <a:p>
+            <a:r>
+              <a:rPr lang="en-US" dirty="0"/>
+              <a:t>In gambling we see both ratios and +/- (American) odds, as well as European odds. </a:t>
+            </a:r>
+          </a:p>
+          <a:p>
+            <a:r>
+              <a:rPr lang="en-US" dirty="0"/>
+              <a:t>All of these odds, and probability, can be translated to each other with a little algebra. </a:t>
+            </a:r>
+          </a:p>
+          <a:p>
+            <a:pPr lvl="1"/>
+            <a:r>
+              <a:rPr lang="en-US" dirty="0"/>
+              <a:t>Note: sports betting odds aren’t </a:t>
+            </a:r>
+            <a:r>
+              <a:rPr lang="en-US" i="1" dirty="0"/>
+              <a:t>actually</a:t>
+            </a:r>
+            <a:r>
+              <a:rPr lang="en-US" dirty="0"/>
+              <a:t> set based on probability of winning, they are largely set to balance amounts bet on each side. </a:t>
+            </a:r>
+          </a:p>
+        </p:txBody>
+      </p:sp>
+      <p:pic>
+        <p:nvPicPr>
+          <p:cNvPr id="5" name="Picture 4" descr="Betting odds explained: Fractional, decimal &amp; American">
+            <a:extLst>
+              <a:ext uri="{FF2B5EF4-FFF2-40B4-BE49-F238E27FC236}">
+                <a16:creationId xmlns:a16="http://schemas.microsoft.com/office/drawing/2014/main" id="{015A29CA-5A12-DF5E-C436-34B52C2468B4}"/>
+              </a:ext>
+            </a:extLst>
+          </p:cNvPr>
+          <p:cNvPicPr>
+            <a:picLocks noChangeAspect="1"/>
+          </p:cNvPicPr>
+          <p:nvPr/>
+        </p:nvPicPr>
+        <p:blipFill>
+          <a:blip r:embed="rId2"/>
+          <a:stretch>
+            <a:fillRect/>
+          </a:stretch>
+        </p:blipFill>
+        <p:spPr>
+          <a:xfrm>
+            <a:off x="0" y="0"/>
+            <a:ext cx="6502400" cy="3632200"/>
+          </a:xfrm>
+          <a:prstGeom prst="rect">
+            <a:avLst/>
+          </a:prstGeom>
+        </p:spPr>
+      </p:pic>
+      <p:pic>
+        <p:nvPicPr>
+          <p:cNvPr id="7" name="Picture 6" descr="How to Calculate Odds: 11 Steps (with Pictures) - wikiHow">
+            <a:extLst>
+              <a:ext uri="{FF2B5EF4-FFF2-40B4-BE49-F238E27FC236}">
+                <a16:creationId xmlns:a16="http://schemas.microsoft.com/office/drawing/2014/main" id="{43B10180-4F26-1FD1-66BB-8485B64790E3}"/>
+              </a:ext>
+            </a:extLst>
+          </p:cNvPr>
+          <p:cNvPicPr>
+            <a:picLocks noChangeAspect="1"/>
+          </p:cNvPicPr>
+          <p:nvPr/>
+        </p:nvPicPr>
+        <p:blipFill>
+          <a:blip r:embed="rId3"/>
+          <a:stretch>
+            <a:fillRect/>
+          </a:stretch>
+        </p:blipFill>
+        <p:spPr>
+          <a:xfrm>
+            <a:off x="0" y="3632200"/>
+            <a:ext cx="4278093" cy="3189124"/>
+          </a:xfrm>
+          <a:prstGeom prst="rect">
+            <a:avLst/>
+          </a:prstGeom>
+        </p:spPr>
+      </p:pic>
+    </p:spTree>
+    <p:extLst>
+      <p:ext uri="{BB962C8B-B14F-4D97-AF65-F5344CB8AC3E}">
+        <p14:creationId xmlns:p14="http://schemas.microsoft.com/office/powerpoint/2010/main" val="3244536568"/>
+      </p:ext>
+    </p:extLst>
+  </p:cSld>
+  <p:clrMapOvr>
+    <a:masterClrMapping/>
+  </p:clrMapOvr>
+</p:sld>
+</file>
+
+<file path=ppt/slides/slide36.xml><?xml version="1.0" encoding="utf-8"?>
+<p:sld xmlns:a="http://schemas.openxmlformats.org/drawingml/2006/main" xmlns:r="http://schemas.openxmlformats.org/officeDocument/2006/relationships" xmlns:p="http://schemas.openxmlformats.org/presentationml/2006/main">
+  <p:cSld>
+    <p:spTree>
+      <p:nvGrpSpPr>
+        <p:cNvPr id="1" name=""/>
+        <p:cNvGrpSpPr/>
+        <p:nvPr/>
+      </p:nvGrpSpPr>
+      <p:grpSpPr>
+        <a:xfrm>
+          <a:off x="0" y="0"/>
+          <a:ext cx="0" cy="0"/>
+          <a:chOff x="0" y="0"/>
+          <a:chExt cx="0" cy="0"/>
+        </a:xfrm>
+      </p:grpSpPr>
+      <p:sp>
+        <p:nvSpPr>
+          <p:cNvPr id="2" name="Title 1">
+            <a:extLst>
+              <a:ext uri="{FF2B5EF4-FFF2-40B4-BE49-F238E27FC236}">
+                <a16:creationId xmlns:a16="http://schemas.microsoft.com/office/drawing/2014/main" id="{F19675AC-B6AC-2B2A-EBAB-D6EDA961AD26}"/>
+              </a:ext>
+            </a:extLst>
+          </p:cNvPr>
+          <p:cNvSpPr>
+            <a:spLocks noGrp="1"/>
+          </p:cNvSpPr>
+          <p:nvPr>
+            <p:ph type="title"/>
+          </p:nvPr>
+        </p:nvSpPr>
+        <p:spPr/>
+        <p:txBody>
+          <a:bodyPr/>
+          <a:lstStyle/>
+          <a:p>
+            <a:r>
+              <a:rPr lang="en-US" dirty="0"/>
+              <a:t>Log Odds</a:t>
+            </a:r>
+          </a:p>
+        </p:txBody>
+      </p:sp>
+      <p:sp>
+        <p:nvSpPr>
+          <p:cNvPr id="3" name="Content Placeholder 2">
+            <a:extLst>
+              <a:ext uri="{FF2B5EF4-FFF2-40B4-BE49-F238E27FC236}">
+                <a16:creationId xmlns:a16="http://schemas.microsoft.com/office/drawing/2014/main" id="{B1CD082F-37FD-EDCB-33E4-44300595AF3C}"/>
+              </a:ext>
+            </a:extLst>
+          </p:cNvPr>
+          <p:cNvSpPr>
+            <a:spLocks noGrp="1"/>
+          </p:cNvSpPr>
+          <p:nvPr>
+            <p:ph idx="1"/>
+          </p:nvPr>
+        </p:nvSpPr>
+        <p:spPr>
+          <a:xfrm>
+            <a:off x="1451579" y="1853754"/>
+            <a:ext cx="9603275" cy="4290568"/>
+          </a:xfrm>
+        </p:spPr>
+        <p:txBody>
+          <a:bodyPr>
+            <a:normAutofit/>
+          </a:bodyPr>
+          <a:lstStyle/>
+          <a:p>
+            <a:r>
+              <a:rPr lang="en-US" dirty="0"/>
+              <a:t>Probabilities have one problem (that will matter soon) – changes in each direction. </a:t>
+            </a:r>
+          </a:p>
+          <a:p>
+            <a:pPr lvl="1"/>
+            <a:r>
+              <a:rPr lang="en-US" dirty="0"/>
+              <a:t>Going from 100 to 10 is a 90% reduction. </a:t>
+            </a:r>
+          </a:p>
+          <a:p>
+            <a:pPr lvl="1"/>
+            <a:r>
+              <a:rPr lang="en-US" dirty="0"/>
+              <a:t>Going from 10 to 100 is a 900% increase. </a:t>
+            </a:r>
+          </a:p>
+          <a:p>
+            <a:r>
+              <a:rPr lang="en-US" dirty="0"/>
+              <a:t>Odds are useful in comparing probabilities in combination with logs. </a:t>
+            </a:r>
+          </a:p>
+          <a:p>
+            <a:r>
+              <a:rPr lang="en-US" dirty="0"/>
+              <a:t>By taking the log of the odds, the value becomes symmetrical. </a:t>
+            </a:r>
+          </a:p>
+          <a:p>
+            <a:r>
+              <a:rPr lang="en-US" dirty="0"/>
+              <a:t>This is called the </a:t>
+            </a:r>
+            <a:r>
+              <a:rPr lang="en-US" b="1" dirty="0"/>
+              <a:t>logit</a:t>
+            </a:r>
+            <a:r>
+              <a:rPr lang="en-US" dirty="0"/>
+              <a:t> – important later in ML. </a:t>
+            </a:r>
+          </a:p>
+          <a:p>
+            <a:r>
+              <a:rPr lang="en-US" dirty="0"/>
+              <a:t>Allows for comparisons of probabilities that is comparable. </a:t>
+            </a:r>
+          </a:p>
+          <a:p>
+            <a:r>
+              <a:rPr lang="en-US" dirty="0"/>
+              <a:t>*intercept bit of the formula can be ignored for now. </a:t>
+            </a:r>
+          </a:p>
+        </p:txBody>
+      </p:sp>
+      <p:pic>
+        <p:nvPicPr>
+          <p:cNvPr id="6" name="Picture 5">
+            <a:extLst>
+              <a:ext uri="{FF2B5EF4-FFF2-40B4-BE49-F238E27FC236}">
+                <a16:creationId xmlns:a16="http://schemas.microsoft.com/office/drawing/2014/main" id="{CDA1C5F9-E4A2-7DF4-9E10-F4EB438C23BF}"/>
+              </a:ext>
+            </a:extLst>
+          </p:cNvPr>
+          <p:cNvPicPr>
+            <a:picLocks noChangeAspect="1"/>
+          </p:cNvPicPr>
+          <p:nvPr/>
+        </p:nvPicPr>
+        <p:blipFill>
+          <a:blip r:embed="rId2"/>
+          <a:stretch>
+            <a:fillRect/>
+          </a:stretch>
+        </p:blipFill>
+        <p:spPr>
+          <a:xfrm>
+            <a:off x="7169961" y="0"/>
+            <a:ext cx="5026158" cy="1853754"/>
+          </a:xfrm>
+          <a:prstGeom prst="rect">
+            <a:avLst/>
+          </a:prstGeom>
+        </p:spPr>
+      </p:pic>
+    </p:spTree>
+    <p:extLst>
+      <p:ext uri="{BB962C8B-B14F-4D97-AF65-F5344CB8AC3E}">
+        <p14:creationId xmlns:p14="http://schemas.microsoft.com/office/powerpoint/2010/main" val="3868561471"/>
+      </p:ext>
+    </p:extLst>
+  </p:cSld>
+  <p:clrMapOvr>
+    <a:masterClrMapping/>
+  </p:clrMapOvr>
+</p:sld>
+</file>
+
+<file path=ppt/slides/slide37.xml><?xml version="1.0" encoding="utf-8"?>
+<p:sld xmlns:a="http://schemas.openxmlformats.org/drawingml/2006/main" xmlns:r="http://schemas.openxmlformats.org/officeDocument/2006/relationships" xmlns:p="http://schemas.openxmlformats.org/presentationml/2006/main">
+  <p:cSld>
+    <p:spTree>
+      <p:nvGrpSpPr>
+        <p:cNvPr id="1" name=""/>
+        <p:cNvGrpSpPr/>
+        <p:nvPr/>
+      </p:nvGrpSpPr>
+      <p:grpSpPr>
+        <a:xfrm>
+          <a:off x="0" y="0"/>
+          <a:ext cx="0" cy="0"/>
+          <a:chOff x="0" y="0"/>
+          <a:chExt cx="0" cy="0"/>
+        </a:xfrm>
+      </p:grpSpPr>
+      <p:sp>
+        <p:nvSpPr>
+          <p:cNvPr id="2" name="Title 1">
+            <a:extLst>
+              <a:ext uri="{FF2B5EF4-FFF2-40B4-BE49-F238E27FC236}">
+                <a16:creationId xmlns:a16="http://schemas.microsoft.com/office/drawing/2014/main" id="{B88A14D7-CDEB-EC09-CE3A-576E29A7A69E}"/>
+              </a:ext>
+            </a:extLst>
+          </p:cNvPr>
+          <p:cNvSpPr>
+            <a:spLocks noGrp="1"/>
+          </p:cNvSpPr>
+          <p:nvPr>
+            <p:ph type="title"/>
+          </p:nvPr>
+        </p:nvSpPr>
+        <p:spPr/>
+        <p:txBody>
+          <a:bodyPr/>
+          <a:lstStyle/>
+          <a:p>
+            <a:r>
+              <a:rPr lang="en-US" dirty="0"/>
+              <a:t>Preview - More log Odds</a:t>
+            </a:r>
+          </a:p>
+        </p:txBody>
+      </p:sp>
+      <p:sp>
+        <p:nvSpPr>
+          <p:cNvPr id="3" name="Content Placeholder 2">
+            <a:extLst>
+              <a:ext uri="{FF2B5EF4-FFF2-40B4-BE49-F238E27FC236}">
+                <a16:creationId xmlns:a16="http://schemas.microsoft.com/office/drawing/2014/main" id="{862FCB06-553F-A43B-36CA-D9FD62965D3B}"/>
+              </a:ext>
+            </a:extLst>
+          </p:cNvPr>
+          <p:cNvSpPr>
+            <a:spLocks noGrp="1"/>
+          </p:cNvSpPr>
+          <p:nvPr>
+            <p:ph idx="1"/>
+          </p:nvPr>
+        </p:nvSpPr>
+        <p:spPr/>
+        <p:txBody>
+          <a:bodyPr/>
+          <a:lstStyle/>
+          <a:p>
+            <a:r>
+              <a:rPr lang="en-US" dirty="0"/>
+              <a:t>The log odds, or logit will become important later. </a:t>
+            </a:r>
+          </a:p>
+          <a:p>
+            <a:r>
+              <a:rPr lang="en-US" dirty="0"/>
+              <a:t>The symmetry of the math allows for logistic regression to work. </a:t>
+            </a:r>
+          </a:p>
+        </p:txBody>
+      </p:sp>
+      <p:pic>
+        <p:nvPicPr>
+          <p:cNvPr id="4" name="Picture 3" descr="FAQ: How do I interpret odds ratios in logistic regression?">
+            <a:extLst>
+              <a:ext uri="{FF2B5EF4-FFF2-40B4-BE49-F238E27FC236}">
+                <a16:creationId xmlns:a16="http://schemas.microsoft.com/office/drawing/2014/main" id="{507779CE-0AC1-FCD5-6D74-3C3DC1904B68}"/>
+              </a:ext>
+            </a:extLst>
+          </p:cNvPr>
+          <p:cNvPicPr>
+            <a:picLocks noChangeAspect="1"/>
+          </p:cNvPicPr>
+          <p:nvPr/>
+        </p:nvPicPr>
+        <p:blipFill>
+          <a:blip r:embed="rId2"/>
+          <a:stretch>
+            <a:fillRect/>
+          </a:stretch>
+        </p:blipFill>
+        <p:spPr>
+          <a:xfrm>
+            <a:off x="1137146" y="3233837"/>
+            <a:ext cx="4887694" cy="3290098"/>
+          </a:xfrm>
+          <a:prstGeom prst="rect">
+            <a:avLst/>
+          </a:prstGeom>
+        </p:spPr>
+      </p:pic>
+      <p:pic>
+        <p:nvPicPr>
+          <p:cNvPr id="5" name="Picture 4" descr="More - From Logarithms to Logistic Sigmoid">
+            <a:extLst>
+              <a:ext uri="{FF2B5EF4-FFF2-40B4-BE49-F238E27FC236}">
+                <a16:creationId xmlns:a16="http://schemas.microsoft.com/office/drawing/2014/main" id="{7A51D792-D024-6FF8-C58C-D2AC8AF02604}"/>
+              </a:ext>
+            </a:extLst>
+          </p:cNvPr>
+          <p:cNvPicPr>
+            <a:picLocks noChangeAspect="1"/>
+          </p:cNvPicPr>
+          <p:nvPr/>
+        </p:nvPicPr>
+        <p:blipFill>
+          <a:blip r:embed="rId3"/>
+          <a:stretch>
+            <a:fillRect/>
+          </a:stretch>
+        </p:blipFill>
+        <p:spPr>
+          <a:xfrm>
+            <a:off x="6753759" y="3233837"/>
+            <a:ext cx="4809350" cy="3290099"/>
+          </a:xfrm>
+          <a:prstGeom prst="rect">
+            <a:avLst/>
+          </a:prstGeom>
+        </p:spPr>
+      </p:pic>
+    </p:spTree>
+    <p:extLst>
+      <p:ext uri="{BB962C8B-B14F-4D97-AF65-F5344CB8AC3E}">
+        <p14:creationId xmlns:p14="http://schemas.microsoft.com/office/powerpoint/2010/main" val="3499252509"/>
+      </p:ext>
+    </p:extLst>
+  </p:cSld>
+  <p:clrMapOvr>
+    <a:masterClrMapping/>
+  </p:clrMapOvr>
+</p:sld>
+</file>
+
+<file path=ppt/slides/slide38.xml><?xml version="1.0" encoding="utf-8"?>
+<p:sld xmlns:a="http://schemas.openxmlformats.org/drawingml/2006/main" xmlns:r="http://schemas.openxmlformats.org/officeDocument/2006/relationships" xmlns:p="http://schemas.openxmlformats.org/presentationml/2006/main" show="0">
+  <p:cSld>
+    <p:spTree>
+      <p:nvGrpSpPr>
+        <p:cNvPr id="1" name=""/>
+        <p:cNvGrpSpPr/>
+        <p:nvPr/>
+      </p:nvGrpSpPr>
+      <p:grpSpPr>
+        <a:xfrm>
+          <a:off x="0" y="0"/>
+          <a:ext cx="0" cy="0"/>
+          <a:chOff x="0" y="0"/>
+          <a:chExt cx="0" cy="0"/>
+        </a:xfrm>
+      </p:grpSpPr>
+      <p:sp>
+        <p:nvSpPr>
+          <p:cNvPr id="2" name="Title 1">
+            <a:extLst>
+              <a:ext uri="{FF2B5EF4-FFF2-40B4-BE49-F238E27FC236}">
+                <a16:creationId xmlns:a16="http://schemas.microsoft.com/office/drawing/2014/main" id="{52FA847A-1163-5E49-A407-9CEA36D1942E}"/>
+              </a:ext>
+            </a:extLst>
+          </p:cNvPr>
+          <p:cNvSpPr>
+            <a:spLocks noGrp="1"/>
+          </p:cNvSpPr>
+          <p:nvPr>
+            <p:ph type="title"/>
+          </p:nvPr>
+        </p:nvSpPr>
+        <p:spPr/>
+        <p:txBody>
+          <a:bodyPr/>
+          <a:lstStyle/>
+          <a:p>
+            <a:r>
+              <a:rPr lang="en-US" dirty="0"/>
+              <a:t>Bayes</a:t>
+            </a:r>
+          </a:p>
+        </p:txBody>
+      </p:sp>
+      <p:sp>
+        <p:nvSpPr>
+          <p:cNvPr id="3" name="Content Placeholder 2">
+            <a:extLst>
+              <a:ext uri="{FF2B5EF4-FFF2-40B4-BE49-F238E27FC236}">
+                <a16:creationId xmlns:a16="http://schemas.microsoft.com/office/drawing/2014/main" id="{1F53A5AB-70E3-5942-8353-02D7E65E9EB9}"/>
+              </a:ext>
+            </a:extLst>
+          </p:cNvPr>
+          <p:cNvSpPr>
+            <a:spLocks noGrp="1"/>
+          </p:cNvSpPr>
+          <p:nvPr>
+            <p:ph idx="1"/>
+          </p:nvPr>
+        </p:nvSpPr>
+        <p:spPr/>
+        <p:txBody>
+          <a:bodyPr/>
+          <a:lstStyle/>
+          <a:p>
+            <a:r>
+              <a:rPr lang="en-US" dirty="0"/>
+              <a:t>Bayes theorem expands on the idea of conditional probability. </a:t>
+            </a:r>
+          </a:p>
+          <a:p>
+            <a:r>
+              <a:rPr lang="en-US" dirty="0"/>
+              <a:t>We can derive it pretty easily, by looking at examples. </a:t>
+            </a:r>
+          </a:p>
+          <a:p>
+            <a:r>
+              <a:rPr lang="en-US" dirty="0"/>
+              <a:t>It is the basis of Bayesian statistics, which we will touch on a little, but not do in great depth. </a:t>
+            </a:r>
+          </a:p>
+        </p:txBody>
+      </p:sp>
+    </p:spTree>
+    <p:extLst>
+      <p:ext uri="{BB962C8B-B14F-4D97-AF65-F5344CB8AC3E}">
+        <p14:creationId xmlns:p14="http://schemas.microsoft.com/office/powerpoint/2010/main" val="1442097028"/>
+      </p:ext>
+    </p:extLst>
+  </p:cSld>
+  <p:clrMapOvr>
+    <a:masterClrMapping/>
+  </p:clrMapOvr>
+</p:sld>
+</file>
+
+<file path=ppt/slides/slide39.xml><?xml version="1.0" encoding="utf-8"?>
+<p:sld xmlns:a="http://schemas.openxmlformats.org/drawingml/2006/main" xmlns:r="http://schemas.openxmlformats.org/officeDocument/2006/relationships" xmlns:p="http://schemas.openxmlformats.org/presentationml/2006/main">
+  <p:cSld>
+    <p:spTree>
+      <p:nvGrpSpPr>
+        <p:cNvPr id="1" name=""/>
+        <p:cNvGrpSpPr/>
+        <p:nvPr/>
+      </p:nvGrpSpPr>
+      <p:grpSpPr>
+        <a:xfrm>
+          <a:off x="0" y="0"/>
+          <a:ext cx="0" cy="0"/>
+          <a:chOff x="0" y="0"/>
+          <a:chExt cx="0" cy="0"/>
+        </a:xfrm>
+      </p:grpSpPr>
+      <p:sp>
+        <p:nvSpPr>
+          <p:cNvPr id="2" name="Title 1">
+            <a:extLst>
+              <a:ext uri="{FF2B5EF4-FFF2-40B4-BE49-F238E27FC236}">
+                <a16:creationId xmlns:a16="http://schemas.microsoft.com/office/drawing/2014/main" id="{30D14190-7D92-DEC6-84E4-D1D940F21649}"/>
+              </a:ext>
+            </a:extLst>
+          </p:cNvPr>
+          <p:cNvSpPr>
+            <a:spLocks noGrp="1"/>
+          </p:cNvSpPr>
+          <p:nvPr>
+            <p:ph type="title"/>
+          </p:nvPr>
+        </p:nvSpPr>
+        <p:spPr/>
+        <p:txBody>
+          <a:bodyPr/>
+          <a:lstStyle/>
+          <a:p>
+            <a:r>
+              <a:rPr lang="en-US" dirty="0"/>
+              <a:t>Probability and Estimation</a:t>
+            </a:r>
+          </a:p>
+        </p:txBody>
+      </p:sp>
+      <p:sp>
+        <p:nvSpPr>
+          <p:cNvPr id="3" name="Content Placeholder 2">
+            <a:extLst>
+              <a:ext uri="{FF2B5EF4-FFF2-40B4-BE49-F238E27FC236}">
+                <a16:creationId xmlns:a16="http://schemas.microsoft.com/office/drawing/2014/main" id="{2E81BFAB-1E58-E3F3-96EB-F722C988A76C}"/>
+              </a:ext>
+            </a:extLst>
+          </p:cNvPr>
+          <p:cNvSpPr>
+            <a:spLocks noGrp="1"/>
+          </p:cNvSpPr>
+          <p:nvPr>
+            <p:ph idx="1"/>
+          </p:nvPr>
+        </p:nvSpPr>
+        <p:spPr>
+          <a:xfrm>
+            <a:off x="1451579" y="1853754"/>
+            <a:ext cx="9603275" cy="4199727"/>
+          </a:xfrm>
+        </p:spPr>
+        <p:txBody>
+          <a:bodyPr>
+            <a:normAutofit lnSpcReduction="10000"/>
+          </a:bodyPr>
+          <a:lstStyle/>
+          <a:p>
+            <a:r>
+              <a:rPr lang="en-US" dirty="0"/>
+              <a:t>The idea of probability underlies much of the analysis we want to do. </a:t>
+            </a:r>
+          </a:p>
+          <a:p>
+            <a:pPr lvl="1"/>
+            <a:r>
+              <a:rPr lang="en-US" dirty="0"/>
+              <a:t>When dealing with samples, we rarely know ’the’ answer, we have uncertainty. </a:t>
+            </a:r>
+          </a:p>
+          <a:p>
+            <a:r>
+              <a:rPr lang="en-US" dirty="0"/>
+              <a:t>Core idea – based on this expectation, does the reality match that. </a:t>
+            </a:r>
+          </a:p>
+          <a:p>
+            <a:pPr lvl="1"/>
+            <a:r>
+              <a:rPr lang="en-US" dirty="0"/>
+              <a:t>I.e. Hypothesis testing – what are the odds these two things are different? </a:t>
+            </a:r>
+          </a:p>
+          <a:p>
+            <a:pPr lvl="1"/>
+            <a:r>
+              <a:rPr lang="en-US" dirty="0"/>
+              <a:t>Generalization – if we expand from a sample to population, how confident are we? </a:t>
+            </a:r>
+          </a:p>
+          <a:p>
+            <a:r>
+              <a:rPr lang="en-US" dirty="0"/>
+              <a:t>Answering a question is (usually) not a yes/no thing:</a:t>
+            </a:r>
+          </a:p>
+          <a:p>
+            <a:pPr lvl="1"/>
+            <a:r>
+              <a:rPr lang="en-US" dirty="0"/>
+              <a:t>Are the life expectancies of treatment/placebo different after a drug trial?</a:t>
+            </a:r>
+          </a:p>
+          <a:p>
+            <a:pPr lvl="1"/>
+            <a:r>
+              <a:rPr lang="en-US" dirty="0"/>
+              <a:t>Some treated people will die quick, some placebo people will live a long time. </a:t>
+            </a:r>
+          </a:p>
+          <a:p>
+            <a:pPr lvl="1"/>
+            <a:r>
+              <a:rPr lang="en-US" dirty="0"/>
+              <a:t>What is the likelihood that drug people outlive placebo people? </a:t>
+            </a:r>
+          </a:p>
+          <a:p>
+            <a:r>
+              <a:rPr lang="en-US" dirty="0"/>
+              <a:t>There’s an alternative branch of stats, Bayesian, that does all basic stats via probability. </a:t>
+            </a:r>
+          </a:p>
+        </p:txBody>
+      </p:sp>
+    </p:spTree>
+    <p:extLst>
+      <p:ext uri="{BB962C8B-B14F-4D97-AF65-F5344CB8AC3E}">
+        <p14:creationId xmlns:p14="http://schemas.microsoft.com/office/powerpoint/2010/main" val="3371470544"/>
       </p:ext>
     </p:extLst>
   </p:cSld>
@@ -6966,7 +8893,7 @@
           <a:p>
             <a:r>
               <a:rPr lang="en-US" dirty="0"/>
-              <a:t>Continuous variables express density as a % likeliness in a range.</a:t>
+              <a:t>Continuous variables express density as a % likeliness in a bin range.</a:t>
             </a:r>
           </a:p>
           <a:p>
@@ -6978,33 +8905,8 @@
           <a:p>
             <a:r>
               <a:rPr lang="en-US" dirty="0"/>
-              <a:t>There can be some questionable ones:</a:t>
-            </a:r>
-          </a:p>
-          <a:p>
-            <a:pPr lvl="1"/>
-            <a:r>
-              <a:rPr lang="en-US" dirty="0"/>
-              <a:t>Does the midpoint make sense? </a:t>
-            </a:r>
-          </a:p>
-          <a:p>
-            <a:pPr lvl="1"/>
-            <a:r>
-              <a:rPr lang="en-US" dirty="0"/>
-              <a:t>What matters for your scenario?</a:t>
-            </a:r>
-          </a:p>
-          <a:p>
-            <a:r>
-              <a:rPr lang="en-US" dirty="0"/>
-              <a:t>Bonus </a:t>
-            </a:r>
-            <a:r>
-              <a:rPr lang="en-US"/>
-              <a:t>– spot any errors? </a:t>
-            </a:r>
-            <a:endParaRPr lang="en-US" dirty="0"/>
+              <a:t>Bonus – spot any errors? </a:t>
+            </a:r>
           </a:p>
         </p:txBody>
       </p:sp>
@@ -7090,7 +8992,7 @@
           <p:cNvPr id="2" name="Title 1">
             <a:extLst>
               <a:ext uri="{FF2B5EF4-FFF2-40B4-BE49-F238E27FC236}">
-                <a16:creationId xmlns:a16="http://schemas.microsoft.com/office/drawing/2014/main" id="{3D786B20-D5EC-CF4F-8C37-924A9298E58D}"/>
+                <a16:creationId xmlns:a16="http://schemas.microsoft.com/office/drawing/2014/main" id="{F17B6D77-0099-CF1B-B823-47F097242175}"/>
               </a:ext>
             </a:extLst>
           </p:cNvPr>
@@ -7108,7 +9010,7 @@
           <a:p>
             <a:r>
               <a:rPr lang="en-US" dirty="0"/>
-              <a:t>What’s the Probability? </a:t>
+              <a:t>Remember – Fit reality as Best You can</a:t>
             </a:r>
           </a:p>
         </p:txBody>
@@ -7118,7 +9020,7 @@
           <p:cNvPr id="3" name="Content Placeholder 2">
             <a:extLst>
               <a:ext uri="{FF2B5EF4-FFF2-40B4-BE49-F238E27FC236}">
-                <a16:creationId xmlns:a16="http://schemas.microsoft.com/office/drawing/2014/main" id="{3C7917E6-EC70-C540-B629-F6D3990AB300}"/>
+                <a16:creationId xmlns:a16="http://schemas.microsoft.com/office/drawing/2014/main" id="{4711A57C-6231-CFD5-82EF-3856628BAD77}"/>
               </a:ext>
             </a:extLst>
           </p:cNvPr>
@@ -7131,87 +9033,64 @@
         </p:nvSpPr>
         <p:spPr>
           <a:xfrm>
-            <a:off x="1451579" y="2015732"/>
-            <a:ext cx="9603275" cy="4146529"/>
-          </a:xfrm>
-        </p:spPr>
-        <p:txBody>
-          <a:bodyPr/>
-          <a:lstStyle/>
-          <a:p>
-            <a:r>
-              <a:rPr lang="en-US" dirty="0"/>
-              <a:t>Probability = the chances something happens.</a:t>
-            </a:r>
-          </a:p>
-          <a:p>
-            <a:pPr lvl="1"/>
-            <a:r>
-              <a:rPr lang="en-US" dirty="0"/>
-              <a:t>Or: The fraction of a total possibilities. </a:t>
-            </a:r>
-          </a:p>
-          <a:p>
-            <a:pPr lvl="1"/>
-            <a:r>
-              <a:rPr lang="en-US" dirty="0"/>
-              <a:t>E.g. the chances you roll a die and get a 5 = 1/6</a:t>
-            </a:r>
-          </a:p>
-          <a:p>
-            <a:r>
-              <a:rPr lang="en-US" dirty="0"/>
-              <a:t>What does probability matter to us?</a:t>
-            </a:r>
-          </a:p>
-          <a:p>
-            <a:pPr lvl="1"/>
-            <a:r>
-              <a:rPr lang="en-US" dirty="0"/>
-              <a:t>They matter – a little. </a:t>
-            </a:r>
-          </a:p>
-          <a:p>
-            <a:pPr lvl="1"/>
-            <a:r>
-              <a:rPr lang="en-US" dirty="0"/>
-              <a:t>Probabilities are common – e.g. gambling. </a:t>
-            </a:r>
-          </a:p>
-          <a:p>
-            <a:pPr lvl="1"/>
-            <a:r>
-              <a:rPr lang="en-US" dirty="0"/>
-              <a:t>Probability is often misunderstood. </a:t>
-            </a:r>
-          </a:p>
-          <a:p>
-            <a:pPr lvl="1"/>
-            <a:r>
-              <a:rPr lang="en-US" dirty="0"/>
-              <a:t>Probability provides an alternate view of what we are looking at. </a:t>
-            </a:r>
-          </a:p>
-          <a:p>
-            <a:pPr lvl="2"/>
-            <a:r>
-              <a:rPr lang="en-US" dirty="0"/>
-              <a:t>Can reach things like distributions, by looking at probability, instead of data.</a:t>
-            </a:r>
-          </a:p>
-          <a:p>
-            <a:pPr lvl="2"/>
-            <a:r>
-              <a:rPr lang="en-US" dirty="0"/>
-              <a:t>probability something happens = share of data where that happens (</a:t>
-            </a:r>
-            <a:r>
-              <a:rPr lang="en-US" dirty="0" err="1"/>
-              <a:t>apx</a:t>
-            </a:r>
-            <a:r>
-              <a:rPr lang="en-US" dirty="0"/>
-              <a:t>)</a:t>
+            <a:off x="6096000" y="1853754"/>
+            <a:ext cx="6096000" cy="4324624"/>
+          </a:xfrm>
+        </p:spPr>
+        <p:txBody>
+          <a:bodyPr/>
+          <a:lstStyle/>
+          <a:p>
+            <a:r>
+              <a:rPr lang="en-US" dirty="0"/>
+              <a:t>Some things can be reasonably modeled with either discreet or continuous. </a:t>
+            </a:r>
+          </a:p>
+          <a:p>
+            <a:pPr lvl="1"/>
+            <a:r>
+              <a:rPr lang="en-US" dirty="0"/>
+              <a:t>Domain knowledge decision. </a:t>
+            </a:r>
+          </a:p>
+          <a:p>
+            <a:r>
+              <a:rPr lang="en-US" dirty="0"/>
+              <a:t>E.g. foot size:</a:t>
+            </a:r>
+          </a:p>
+          <a:p>
+            <a:pPr lvl="1"/>
+            <a:r>
+              <a:rPr lang="en-US" dirty="0"/>
+              <a:t>Continuous – cm measurements for medical data. </a:t>
+            </a:r>
+          </a:p>
+          <a:p>
+            <a:pPr lvl="1"/>
+            <a:r>
+              <a:rPr lang="en-US" dirty="0"/>
+              <a:t>Discreet – size measurements for shoe production. </a:t>
+            </a:r>
+          </a:p>
+          <a:p>
+            <a:r>
+              <a:rPr lang="en-US" dirty="0"/>
+              <a:t>We want (in all respects) to model reality best. </a:t>
+            </a:r>
+          </a:p>
+          <a:p>
+            <a:pPr lvl="1"/>
+            <a:r>
+              <a:rPr lang="en-US" dirty="0"/>
+              <a:t>The goal is to simulate the real thing for predictions. </a:t>
+            </a:r>
+          </a:p>
+          <a:p>
+            <a:pPr lvl="1"/>
+            <a:r>
+              <a:rPr lang="en-US" dirty="0"/>
+              <a:t>“Math” rules are practical/logistical. </a:t>
             </a:r>
           </a:p>
           <a:p>
@@ -7220,10 +9099,40 @@
           </a:p>
         </p:txBody>
       </p:sp>
+      <p:pic>
+        <p:nvPicPr>
+          <p:cNvPr id="4" name="Picture 3" descr="Discrete and Continuous Data">
+            <a:extLst>
+              <a:ext uri="{FF2B5EF4-FFF2-40B4-BE49-F238E27FC236}">
+                <a16:creationId xmlns:a16="http://schemas.microsoft.com/office/drawing/2014/main" id="{3392B5FF-B19B-3BC2-458A-CA79B3C786A2}"/>
+              </a:ext>
+            </a:extLst>
+          </p:cNvPr>
+          <p:cNvPicPr>
+            <a:picLocks noChangeAspect="1"/>
+          </p:cNvPicPr>
+          <p:nvPr/>
+        </p:nvPicPr>
+        <p:blipFill>
+          <a:blip r:embed="rId2"/>
+          <a:stretch>
+            <a:fillRect/>
+          </a:stretch>
+        </p:blipFill>
+        <p:spPr>
+          <a:xfrm>
+            <a:off x="-1" y="2015731"/>
+            <a:ext cx="6154785" cy="3612591"/>
+          </a:xfrm>
+          <a:prstGeom prst="rect">
+            <a:avLst/>
+          </a:prstGeom>
+        </p:spPr>
+      </p:pic>
     </p:spTree>
     <p:extLst>
       <p:ext uri="{BB962C8B-B14F-4D97-AF65-F5344CB8AC3E}">
-        <p14:creationId xmlns:p14="http://schemas.microsoft.com/office/powerpoint/2010/main" val="3240744396"/>
+        <p14:creationId xmlns:p14="http://schemas.microsoft.com/office/powerpoint/2010/main" val="2655592059"/>
       </p:ext>
     </p:extLst>
   </p:cSld>
@@ -7255,7 +9164,7 @@
           <p:cNvPr id="2" name="Title 1">
             <a:extLst>
               <a:ext uri="{FF2B5EF4-FFF2-40B4-BE49-F238E27FC236}">
-                <a16:creationId xmlns:a16="http://schemas.microsoft.com/office/drawing/2014/main" id="{1147EF03-8FEA-2C42-A25D-1BF98613C5AA}"/>
+                <a16:creationId xmlns:a16="http://schemas.microsoft.com/office/drawing/2014/main" id="{20CBA4B9-B9F1-A01E-872A-B5D460BF56E4}"/>
               </a:ext>
             </a:extLst>
           </p:cNvPr>
@@ -7273,7 +9182,7 @@
           <a:p>
             <a:r>
               <a:rPr lang="en-US" dirty="0"/>
-              <a:t>Probability Notation</a:t>
+              <a:t>Discreet Example - Poisson</a:t>
             </a:r>
           </a:p>
         </p:txBody>
@@ -7283,7 +9192,7 @@
           <p:cNvPr id="3" name="Content Placeholder 2">
             <a:extLst>
               <a:ext uri="{FF2B5EF4-FFF2-40B4-BE49-F238E27FC236}">
-                <a16:creationId xmlns:a16="http://schemas.microsoft.com/office/drawing/2014/main" id="{D4B34D7C-4418-D44A-9722-960449F34C2F}"/>
+                <a16:creationId xmlns:a16="http://schemas.microsoft.com/office/drawing/2014/main" id="{AA062A48-76D1-6429-0C8C-818D1C60915F}"/>
               </a:ext>
             </a:extLst>
           </p:cNvPr>
@@ -7294,62 +9203,100 @@
             <p:ph idx="1"/>
           </p:nvPr>
         </p:nvSpPr>
-        <p:spPr/>
-        <p:txBody>
-          <a:bodyPr/>
-          <a:lstStyle/>
-          <a:p>
-            <a:r>
-              <a:rPr lang="en-US" dirty="0"/>
-              <a:t>P(A) = Probability that A is true. </a:t>
-            </a:r>
-          </a:p>
-          <a:p>
-            <a:r>
-              <a:rPr lang="en-US" dirty="0"/>
-              <a:t>P(A and B) = P(A) * P(B). Probability that A and B are true. </a:t>
-            </a:r>
-          </a:p>
-          <a:p>
-            <a:r>
-              <a:rPr lang="en-US" dirty="0"/>
-              <a:t>P(A or B) = P(A) + P(B). Probability that A or B are true. </a:t>
-            </a:r>
-          </a:p>
-          <a:p>
-            <a:r>
-              <a:rPr lang="en-US" dirty="0"/>
-              <a:t>P(A</a:t>
-            </a:r>
-            <a:r>
-              <a:rPr lang="en-US" baseline="30000" dirty="0"/>
-              <a:t>c</a:t>
-            </a:r>
-            <a:r>
-              <a:rPr lang="en-US" dirty="0"/>
-              <a:t>) = 1-P(A) = P(not A). Probability that is is false. </a:t>
-            </a:r>
-          </a:p>
-          <a:p>
-            <a:r>
-              <a:rPr lang="en-US" dirty="0"/>
-              <a:t>Simple probability assumes mutual exclusivity (only one is true), and one thing is true. </a:t>
-            </a:r>
-          </a:p>
-          <a:p>
-            <a:pPr lvl="1"/>
-            <a:r>
-              <a:rPr lang="en-US"/>
-              <a:t>P(A and B) = 0</a:t>
-            </a:r>
-            <a:endParaRPr lang="en-US" dirty="0"/>
-          </a:p>
-        </p:txBody>
-      </p:sp>
+        <p:spPr>
+          <a:xfrm>
+            <a:off x="1" y="1853754"/>
+            <a:ext cx="5860716" cy="3612591"/>
+          </a:xfrm>
+        </p:spPr>
+        <p:txBody>
+          <a:bodyPr/>
+          <a:lstStyle/>
+          <a:p>
+            <a:r>
+              <a:rPr lang="en-US" dirty="0"/>
+              <a:t>Poisson distributions are discreet, often used for things like goals, customers per hour, or other things that happen regularly but unpredictably. </a:t>
+            </a:r>
+          </a:p>
+          <a:p>
+            <a:r>
+              <a:rPr lang="en-US" dirty="0"/>
+              <a:t>Estimator is the mean – expected events per time.</a:t>
+            </a:r>
+          </a:p>
+          <a:p>
+            <a:pPr lvl="1"/>
+            <a:r>
+              <a:rPr lang="en-US" dirty="0"/>
+              <a:t>Ensure time steps are consistent. </a:t>
+            </a:r>
+          </a:p>
+        </p:txBody>
+      </p:sp>
+      <p:pic>
+        <p:nvPicPr>
+          <p:cNvPr id="4" name="Picture 3" descr="Poisson Distribution">
+            <a:extLst>
+              <a:ext uri="{FF2B5EF4-FFF2-40B4-BE49-F238E27FC236}">
+                <a16:creationId xmlns:a16="http://schemas.microsoft.com/office/drawing/2014/main" id="{73B9BFA5-45E2-04D4-B17F-46F8AD030E06}"/>
+              </a:ext>
+            </a:extLst>
+          </p:cNvPr>
+          <p:cNvPicPr>
+            <a:picLocks noChangeAspect="1"/>
+          </p:cNvPicPr>
+          <p:nvPr/>
+        </p:nvPicPr>
+        <p:blipFill>
+          <a:blip r:embed="rId2"/>
+          <a:stretch>
+            <a:fillRect/>
+          </a:stretch>
+        </p:blipFill>
+        <p:spPr>
+          <a:xfrm>
+            <a:off x="5860716" y="2186667"/>
+            <a:ext cx="6331284" cy="3376685"/>
+          </a:xfrm>
+          <a:prstGeom prst="rect">
+            <a:avLst/>
+          </a:prstGeom>
+        </p:spPr>
+      </p:pic>
+      <p:pic>
+        <p:nvPicPr>
+          <p:cNvPr id="5" name="Picture 4" descr="Poisson Distribution (video lessons, examples and solutions)">
+            <a:extLst>
+              <a:ext uri="{FF2B5EF4-FFF2-40B4-BE49-F238E27FC236}">
+                <a16:creationId xmlns:a16="http://schemas.microsoft.com/office/drawing/2014/main" id="{136B4BFA-C595-16D5-F2AF-56367CE4F3E1}"/>
+              </a:ext>
+            </a:extLst>
+          </p:cNvPr>
+          <p:cNvPicPr>
+            <a:picLocks noChangeAspect="1"/>
+          </p:cNvPicPr>
+          <p:nvPr/>
+        </p:nvPicPr>
+        <p:blipFill>
+          <a:blip r:embed="rId3"/>
+          <a:stretch>
+            <a:fillRect/>
+          </a:stretch>
+        </p:blipFill>
+        <p:spPr>
+          <a:xfrm>
+            <a:off x="389289" y="4023966"/>
+            <a:ext cx="5146538" cy="2663334"/>
+          </a:xfrm>
+          <a:prstGeom prst="rect">
+            <a:avLst/>
+          </a:prstGeom>
+        </p:spPr>
+      </p:pic>
     </p:spTree>
     <p:extLst>
       <p:ext uri="{BB962C8B-B14F-4D97-AF65-F5344CB8AC3E}">
-        <p14:creationId xmlns:p14="http://schemas.microsoft.com/office/powerpoint/2010/main" val="4279640077"/>
+        <p14:creationId xmlns:p14="http://schemas.microsoft.com/office/powerpoint/2010/main" val="2905943212"/>
       </p:ext>
     </p:extLst>
   </p:cSld>
@@ -7381,7 +9328,7 @@
           <p:cNvPr id="2" name="Title 1">
             <a:extLst>
               <a:ext uri="{FF2B5EF4-FFF2-40B4-BE49-F238E27FC236}">
-                <a16:creationId xmlns:a16="http://schemas.microsoft.com/office/drawing/2014/main" id="{67D5F4AB-0184-BAC1-DEFE-CAD595CCF950}"/>
+                <a16:creationId xmlns:a16="http://schemas.microsoft.com/office/drawing/2014/main" id="{79FBC0AD-0ECB-9479-AA20-339F1646C441}"/>
               </a:ext>
             </a:extLst>
           </p:cNvPr>
@@ -7392,14 +9339,19 @@
             <p:ph type="title"/>
           </p:nvPr>
         </p:nvSpPr>
-        <p:spPr/>
-        <p:txBody>
-          <a:bodyPr/>
-          <a:lstStyle/>
-          <a:p>
-            <a:r>
-              <a:rPr lang="en-US" dirty="0"/>
-              <a:t>Probabilistic Statistics</a:t>
+        <p:spPr>
+          <a:xfrm>
+            <a:off x="4028303" y="804519"/>
+            <a:ext cx="7026551" cy="1049235"/>
+          </a:xfrm>
+        </p:spPr>
+        <p:txBody>
+          <a:bodyPr/>
+          <a:lstStyle/>
+          <a:p>
+            <a:r>
+              <a:rPr lang="en-US" dirty="0"/>
+              <a:t>Binomial</a:t>
             </a:r>
           </a:p>
         </p:txBody>
@@ -7409,7 +9361,7 @@
           <p:cNvPr id="3" name="Content Placeholder 2">
             <a:extLst>
               <a:ext uri="{FF2B5EF4-FFF2-40B4-BE49-F238E27FC236}">
-                <a16:creationId xmlns:a16="http://schemas.microsoft.com/office/drawing/2014/main" id="{1A469DAE-7237-DEE6-98EB-6A64F4CDA025}"/>
+                <a16:creationId xmlns:a16="http://schemas.microsoft.com/office/drawing/2014/main" id="{C6833523-42B7-D560-AEE5-BB23BBDD3593}"/>
               </a:ext>
             </a:extLst>
           </p:cNvPr>
@@ -7422,98 +9374,133 @@
         </p:nvSpPr>
         <p:spPr>
           <a:xfrm>
-            <a:off x="4778298" y="2015732"/>
-            <a:ext cx="7413702" cy="4037749"/>
-          </a:xfrm>
-        </p:spPr>
-        <p:txBody>
-          <a:bodyPr/>
-          <a:lstStyle/>
-          <a:p>
-            <a:r>
-              <a:rPr lang="en-US" dirty="0"/>
-              <a:t>With our datasets, we often look at density – the percentage that falls in M range. </a:t>
-            </a:r>
-          </a:p>
-          <a:p>
-            <a:pPr lvl="1"/>
-            <a:r>
-              <a:rPr lang="en-US" dirty="0"/>
-              <a:t>Looking backwards, this is a percentage. </a:t>
-            </a:r>
-          </a:p>
-          <a:p>
-            <a:pPr lvl="1"/>
-            <a:r>
-              <a:rPr lang="en-US" dirty="0"/>
-              <a:t>Looking forwards, this is a likelihood. </a:t>
-            </a:r>
-          </a:p>
-          <a:p>
-            <a:r>
-              <a:rPr lang="en-US" dirty="0"/>
-              <a:t>Our distribution defines the probability that a new item on that distribution will be X. </a:t>
-            </a:r>
-          </a:p>
-          <a:p>
-            <a:r>
-              <a:rPr lang="en-US" dirty="0"/>
-              <a:t>If we’ve chosen a model that actually matches the data, all new occurrences should follow the defined pattern. </a:t>
+            <a:off x="4908884" y="1853754"/>
+            <a:ext cx="6145970" cy="4199727"/>
+          </a:xfrm>
+        </p:spPr>
+        <p:txBody>
+          <a:bodyPr/>
+          <a:lstStyle/>
+          <a:p>
+            <a:r>
+              <a:rPr lang="en-US" dirty="0"/>
+              <a:t>Binomial distributions model </a:t>
+            </a:r>
+            <a:r>
+              <a:rPr lang="en-US" i="1" dirty="0"/>
+              <a:t>multiple attempts </a:t>
+            </a:r>
+            <a:r>
+              <a:rPr lang="en-US" dirty="0"/>
+              <a:t>of a two-outcome process. </a:t>
+            </a:r>
+          </a:p>
+          <a:p>
+            <a:pPr lvl="1"/>
+            <a:r>
+              <a:rPr lang="en-US" dirty="0"/>
+              <a:t>E.g. coin flip, T/F. </a:t>
+            </a:r>
+          </a:p>
+          <a:p>
+            <a:pPr lvl="1"/>
+            <a:r>
+              <a:rPr lang="en-US" dirty="0"/>
+              <a:t>10 flips, # heads – many 5s, fewer 4/6, 7/3, 8/2, 9/1, 10/0 is exceedingly rare. </a:t>
+            </a:r>
+          </a:p>
+          <a:p>
+            <a:r>
+              <a:rPr lang="en-US" dirty="0"/>
+              <a:t>Histogram shows (for many flips):</a:t>
+            </a:r>
+          </a:p>
+          <a:p>
+            <a:pPr lvl="1"/>
+            <a:r>
+              <a:rPr lang="en-US" dirty="0"/>
+              <a:t>X = # of successes. </a:t>
+            </a:r>
+          </a:p>
+          <a:p>
+            <a:pPr lvl="1"/>
+            <a:r>
+              <a:rPr lang="en-US" dirty="0"/>
+              <a:t>Y = count or density. </a:t>
+            </a:r>
+          </a:p>
+          <a:p>
+            <a:r>
+              <a:rPr lang="en-US" dirty="0"/>
+              <a:t>Estimator is the probability of one event. </a:t>
             </a:r>
           </a:p>
         </p:txBody>
       </p:sp>
       <p:pic>
         <p:nvPicPr>
-          <p:cNvPr id="7170" name="Picture 2" descr="Intro to Statistics: Part 6: Probability Density Functions — L0ng  C0nnect10ns">
-            <a:extLst>
-              <a:ext uri="{FF2B5EF4-FFF2-40B4-BE49-F238E27FC236}">
-                <a16:creationId xmlns:a16="http://schemas.microsoft.com/office/drawing/2014/main" id="{A7279E28-37EA-932D-E446-5798D2F76391}"/>
+          <p:cNvPr id="4" name="Picture 3" descr="Binomial distribution – probability of number of successes | Mathivo">
+            <a:extLst>
+              <a:ext uri="{FF2B5EF4-FFF2-40B4-BE49-F238E27FC236}">
+                <a16:creationId xmlns:a16="http://schemas.microsoft.com/office/drawing/2014/main" id="{B27D00DA-7376-6048-92EF-E0BD32B32E58}"/>
               </a:ext>
             </a:extLst>
           </p:cNvPr>
           <p:cNvPicPr>
-            <a:picLocks noChangeAspect="1" noChangeArrowheads="1"/>
+            <a:picLocks noChangeAspect="1"/>
           </p:cNvPicPr>
           <p:nvPr/>
         </p:nvPicPr>
         <p:blipFill>
-          <a:blip r:embed="rId2">
-            <a:extLst>
-              <a:ext uri="{28A0092B-C50C-407E-A947-70E740481C1C}">
-                <a14:useLocalDpi xmlns:a14="http://schemas.microsoft.com/office/drawing/2010/main" val="0"/>
-              </a:ext>
-            </a:extLst>
-          </a:blip>
-          <a:srcRect/>
+          <a:blip r:embed="rId2"/>
           <a:stretch>
             <a:fillRect/>
           </a:stretch>
         </p:blipFill>
-        <p:spPr bwMode="auto">
-          <a:xfrm>
-            <a:off x="0" y="1750741"/>
-            <a:ext cx="4778298" cy="4778298"/>
+        <p:spPr>
+          <a:xfrm>
+            <a:off x="0" y="2542579"/>
+            <a:ext cx="5486400" cy="3657600"/>
           </a:xfrm>
           <a:prstGeom prst="rect">
             <a:avLst/>
           </a:prstGeom>
-          <a:noFill/>
-          <a:extLst>
-            <a:ext uri="{909E8E84-426E-40DD-AFC4-6F175D3DCCD1}">
-              <a14:hiddenFill xmlns:a14="http://schemas.microsoft.com/office/drawing/2010/main">
-                <a:solidFill>
-                  <a:srgbClr val="FFFFFF"/>
-                </a:solidFill>
-              </a14:hiddenFill>
-            </a:ext>
-          </a:extLst>
+        </p:spPr>
+      </p:pic>
+      <p:pic>
+        <p:nvPicPr>
+          <p:cNvPr id="5" name="Picture 4" descr="Binomial Distribution (examples, solutions, formulas, videos)">
+            <a:extLst>
+              <a:ext uri="{FF2B5EF4-FFF2-40B4-BE49-F238E27FC236}">
+                <a16:creationId xmlns:a16="http://schemas.microsoft.com/office/drawing/2014/main" id="{BC41A49C-A925-C9D1-4FF5-9F11FE0B2606}"/>
+              </a:ext>
+            </a:extLst>
+          </p:cNvPr>
+          <p:cNvPicPr>
+            <a:picLocks noChangeAspect="1"/>
+          </p:cNvPicPr>
+          <p:nvPr/>
+        </p:nvPicPr>
+        <p:blipFill>
+          <a:blip r:embed="rId3"/>
+          <a:stretch>
+            <a:fillRect/>
+          </a:stretch>
+        </p:blipFill>
+        <p:spPr>
+          <a:xfrm>
+            <a:off x="1" y="0"/>
+            <a:ext cx="4028302" cy="2777505"/>
+          </a:xfrm>
+          <a:prstGeom prst="rect">
+            <a:avLst/>
+          </a:prstGeom>
         </p:spPr>
       </p:pic>
     </p:spTree>
     <p:extLst>
       <p:ext uri="{BB962C8B-B14F-4D97-AF65-F5344CB8AC3E}">
-        <p14:creationId xmlns:p14="http://schemas.microsoft.com/office/powerpoint/2010/main" val="1387545396"/>
+        <p14:creationId xmlns:p14="http://schemas.microsoft.com/office/powerpoint/2010/main" val="1580370661"/>
       </p:ext>
     </p:extLst>
   </p:cSld>
